--- a/Geo_Spatial.pptx
+++ b/Geo_Spatial.pptx
@@ -5,7 +5,7 @@
     <p:sldMasterId id="2147483659" r:id="rId1"/>
   </p:sldMasterIdLst>
   <p:notesMasterIdLst>
-    <p:notesMasterId r:id="rId10"/>
+    <p:notesMasterId r:id="rId11"/>
   </p:notesMasterIdLst>
   <p:sldIdLst>
     <p:sldId id="310" r:id="rId2"/>
@@ -16,6 +16,7 @@
     <p:sldId id="316" r:id="rId7"/>
     <p:sldId id="313" r:id="rId8"/>
     <p:sldId id="317" r:id="rId9"/>
+    <p:sldId id="318" r:id="rId10"/>
   </p:sldIdLst>
   <p:sldSz cx="12192000" cy="6858000"/>
   <p:notesSz cx="6858000" cy="9144000"/>
@@ -17956,6 +17957,167 @@
 </p:sld>
 </file>
 
+<file path=ppt/slides/slide9.xml><?xml version="1.0" encoding="utf-8"?>
+<p:sld xmlns:a="http://schemas.openxmlformats.org/drawingml/2006/main" xmlns:r="http://schemas.openxmlformats.org/officeDocument/2006/relationships" xmlns:p="http://schemas.openxmlformats.org/presentationml/2006/main">
+  <p:cSld>
+    <p:spTree>
+      <p:nvGrpSpPr>
+        <p:cNvPr id="1" name=""/>
+        <p:cNvGrpSpPr/>
+        <p:nvPr/>
+      </p:nvGrpSpPr>
+      <p:grpSpPr>
+        <a:xfrm>
+          <a:off x="0" y="0"/>
+          <a:ext cx="0" cy="0"/>
+          <a:chOff x="0" y="0"/>
+          <a:chExt cx="0" cy="0"/>
+        </a:xfrm>
+      </p:grpSpPr>
+      <p:sp>
+        <p:nvSpPr>
+          <p:cNvPr id="2" name="TextBox 1">
+            <a:extLst>
+              <a:ext uri="{FF2B5EF4-FFF2-40B4-BE49-F238E27FC236}">
+                <a16:creationId xmlns:a16="http://schemas.microsoft.com/office/drawing/2014/main" id="{01A3B75B-06F4-9045-940A-F9A4F7A990BD}"/>
+              </a:ext>
+            </a:extLst>
+          </p:cNvPr>
+          <p:cNvSpPr txBox="1"/>
+          <p:nvPr/>
+        </p:nvSpPr>
+        <p:spPr>
+          <a:xfrm>
+            <a:off x="344774" y="239843"/>
+            <a:ext cx="4916774" cy="307777"/>
+          </a:xfrm>
+          <a:prstGeom prst="rect">
+            <a:avLst/>
+          </a:prstGeom>
+          <a:noFill/>
+        </p:spPr>
+        <p:txBody>
+          <a:bodyPr wrap="square" rtlCol="0">
+            <a:spAutoFit/>
+          </a:bodyPr>
+          <a:lstStyle/>
+          <a:p>
+            <a:r>
+              <a:rPr lang="en-US" dirty="0"/>
+              <a:t>Azure and Geo Spatial</a:t>
+            </a:r>
+          </a:p>
+        </p:txBody>
+      </p:sp>
+      <p:sp>
+        <p:nvSpPr>
+          <p:cNvPr id="3" name="TextBox 2">
+            <a:extLst>
+              <a:ext uri="{FF2B5EF4-FFF2-40B4-BE49-F238E27FC236}">
+                <a16:creationId xmlns:a16="http://schemas.microsoft.com/office/drawing/2014/main" id="{BF6A5ACD-BE25-9E4D-8082-C733161F743A}"/>
+              </a:ext>
+            </a:extLst>
+          </p:cNvPr>
+          <p:cNvSpPr txBox="1"/>
+          <p:nvPr/>
+        </p:nvSpPr>
+        <p:spPr>
+          <a:xfrm>
+            <a:off x="599607" y="1199213"/>
+            <a:ext cx="7959777" cy="1815882"/>
+          </a:xfrm>
+          <a:prstGeom prst="rect">
+            <a:avLst/>
+          </a:prstGeom>
+          <a:noFill/>
+        </p:spPr>
+        <p:txBody>
+          <a:bodyPr wrap="square" rtlCol="0">
+            <a:spAutoFit/>
+          </a:bodyPr>
+          <a:lstStyle/>
+          <a:p>
+            <a:endParaRPr lang="en-US" dirty="0"/>
+          </a:p>
+          <a:p>
+            <a:r>
+              <a:rPr lang="en-US" dirty="0"/>
+              <a:t>    https://</a:t>
+            </a:r>
+            <a:r>
+              <a:rPr lang="en-US" dirty="0" err="1"/>
+              <a:t>azure.microsoft.com</a:t>
+            </a:r>
+            <a:r>
+              <a:rPr lang="en-US" dirty="0"/>
+              <a:t>/</a:t>
+            </a:r>
+            <a:r>
+              <a:rPr lang="en-US" dirty="0" err="1"/>
+              <a:t>en</a:t>
+            </a:r>
+            <a:r>
+              <a:rPr lang="en-US" dirty="0"/>
+              <a:t>-us/services/azure-maps/</a:t>
+            </a:r>
+          </a:p>
+          <a:p>
+            <a:endParaRPr lang="en-US" dirty="0"/>
+          </a:p>
+          <a:p>
+            <a:r>
+              <a:rPr lang="en-US" dirty="0"/>
+              <a:t>    https://</a:t>
+            </a:r>
+            <a:r>
+              <a:rPr lang="en-US" dirty="0" err="1"/>
+              <a:t>towardsdatascience.com</a:t>
+            </a:r>
+            <a:r>
+              <a:rPr lang="en-US" dirty="0"/>
+              <a:t>/geospatial-big-data-performance-tests-with-cosmos-db-and-data-enrichment-with-azure-synapse-257db7d29e41</a:t>
+            </a:r>
+          </a:p>
+          <a:p>
+            <a:endParaRPr lang="en-US" dirty="0"/>
+          </a:p>
+          <a:p>
+            <a:r>
+              <a:rPr lang="en-US" dirty="0"/>
+              <a:t>    https://</a:t>
+            </a:r>
+            <a:r>
+              <a:rPr lang="en-US" dirty="0" err="1"/>
+              <a:t>azure.microsoft.com</a:t>
+            </a:r>
+            <a:r>
+              <a:rPr lang="en-US" dirty="0"/>
+              <a:t>/</a:t>
+            </a:r>
+            <a:r>
+              <a:rPr lang="en-US" dirty="0" err="1"/>
+              <a:t>fr-fr</a:t>
+            </a:r>
+            <a:r>
+              <a:rPr lang="en-US" dirty="0"/>
+              <a:t>/blog/new-in-azure-stream-analytics-geospatial-functions-custom-code-and-lots-more/</a:t>
+            </a:r>
+          </a:p>
+        </p:txBody>
+      </p:sp>
+    </p:spTree>
+    <p:extLst>
+      <p:ext uri="{BB962C8B-B14F-4D97-AF65-F5344CB8AC3E}">
+        <p14:creationId xmlns:p14="http://schemas.microsoft.com/office/powerpoint/2010/main" val="3404279295"/>
+      </p:ext>
+    </p:extLst>
+  </p:cSld>
+  <p:clrMapOvr>
+    <a:masterClrMapping/>
+  </p:clrMapOvr>
+</p:sld>
+</file>
+
 <file path=ppt/theme/theme1.xml><?xml version="1.0" encoding="utf-8"?>
 <a:theme xmlns:a="http://schemas.openxmlformats.org/drawingml/2006/main" name="Office Theme">
   <a:themeElements>

--- a/Geo_Spatial.pptx
+++ b/Geo_Spatial.pptx
@@ -5,18 +5,20 @@
     <p:sldMasterId id="2147483659" r:id="rId1"/>
   </p:sldMasterIdLst>
   <p:notesMasterIdLst>
-    <p:notesMasterId r:id="rId11"/>
+    <p:notesMasterId r:id="rId13"/>
   </p:notesMasterIdLst>
   <p:sldIdLst>
     <p:sldId id="310" r:id="rId2"/>
-    <p:sldId id="311" r:id="rId3"/>
-    <p:sldId id="314" r:id="rId4"/>
-    <p:sldId id="315" r:id="rId5"/>
-    <p:sldId id="312" r:id="rId6"/>
-    <p:sldId id="316" r:id="rId7"/>
-    <p:sldId id="313" r:id="rId8"/>
-    <p:sldId id="317" r:id="rId9"/>
-    <p:sldId id="318" r:id="rId10"/>
+    <p:sldId id="319" r:id="rId3"/>
+    <p:sldId id="320" r:id="rId4"/>
+    <p:sldId id="321" r:id="rId5"/>
+    <p:sldId id="322" r:id="rId6"/>
+    <p:sldId id="323" r:id="rId7"/>
+    <p:sldId id="324" r:id="rId8"/>
+    <p:sldId id="325" r:id="rId9"/>
+    <p:sldId id="326" r:id="rId10"/>
+    <p:sldId id="327" r:id="rId11"/>
+    <p:sldId id="328" r:id="rId12"/>
   </p:sldIdLst>
   <p:sldSz cx="12192000" cy="6858000"/>
   <p:notesSz cx="6858000" cy="9144000"/>
@@ -1532,7 +1534,7 @@
                 <a:cs typeface="Calibri"/>
                 <a:sym typeface="Calibri"/>
               </a:rPr>
-              <a:t>3</a:t>
+              <a:t>9</a:t>
             </a:fld>
             <a:endParaRPr lang="en-US" sz="1200" b="0" i="0" u="none" strike="noStrike" cap="none">
               <a:solidFill>
@@ -1549,7 +1551,7 @@
     </p:spTree>
     <p:extLst>
       <p:ext uri="{BB962C8B-B14F-4D97-AF65-F5344CB8AC3E}">
-        <p14:creationId xmlns:p14="http://schemas.microsoft.com/office/powerpoint/2010/main" val="694185706"/>
+        <p14:creationId xmlns:p14="http://schemas.microsoft.com/office/powerpoint/2010/main" val="4275676318"/>
       </p:ext>
     </p:extLst>
   </p:cSld>
@@ -1641,7 +1643,7 @@
                 <a:cs typeface="Calibri"/>
                 <a:sym typeface="Calibri"/>
               </a:rPr>
-              <a:t>7</a:t>
+              <a:t>10</a:t>
             </a:fld>
             <a:endParaRPr lang="en-US" sz="1200" b="0" i="0" u="none" strike="noStrike" cap="none">
               <a:solidFill>
@@ -1658,7 +1660,7 @@
     </p:spTree>
     <p:extLst>
       <p:ext uri="{BB962C8B-B14F-4D97-AF65-F5344CB8AC3E}">
-        <p14:creationId xmlns:p14="http://schemas.microsoft.com/office/powerpoint/2010/main" val="4275676318"/>
+        <p14:creationId xmlns:p14="http://schemas.microsoft.com/office/powerpoint/2010/main" val="694185706"/>
       </p:ext>
     </p:extLst>
   </p:cSld>
@@ -14137,613 +14139,7 @@
 </p:sld>
 </file>
 
-<file path=ppt/slides/slide2.xml><?xml version="1.0" encoding="utf-8"?>
-<p:sld xmlns:a="http://schemas.openxmlformats.org/drawingml/2006/main" xmlns:r="http://schemas.openxmlformats.org/officeDocument/2006/relationships" xmlns:p="http://schemas.openxmlformats.org/presentationml/2006/main">
-  <p:cSld>
-    <p:spTree>
-      <p:nvGrpSpPr>
-        <p:cNvPr id="1" name=""/>
-        <p:cNvGrpSpPr/>
-        <p:nvPr/>
-      </p:nvGrpSpPr>
-      <p:grpSpPr>
-        <a:xfrm>
-          <a:off x="0" y="0"/>
-          <a:ext cx="0" cy="0"/>
-          <a:chOff x="0" y="0"/>
-          <a:chExt cx="0" cy="0"/>
-        </a:xfrm>
-      </p:grpSpPr>
-      <p:sp>
-        <p:nvSpPr>
-          <p:cNvPr id="4" name="TextBox 3">
-            <a:extLst>
-              <a:ext uri="{FF2B5EF4-FFF2-40B4-BE49-F238E27FC236}">
-                <a16:creationId xmlns:a16="http://schemas.microsoft.com/office/drawing/2014/main" id="{19F9DD96-D508-154F-8B1F-D0C67CD08442}"/>
-              </a:ext>
-            </a:extLst>
-          </p:cNvPr>
-          <p:cNvSpPr txBox="1"/>
-          <p:nvPr/>
-        </p:nvSpPr>
-        <p:spPr>
-          <a:xfrm>
-            <a:off x="134471" y="94129"/>
-            <a:ext cx="11766176" cy="6771084"/>
-          </a:xfrm>
-          <a:prstGeom prst="rect">
-            <a:avLst/>
-          </a:prstGeom>
-          <a:noFill/>
-        </p:spPr>
-        <p:txBody>
-          <a:bodyPr wrap="square" rtlCol="0">
-            <a:spAutoFit/>
-          </a:bodyPr>
-          <a:lstStyle/>
-          <a:p>
-            <a:r>
-              <a:rPr lang="en-US" dirty="0"/>
-              <a:t>Tools: </a:t>
-            </a:r>
-          </a:p>
-          <a:p>
-            <a:pPr marL="285750" indent="-285750">
-              <a:buFont typeface="Arial" panose="020B0604020202020204" pitchFamily="34" charset="0"/>
-              <a:buChar char="•"/>
-            </a:pPr>
-            <a:r>
-              <a:rPr lang="en-US" dirty="0"/>
-              <a:t>python, </a:t>
-            </a:r>
-            <a:r>
-              <a:rPr lang="en-US" dirty="0" err="1"/>
-              <a:t>numpy</a:t>
-            </a:r>
-            <a:r>
-              <a:rPr lang="en-US" dirty="0"/>
-              <a:t>, pandas</a:t>
-            </a:r>
-          </a:p>
-          <a:p>
-            <a:pPr marL="285750" indent="-285750">
-              <a:buFont typeface="Arial" panose="020B0604020202020204" pitchFamily="34" charset="0"/>
-              <a:buChar char="•"/>
-            </a:pPr>
-            <a:r>
-              <a:rPr lang="en-US" b="1" dirty="0" err="1">
-                <a:solidFill>
-                  <a:srgbClr val="FF0000"/>
-                </a:solidFill>
-              </a:rPr>
-              <a:t>GeoPandas</a:t>
-            </a:r>
-            <a:r>
-              <a:rPr lang="en-US" dirty="0"/>
-              <a:t> - </a:t>
-            </a:r>
-            <a:r>
-              <a:rPr lang="en-US" dirty="0">
-                <a:hlinkClick r:id="rId2"/>
-              </a:rPr>
-              <a:t>https://geopandas.org/</a:t>
-            </a:r>
-            <a:r>
-              <a:rPr lang="en-US" dirty="0"/>
-              <a:t>  - open source,  adds datatypes to allow spatial operations on geometric types (using shapely). </a:t>
-            </a:r>
-          </a:p>
-          <a:p>
-            <a:pPr marL="285750" indent="-285750">
-              <a:buFont typeface="Arial" panose="020B0604020202020204" pitchFamily="34" charset="0"/>
-              <a:buChar char="•"/>
-            </a:pPr>
-            <a:r>
-              <a:rPr lang="en-US" dirty="0"/>
-              <a:t>Shapely - </a:t>
-            </a:r>
-            <a:r>
-              <a:rPr lang="en-US" dirty="0">
-                <a:hlinkClick r:id="rId3"/>
-              </a:rPr>
-              <a:t>https://shapely.readthedocs.io/en/stable/</a:t>
-            </a:r>
-            <a:r>
-              <a:rPr lang="en-US" dirty="0"/>
-              <a:t> - manipulation and analysis of planar geometric objects</a:t>
-            </a:r>
-          </a:p>
-          <a:p>
-            <a:pPr marL="285750" indent="-285750">
-              <a:buFont typeface="Arial" panose="020B0604020202020204" pitchFamily="34" charset="0"/>
-              <a:buChar char="•"/>
-            </a:pPr>
-            <a:r>
-              <a:rPr lang="en-US" dirty="0"/>
-              <a:t>Fiona – </a:t>
-            </a:r>
-            <a:r>
-              <a:rPr lang="en-US" dirty="0">
-                <a:hlinkClick r:id="rId4"/>
-              </a:rPr>
-              <a:t>https://fiona.readthedocs.io/en/latest/</a:t>
-            </a:r>
-            <a:r>
-              <a:rPr lang="en-US" dirty="0"/>
-              <a:t> - read/write geo-data, modules to use </a:t>
-            </a:r>
-            <a:r>
-              <a:rPr lang="en-US" b="1" dirty="0">
-                <a:solidFill>
-                  <a:srgbClr val="0070C0"/>
-                </a:solidFill>
-              </a:rPr>
-              <a:t>GDAL</a:t>
-            </a:r>
-            <a:r>
-              <a:rPr lang="en-US" dirty="0"/>
-              <a:t> (Geospatial Data Abstraction Library).</a:t>
-            </a:r>
-          </a:p>
-          <a:p>
-            <a:pPr marL="285750" indent="-285750">
-              <a:buFont typeface="Arial" panose="020B0604020202020204" pitchFamily="34" charset="0"/>
-              <a:buChar char="•"/>
-            </a:pPr>
-            <a:r>
-              <a:rPr lang="en-US" dirty="0" err="1"/>
-              <a:t>descartes</a:t>
-            </a:r>
-            <a:r>
-              <a:rPr lang="en-US" dirty="0"/>
-              <a:t> – </a:t>
-            </a:r>
-            <a:r>
-              <a:rPr lang="en-US" dirty="0">
-                <a:hlinkClick r:id="rId5"/>
-              </a:rPr>
-              <a:t>https://pypi.org/project/descartes/</a:t>
-            </a:r>
-            <a:r>
-              <a:rPr lang="en-US" dirty="0"/>
-              <a:t> - Use Shapely or </a:t>
-            </a:r>
-            <a:r>
-              <a:rPr lang="en-US" dirty="0" err="1"/>
-              <a:t>GeoJSON</a:t>
-            </a:r>
-            <a:r>
-              <a:rPr lang="en-US" dirty="0"/>
-              <a:t>-like geometric objects as matplotlib paths and patches</a:t>
-            </a:r>
-          </a:p>
-          <a:p>
-            <a:pPr marL="285750" indent="-285750">
-              <a:buFont typeface="Arial" panose="020B0604020202020204" pitchFamily="34" charset="0"/>
-              <a:buChar char="•"/>
-            </a:pPr>
-            <a:r>
-              <a:rPr lang="en-US" dirty="0"/>
-              <a:t>matplotlib - </a:t>
-            </a:r>
-            <a:r>
-              <a:rPr lang="en-US" dirty="0">
-                <a:hlinkClick r:id="rId6"/>
-              </a:rPr>
-              <a:t>https://matplotlib.org/</a:t>
-            </a:r>
-            <a:r>
-              <a:rPr lang="en-US" dirty="0"/>
-              <a:t> - plotting</a:t>
-            </a:r>
-          </a:p>
-          <a:p>
-            <a:pPr marL="285750" indent="-285750">
-              <a:buFont typeface="Arial" panose="020B0604020202020204" pitchFamily="34" charset="0"/>
-              <a:buChar char="•"/>
-            </a:pPr>
-            <a:r>
-              <a:rPr lang="en-US" dirty="0" err="1"/>
-              <a:t>geoplot</a:t>
-            </a:r>
-            <a:r>
-              <a:rPr lang="en-US" dirty="0"/>
-              <a:t> - </a:t>
-            </a:r>
-            <a:r>
-              <a:rPr lang="en-US" dirty="0">
-                <a:hlinkClick r:id="rId7"/>
-              </a:rPr>
-              <a:t>https://residentmario.github.io/geoplot/index.html</a:t>
-            </a:r>
-            <a:r>
-              <a:rPr lang="en-US" dirty="0"/>
-              <a:t> - high-level Python geospatial plotting library</a:t>
-            </a:r>
-          </a:p>
-          <a:p>
-            <a:pPr marL="285750" indent="-285750">
-              <a:buFont typeface="Arial" panose="020B0604020202020204" pitchFamily="34" charset="0"/>
-              <a:buChar char="•"/>
-            </a:pPr>
-            <a:r>
-              <a:rPr lang="en-US" dirty="0" err="1"/>
-              <a:t>scikit</a:t>
-            </a:r>
-            <a:r>
-              <a:rPr lang="en-US" dirty="0"/>
-              <a:t>-learn - </a:t>
-            </a:r>
-            <a:r>
-              <a:rPr lang="en-US" dirty="0">
-                <a:hlinkClick r:id="rId8"/>
-              </a:rPr>
-              <a:t>https://scikit-learn.org</a:t>
-            </a:r>
-            <a:r>
-              <a:rPr lang="en-US" dirty="0"/>
-              <a:t> – very popular open-source Python library for Machine Learning</a:t>
-            </a:r>
-          </a:p>
-          <a:p>
-            <a:pPr marL="285750" indent="-285750">
-              <a:buFont typeface="Arial" panose="020B0604020202020204" pitchFamily="34" charset="0"/>
-              <a:buChar char="•"/>
-            </a:pPr>
-            <a:r>
-              <a:rPr lang="en-US" dirty="0"/>
-              <a:t>SciPy - </a:t>
-            </a:r>
-            <a:r>
-              <a:rPr lang="en-US" dirty="0">
-                <a:hlinkClick r:id="rId9"/>
-              </a:rPr>
-              <a:t>https://www.scipy.org/</a:t>
-            </a:r>
-            <a:r>
-              <a:rPr lang="en-US" dirty="0"/>
-              <a:t> - open-source Python library for math, science, and engineering</a:t>
-            </a:r>
-          </a:p>
-          <a:p>
-            <a:pPr marL="285750" indent="-285750">
-              <a:buFont typeface="Arial" panose="020B0604020202020204" pitchFamily="34" charset="0"/>
-              <a:buChar char="•"/>
-            </a:pPr>
-            <a:r>
-              <a:rPr lang="en-US" dirty="0" err="1"/>
-              <a:t>RTree</a:t>
-            </a:r>
-            <a:r>
-              <a:rPr lang="en-US" dirty="0"/>
-              <a:t> - </a:t>
-            </a:r>
-            <a:r>
-              <a:rPr lang="en-US" dirty="0">
-                <a:hlinkClick r:id="rId10"/>
-              </a:rPr>
-              <a:t>https://toblerity.org/rtree/</a:t>
-            </a:r>
-            <a:r>
-              <a:rPr lang="en-US" dirty="0"/>
-              <a:t> - a </a:t>
-            </a:r>
-            <a:r>
-              <a:rPr lang="en-US" dirty="0" err="1"/>
-              <a:t>ctypes</a:t>
-            </a:r>
-            <a:r>
-              <a:rPr lang="en-US" dirty="0"/>
-              <a:t> Python wrapper of </a:t>
-            </a:r>
-            <a:r>
-              <a:rPr lang="en-US" dirty="0" err="1"/>
-              <a:t>libspatialindex</a:t>
-            </a:r>
-            <a:r>
-              <a:rPr lang="en-US" dirty="0"/>
-              <a:t> for advanced spatial indexing features</a:t>
-            </a:r>
-          </a:p>
-          <a:p>
-            <a:pPr marL="285750" indent="-285750">
-              <a:buFont typeface="Arial" panose="020B0604020202020204" pitchFamily="34" charset="0"/>
-              <a:buChar char="•"/>
-            </a:pPr>
-            <a:r>
-              <a:rPr lang="en-US" dirty="0"/>
-              <a:t>GDAL - </a:t>
-            </a:r>
-            <a:r>
-              <a:rPr lang="en-US" dirty="0">
-                <a:hlinkClick r:id="rId11"/>
-              </a:rPr>
-              <a:t>https://gdal.org/</a:t>
-            </a:r>
-            <a:r>
-              <a:rPr lang="en-US" dirty="0"/>
-              <a:t> - translator library for raster and vector geospatial data formats</a:t>
-            </a:r>
-          </a:p>
-          <a:p>
-            <a:pPr marL="285750" indent="-285750">
-              <a:buFont typeface="Arial" panose="020B0604020202020204" pitchFamily="34" charset="0"/>
-              <a:buChar char="•"/>
-            </a:pPr>
-            <a:r>
-              <a:rPr lang="en-US" dirty="0" err="1"/>
-              <a:t>PySAL</a:t>
-            </a:r>
-            <a:r>
-              <a:rPr lang="en-US" dirty="0"/>
-              <a:t> - </a:t>
-            </a:r>
-            <a:r>
-              <a:rPr lang="en-US" dirty="0">
-                <a:hlinkClick r:id="rId12"/>
-              </a:rPr>
-              <a:t>https://pysal.org/</a:t>
-            </a:r>
-            <a:r>
-              <a:rPr lang="en-US" dirty="0"/>
-              <a:t> - Python Spatial Analysis Library</a:t>
-            </a:r>
-          </a:p>
-          <a:p>
-            <a:pPr marL="285750" indent="-285750">
-              <a:buFont typeface="Arial" panose="020B0604020202020204" pitchFamily="34" charset="0"/>
-              <a:buChar char="•"/>
-            </a:pPr>
-            <a:r>
-              <a:rPr lang="en-US" dirty="0" err="1"/>
-              <a:t>Missingno</a:t>
-            </a:r>
-            <a:r>
-              <a:rPr lang="en-US" dirty="0"/>
-              <a:t> - </a:t>
-            </a:r>
-            <a:r>
-              <a:rPr lang="en-US" dirty="0">
-                <a:hlinkClick r:id="rId13"/>
-              </a:rPr>
-              <a:t>https://github.com/ResidentMario/missingno</a:t>
-            </a:r>
-            <a:r>
-              <a:rPr lang="en-US" dirty="0"/>
-              <a:t> - missing data visualization module for Python</a:t>
-            </a:r>
-          </a:p>
-          <a:p>
-            <a:pPr marL="285750" indent="-285750">
-              <a:buFont typeface="Arial" panose="020B0604020202020204" pitchFamily="34" charset="0"/>
-              <a:buChar char="•"/>
-            </a:pPr>
-            <a:r>
-              <a:rPr lang="en-US" dirty="0"/>
-              <a:t>GEOJSON - </a:t>
-            </a:r>
-            <a:r>
-              <a:rPr lang="en-US" dirty="0">
-                <a:hlinkClick r:id="rId14"/>
-              </a:rPr>
-              <a:t>https://geojson.org/</a:t>
-            </a:r>
-            <a:r>
-              <a:rPr lang="en-US" dirty="0"/>
-              <a:t> , </a:t>
-            </a:r>
-            <a:r>
-              <a:rPr lang="en-US" dirty="0">
-                <a:hlinkClick r:id="rId15"/>
-              </a:rPr>
-              <a:t>https://tools.ietf.org/html/rfc7946</a:t>
-            </a:r>
-            <a:r>
-              <a:rPr lang="en-US" dirty="0"/>
-              <a:t> - open standard format (JSON) for representing simple geographical features and their non-spatial attributes. The features include points, line strings, polygons, and multi-part collections of these types.</a:t>
-            </a:r>
-          </a:p>
-          <a:p>
-            <a:pPr marL="285750" indent="-285750">
-              <a:buFont typeface="Arial" panose="020B0604020202020204" pitchFamily="34" charset="0"/>
-              <a:buChar char="•"/>
-            </a:pPr>
-            <a:r>
-              <a:rPr lang="en-US" dirty="0" err="1"/>
-              <a:t>geojson.io</a:t>
-            </a:r>
-            <a:r>
-              <a:rPr lang="en-US" dirty="0"/>
-              <a:t> - </a:t>
-            </a:r>
-            <a:r>
-              <a:rPr lang="en-US" dirty="0">
-                <a:hlinkClick r:id="rId16"/>
-              </a:rPr>
-              <a:t>http://geojson.io/</a:t>
-            </a:r>
-            <a:r>
-              <a:rPr lang="en-US" dirty="0"/>
-              <a:t> - a quick, simple tool for creating, viewing, and sharing maps. Supports </a:t>
-            </a:r>
-            <a:r>
-              <a:rPr lang="en-US" dirty="0" err="1"/>
-              <a:t>GeoJSON</a:t>
-            </a:r>
-            <a:r>
-              <a:rPr lang="en-US" dirty="0"/>
-              <a:t>, also accepts KML, GPX, CSV, GTFS, </a:t>
-            </a:r>
-            <a:r>
-              <a:rPr lang="en-US" dirty="0" err="1"/>
-              <a:t>TopoJSON</a:t>
-            </a:r>
-            <a:r>
-              <a:rPr lang="en-US" dirty="0"/>
-              <a:t>, and other formats.</a:t>
-            </a:r>
-          </a:p>
-          <a:p>
-            <a:pPr marL="285750" indent="-285750">
-              <a:buFont typeface="Arial" panose="020B0604020202020204" pitchFamily="34" charset="0"/>
-              <a:buChar char="•"/>
-            </a:pPr>
-            <a:r>
-              <a:rPr lang="en-US" dirty="0" err="1"/>
-              <a:t>PostGIS</a:t>
-            </a:r>
-            <a:r>
-              <a:rPr lang="en-US" dirty="0"/>
-              <a:t> - </a:t>
-            </a:r>
-            <a:r>
-              <a:rPr lang="en-US" dirty="0">
-                <a:hlinkClick r:id="rId17"/>
-              </a:rPr>
-              <a:t>https://postgis.net/</a:t>
-            </a:r>
-            <a:r>
-              <a:rPr lang="en-US" dirty="0"/>
-              <a:t> - open source software (extension) which adds support for geographic objects to the PostgreSQL database.</a:t>
-            </a:r>
-          </a:p>
-          <a:p>
-            <a:pPr marL="285750" indent="-285750">
-              <a:buFont typeface="Arial" panose="020B0604020202020204" pitchFamily="34" charset="0"/>
-              <a:buChar char="•"/>
-            </a:pPr>
-            <a:r>
-              <a:rPr lang="en-US" dirty="0" err="1"/>
-              <a:t>Sequelize</a:t>
-            </a:r>
-            <a:r>
-              <a:rPr lang="en-US" dirty="0"/>
-              <a:t> - </a:t>
-            </a:r>
-            <a:r>
-              <a:rPr lang="en-US" dirty="0">
-                <a:hlinkClick r:id="rId18"/>
-              </a:rPr>
-              <a:t>https://sequelize.org/</a:t>
-            </a:r>
-            <a:r>
-              <a:rPr lang="en-US" dirty="0"/>
-              <a:t> - a promise-based Node.js ORM for Postgres, MySQL, MariaDB, SQLite and Microsoft SQL Server.</a:t>
-            </a:r>
-          </a:p>
-          <a:p>
-            <a:pPr marL="285750" indent="-285750">
-              <a:buFont typeface="Arial" panose="020B0604020202020204" pitchFamily="34" charset="0"/>
-              <a:buChar char="•"/>
-            </a:pPr>
-            <a:endParaRPr lang="en-US" dirty="0"/>
-          </a:p>
-          <a:p>
-            <a:pPr marL="285750" indent="-285750">
-              <a:buFont typeface="Arial" panose="020B0604020202020204" pitchFamily="34" charset="0"/>
-              <a:buChar char="•"/>
-            </a:pPr>
-            <a:r>
-              <a:rPr lang="en-US" dirty="0"/>
-              <a:t>deep learning</a:t>
-            </a:r>
-          </a:p>
-          <a:p>
-            <a:pPr marL="285750" indent="-285750">
-              <a:buFont typeface="Arial" panose="020B0604020202020204" pitchFamily="34" charset="0"/>
-              <a:buChar char="•"/>
-            </a:pPr>
-            <a:r>
-              <a:rPr lang="en-US" dirty="0"/>
-              <a:t>spatial clustering, temporal clustering, predictions</a:t>
-            </a:r>
-          </a:p>
-          <a:p>
-            <a:pPr marL="285750" indent="-285750">
-              <a:buFont typeface="Arial" panose="020B0604020202020204" pitchFamily="34" charset="0"/>
-              <a:buChar char="•"/>
-            </a:pPr>
-            <a:r>
-              <a:rPr lang="en-US" dirty="0"/>
-              <a:t>optimization problems (shortest path, etc.)</a:t>
-            </a:r>
-          </a:p>
-          <a:p>
-            <a:pPr marL="285750" indent="-285750">
-              <a:buFont typeface="Arial" panose="020B0604020202020204" pitchFamily="34" charset="0"/>
-              <a:buChar char="•"/>
-            </a:pPr>
-            <a:endParaRPr lang="en-US" dirty="0"/>
-          </a:p>
-          <a:p>
-            <a:pPr marL="285750" indent="-285750">
-              <a:buFont typeface="Arial" panose="020B0604020202020204" pitchFamily="34" charset="0"/>
-              <a:buChar char="•"/>
-            </a:pPr>
-            <a:r>
-              <a:rPr lang="en-US" dirty="0"/>
-              <a:t>Problem - combining different data sources, converting to the same spatial support format.</a:t>
-            </a:r>
-          </a:p>
-          <a:p>
-            <a:pPr marL="285750" indent="-285750">
-              <a:buFont typeface="Arial" panose="020B0604020202020204" pitchFamily="34" charset="0"/>
-              <a:buChar char="•"/>
-            </a:pPr>
-            <a:endParaRPr lang="en-US" dirty="0"/>
-          </a:p>
-          <a:p>
-            <a:pPr marL="285750" indent="-285750">
-              <a:buFont typeface="Arial" panose="020B0604020202020204" pitchFamily="34" charset="0"/>
-              <a:buChar char="•"/>
-            </a:pPr>
-            <a:r>
-              <a:rPr lang="en-US" b="1" dirty="0" err="1">
-                <a:solidFill>
-                  <a:srgbClr val="FF0000"/>
-                </a:solidFill>
-              </a:rPr>
-              <a:t>Gogle</a:t>
-            </a:r>
-            <a:r>
-              <a:rPr lang="en-US" b="1" dirty="0">
-                <a:solidFill>
-                  <a:srgbClr val="FF0000"/>
-                </a:solidFill>
-              </a:rPr>
-              <a:t> Earth Engine</a:t>
-            </a:r>
-            <a:r>
-              <a:rPr lang="en-US" dirty="0"/>
-              <a:t> - </a:t>
-            </a:r>
-            <a:r>
-              <a:rPr lang="en-US" dirty="0">
-                <a:hlinkClick r:id="rId19"/>
-              </a:rPr>
-              <a:t>https://earthengine.google.com/</a:t>
-            </a:r>
-            <a:r>
-              <a:rPr lang="en-US" dirty="0"/>
-              <a:t> - multi-petabyte catalog of satellite imagery and geospatial datasets with planetary-scale analysis capabilities and makes it available for scientists, researchers, and developers to detect changes, map trends, and quantify differences on the Earth's surface</a:t>
-            </a:r>
-          </a:p>
-        </p:txBody>
-      </p:sp>
-    </p:spTree>
-    <p:extLst>
-      <p:ext uri="{BB962C8B-B14F-4D97-AF65-F5344CB8AC3E}">
-        <p14:creationId xmlns:p14="http://schemas.microsoft.com/office/powerpoint/2010/main" val="3265510284"/>
-      </p:ext>
-    </p:extLst>
-  </p:cSld>
-  <p:clrMapOvr>
-    <a:masterClrMapping/>
-  </p:clrMapOvr>
-</p:sld>
-</file>
-
-<file path=ppt/slides/slide3.xml><?xml version="1.0" encoding="utf-8"?>
+<file path=ppt/slides/slide10.xml><?xml version="1.0" encoding="utf-8"?>
 <p:sld xmlns:a="http://schemas.openxmlformats.org/drawingml/2006/main" xmlns:r="http://schemas.openxmlformats.org/officeDocument/2006/relationships" xmlns:p="http://schemas.openxmlformats.org/presentationml/2006/main">
   <p:cSld>
     <p:spTree>
@@ -14774,8 +14170,8 @@
         </p:nvSpPr>
         <p:spPr>
           <a:xfrm>
-            <a:off x="188259" y="107576"/>
-            <a:ext cx="4343400" cy="523220"/>
+            <a:off x="0" y="0"/>
+            <a:ext cx="5765800" cy="523220"/>
           </a:xfrm>
           <a:prstGeom prst="rect">
             <a:avLst/>
@@ -14790,7 +14186,7 @@
           <a:p>
             <a:r>
               <a:rPr lang="en-US" sz="2800" b="1" dirty="0"/>
-              <a:t>Spatial Data Structures</a:t>
+              <a:t>Search - Spatial Data Structures</a:t>
             </a:r>
           </a:p>
         </p:txBody>
@@ -14809,8 +14205,8 @@
         </p:nvSpPr>
         <p:spPr>
           <a:xfrm>
-            <a:off x="188259" y="726142"/>
-            <a:ext cx="7234517" cy="3539430"/>
+            <a:off x="251012" y="745207"/>
+            <a:ext cx="6291071" cy="3046988"/>
           </a:xfrm>
           <a:prstGeom prst="rect">
             <a:avLst/>
@@ -14824,50 +14220,58 @@
           <a:lstStyle/>
           <a:p>
             <a:r>
-              <a:rPr lang="en-US" dirty="0"/>
+              <a:rPr lang="en-US" sz="1200" dirty="0"/>
               <a:t> - </a:t>
             </a:r>
             <a:r>
-              <a:rPr lang="en-US" dirty="0">
+              <a:rPr lang="en-US" sz="1200" dirty="0">
                 <a:hlinkClick r:id="rId3"/>
               </a:rPr>
               <a:t>http://courses.cs.vt.edu/cs3114/Fall08/Quadtree.pdf</a:t>
             </a:r>
             <a:r>
-              <a:rPr lang="en-US" dirty="0"/>
+              <a:rPr lang="en-US" sz="1200" dirty="0"/>
               <a:t> </a:t>
             </a:r>
           </a:p>
           <a:p>
-            <a:endParaRPr lang="en-US" dirty="0"/>
-          </a:p>
-          <a:p>
-            <a:r>
-              <a:rPr lang="en-US" dirty="0"/>
-              <a:t>Problem – find objects within 10 miles radius. </a:t>
-            </a:r>
-          </a:p>
-          <a:p>
-            <a:r>
-              <a:rPr lang="en-US" dirty="0"/>
+            <a:endParaRPr lang="en-US" sz="1200" dirty="0"/>
+          </a:p>
+          <a:p>
+            <a:r>
+              <a:rPr lang="en-US" sz="1200" b="1" dirty="0">
+                <a:solidFill>
+                  <a:srgbClr val="FF0000"/>
+                </a:solidFill>
+              </a:rPr>
+              <a:t>Problem – find objects within 10 miles radius.</a:t>
+            </a:r>
+            <a:r>
+              <a:rPr lang="en-US" sz="1200" dirty="0"/>
+              <a:t> </a:t>
+            </a:r>
+          </a:p>
+          <a:p>
+            <a:r>
+              <a:rPr lang="en-US" sz="1200" dirty="0"/>
               <a:t>This is a search with a multidimensional search key (two </a:t>
             </a:r>
             <a:r>
-              <a:rPr lang="en-US" dirty="0" err="1"/>
+              <a:rPr lang="en-US" sz="1200" dirty="0" err="1"/>
               <a:t>coordintes</a:t>
             </a:r>
             <a:r>
-              <a:rPr lang="en-US" dirty="0"/>
+              <a:rPr lang="en-US" sz="1200" dirty="0"/>
               <a:t>), </a:t>
             </a:r>
           </a:p>
           <a:p>
             <a:r>
-              <a:rPr lang="en-US" dirty="0"/>
+              <a:rPr lang="en-US" sz="1200" dirty="0"/>
               <a:t>a.k.a. </a:t>
             </a:r>
             <a:r>
-              <a:rPr lang="en-US" b="1" dirty="0">
+              <a:rPr lang="en-US" sz="1200" b="1" dirty="0">
                 <a:solidFill>
                   <a:srgbClr val="FF0000"/>
                 </a:solidFill>
@@ -14875,17 +14279,17 @@
               <a:t>Multidimensional Range Query</a:t>
             </a:r>
             <a:r>
-              <a:rPr lang="en-US" dirty="0"/>
+              <a:rPr lang="en-US" sz="1200" dirty="0"/>
               <a:t>.</a:t>
             </a:r>
           </a:p>
           <a:p>
             <a:r>
-              <a:rPr lang="en-US" dirty="0"/>
+              <a:rPr lang="en-US" sz="1200" dirty="0"/>
               <a:t>Another popular search - </a:t>
             </a:r>
             <a:r>
-              <a:rPr lang="en-US" b="1" dirty="0">
+              <a:rPr lang="en-US" sz="1200" b="1" dirty="0">
                 <a:solidFill>
                   <a:srgbClr val="FF0000"/>
                 </a:solidFill>
@@ -14893,27 +14297,31 @@
               <a:t>Nearest Neighbor Search</a:t>
             </a:r>
             <a:r>
-              <a:rPr lang="en-US" dirty="0"/>
+              <a:rPr lang="en-US" sz="1200" dirty="0"/>
               <a:t> </a:t>
             </a:r>
           </a:p>
           <a:p>
-            <a:endParaRPr lang="en-US" dirty="0"/>
-          </a:p>
-          <a:p>
-            <a:r>
-              <a:rPr lang="en-US" dirty="0"/>
+            <a:endParaRPr lang="en-US" sz="1200" dirty="0"/>
+          </a:p>
+          <a:p>
+            <a:r>
+              <a:rPr lang="en-US" sz="1200" b="1" dirty="0">
+                <a:solidFill>
+                  <a:srgbClr val="FF0000"/>
+                </a:solidFill>
+              </a:rPr>
               <a:t>To make queries effective we can store spatial data as a tree.</a:t>
             </a:r>
           </a:p>
           <a:p>
             <a:r>
-              <a:rPr lang="en-US" dirty="0"/>
+              <a:rPr lang="en-US" sz="1200" dirty="0"/>
               <a:t>Two common tree structures:</a:t>
             </a:r>
           </a:p>
           <a:p>
-            <a:endParaRPr lang="en-US" dirty="0"/>
+            <a:endParaRPr lang="en-US" sz="1200" dirty="0"/>
           </a:p>
           <a:p>
             <a:pPr marL="285750" indent="-285750">
@@ -14921,7 +14329,7 @@
               <a:buChar char="•"/>
             </a:pPr>
             <a:r>
-              <a:rPr lang="en-US" b="1" dirty="0">
+              <a:rPr lang="en-US" sz="1200" b="1" dirty="0">
                 <a:solidFill>
                   <a:srgbClr val="0070C0"/>
                 </a:solidFill>
@@ -14929,30 +14337,30 @@
               <a:t>k-d tree</a:t>
             </a:r>
             <a:r>
-              <a:rPr lang="en-US" dirty="0"/>
+              <a:rPr lang="en-US" sz="1200" dirty="0"/>
               <a:t> - a binary tree whose splitting decisions alternate among the key dimensions.</a:t>
             </a:r>
             <a:br>
-              <a:rPr lang="en-US" dirty="0"/>
+              <a:rPr lang="en-US" sz="1200" dirty="0"/>
             </a:br>
             <a:r>
-              <a:rPr lang="en-US" dirty="0"/>
+              <a:rPr lang="en-US" sz="1200" dirty="0"/>
               <a:t>- </a:t>
             </a:r>
             <a:r>
-              <a:rPr lang="en-US" dirty="0">
+              <a:rPr lang="en-US" sz="1200" dirty="0">
                 <a:hlinkClick r:id="rId4"/>
               </a:rPr>
               <a:t>https://en.wikipedia.org/wiki/K-d_tree</a:t>
             </a:r>
             <a:r>
-              <a:rPr lang="en-US" dirty="0"/>
+              <a:rPr lang="en-US" sz="1200" dirty="0"/>
               <a:t> </a:t>
             </a:r>
             <a:br>
-              <a:rPr lang="en-US" dirty="0"/>
+              <a:rPr lang="en-US" sz="1200" dirty="0"/>
             </a:br>
-            <a:endParaRPr lang="en-US" dirty="0"/>
+            <a:endParaRPr lang="en-US" sz="1200" dirty="0"/>
           </a:p>
           <a:p>
             <a:pPr marL="285750" indent="-285750">
@@ -14960,7 +14368,7 @@
               <a:buChar char="•"/>
             </a:pPr>
             <a:r>
-              <a:rPr lang="en-US" b="1" dirty="0">
+              <a:rPr lang="en-US" sz="1200" b="1" dirty="0">
                 <a:solidFill>
                   <a:srgbClr val="0070C0"/>
                 </a:solidFill>
@@ -14968,24 +14376,24 @@
               <a:t>PR quadtree</a:t>
             </a:r>
             <a:r>
-              <a:rPr lang="en-US" dirty="0"/>
+              <a:rPr lang="en-US" sz="1200" dirty="0"/>
               <a:t> (Point-Region Quadtree) - split a square into four equal-sized quadrants at each branch (hence the name “quadtree”)</a:t>
             </a:r>
             <a:br>
-              <a:rPr lang="en-US" dirty="0"/>
+              <a:rPr lang="en-US" sz="1200" dirty="0"/>
             </a:br>
             <a:r>
-              <a:rPr lang="en-US" dirty="0"/>
+              <a:rPr lang="en-US" sz="1200" dirty="0"/>
               <a:t>- </a:t>
             </a:r>
             <a:r>
-              <a:rPr lang="en-US" dirty="0">
+              <a:rPr lang="en-US" sz="1200" dirty="0">
                 <a:hlinkClick r:id="rId5"/>
               </a:rPr>
               <a:t>https://en.wikipedia.org/wiki/Quadtree</a:t>
             </a:r>
             <a:r>
-              <a:rPr lang="en-US" dirty="0"/>
+              <a:rPr lang="en-US" sz="1200" dirty="0"/>
               <a:t> </a:t>
             </a:r>
           </a:p>
@@ -15019,7 +14427,7 @@
         </p:blipFill>
         <p:spPr>
           <a:xfrm>
-            <a:off x="1210235" y="4511114"/>
+            <a:off x="1905179" y="4037700"/>
             <a:ext cx="4518302" cy="2239309"/>
           </a:xfrm>
           <a:prstGeom prst="rect">
@@ -15042,7 +14450,7 @@
         <p:spPr>
           <a:xfrm>
             <a:off x="8135470" y="2843149"/>
-            <a:ext cx="3805518" cy="1815882"/>
+            <a:ext cx="3805518" cy="1569660"/>
           </a:xfrm>
           <a:prstGeom prst="rect">
             <a:avLst/>
@@ -15056,11 +14464,11 @@
           <a:lstStyle/>
           <a:p>
             <a:r>
-              <a:rPr lang="en-US" dirty="0"/>
+              <a:rPr lang="en-US" sz="1200" dirty="0"/>
               <a:t>Several variants of </a:t>
             </a:r>
             <a:r>
-              <a:rPr lang="en-US" b="1" dirty="0">
+              <a:rPr lang="en-US" sz="1200" b="1" dirty="0">
                 <a:solidFill>
                   <a:srgbClr val="0070C0"/>
                 </a:solidFill>
@@ -15068,7 +14476,7 @@
               <a:t>balanced k-d trees</a:t>
             </a:r>
             <a:r>
-              <a:rPr lang="en-US" dirty="0"/>
+              <a:rPr lang="en-US" sz="1200" dirty="0"/>
               <a:t>:</a:t>
             </a:r>
           </a:p>
@@ -15078,7 +14486,7 @@
               <a:buChar char="•"/>
             </a:pPr>
             <a:r>
-              <a:rPr lang="en-US" dirty="0"/>
+              <a:rPr lang="en-US" sz="1200" dirty="0"/>
               <a:t>divided k-d tree</a:t>
             </a:r>
           </a:p>
@@ -15088,7 +14496,7 @@
               <a:buChar char="•"/>
             </a:pPr>
             <a:r>
-              <a:rPr lang="en-US" dirty="0"/>
+              <a:rPr lang="en-US" sz="1200" dirty="0"/>
               <a:t>pseudo k-d tree</a:t>
             </a:r>
           </a:p>
@@ -15098,7 +14506,7 @@
               <a:buChar char="•"/>
             </a:pPr>
             <a:r>
-              <a:rPr lang="en-US" dirty="0"/>
+              <a:rPr lang="en-US" sz="1200" dirty="0"/>
               <a:t>K-D-B-tree</a:t>
             </a:r>
           </a:p>
@@ -15108,11 +14516,11 @@
               <a:buChar char="•"/>
             </a:pPr>
             <a:r>
-              <a:rPr lang="en-US" dirty="0" err="1"/>
+              <a:rPr lang="en-US" sz="1200" dirty="0" err="1"/>
               <a:t>hB</a:t>
             </a:r>
             <a:r>
-              <a:rPr lang="en-US" dirty="0"/>
+              <a:rPr lang="en-US" sz="1200" dirty="0"/>
               <a:t>-tree</a:t>
             </a:r>
           </a:p>
@@ -15122,24 +14530,24 @@
               <a:buChar char="•"/>
             </a:pPr>
             <a:r>
-              <a:rPr lang="en-US" dirty="0" err="1"/>
+              <a:rPr lang="en-US" sz="1200" dirty="0" err="1"/>
               <a:t>Bkd</a:t>
             </a:r>
             <a:r>
-              <a:rPr lang="en-US" dirty="0"/>
+              <a:rPr lang="en-US" sz="1200" dirty="0"/>
               <a:t>-tree</a:t>
             </a:r>
           </a:p>
           <a:p>
-            <a:endParaRPr lang="en-US" dirty="0"/>
-          </a:p>
-          <a:p>
-            <a:r>
-              <a:rPr lang="en-US" dirty="0"/>
+            <a:endParaRPr lang="en-US" sz="1200" dirty="0"/>
+          </a:p>
+          <a:p>
+            <a:r>
+              <a:rPr lang="en-US" sz="1200" dirty="0"/>
               <a:t>Many of these are </a:t>
             </a:r>
             <a:r>
-              <a:rPr lang="en-US" b="1" dirty="0">
+              <a:rPr lang="en-US" sz="1200" b="1" dirty="0">
                 <a:solidFill>
                   <a:srgbClr val="0070C0"/>
                 </a:solidFill>
@@ -15147,7 +14555,7 @@
               <a:t>adaptive k-d trees</a:t>
             </a:r>
             <a:r>
-              <a:rPr lang="en-US" dirty="0"/>
+              <a:rPr lang="en-US" sz="1200" dirty="0"/>
               <a:t>.</a:t>
             </a:r>
           </a:p>
@@ -15192,7 +14600,7 @@
     </p:spTree>
     <p:extLst>
       <p:ext uri="{BB962C8B-B14F-4D97-AF65-F5344CB8AC3E}">
-        <p14:creationId xmlns:p14="http://schemas.microsoft.com/office/powerpoint/2010/main" val="6896833"/>
+        <p14:creationId xmlns:p14="http://schemas.microsoft.com/office/powerpoint/2010/main" val="811821071"/>
       </p:ext>
     </p:extLst>
   </p:cSld>
@@ -15202,7 +14610,7 @@
 </p:sld>
 </file>
 
-<file path=ppt/slides/slide4.xml><?xml version="1.0" encoding="utf-8"?>
+<file path=ppt/slides/slide11.xml><?xml version="1.0" encoding="utf-8"?>
 <p:sld xmlns:a="http://schemas.openxmlformats.org/drawingml/2006/main" xmlns:r="http://schemas.openxmlformats.org/officeDocument/2006/relationships" xmlns:p="http://schemas.openxmlformats.org/presentationml/2006/main">
   <p:cSld>
     <p:spTree>
@@ -15233,8 +14641,8 @@
         </p:nvSpPr>
         <p:spPr>
           <a:xfrm>
-            <a:off x="134472" y="840968"/>
-            <a:ext cx="6131858" cy="6017032"/>
+            <a:off x="1766046" y="558760"/>
+            <a:ext cx="5607423" cy="5478423"/>
           </a:xfrm>
           <a:prstGeom prst="rect">
             <a:avLst/>
@@ -15248,7 +14656,7 @@
           <a:lstStyle/>
           <a:p>
             <a:r>
-              <a:rPr lang="en-US" sz="1100" dirty="0">
+              <a:rPr lang="en-US" sz="1000" dirty="0">
                 <a:solidFill>
                   <a:srgbClr val="0070C0"/>
                 </a:solidFill>
@@ -15258,7 +14666,7 @@
               <a:t>from collections import </a:t>
             </a:r>
             <a:r>
-              <a:rPr lang="en-US" sz="1100" dirty="0" err="1">
+              <a:rPr lang="en-US" sz="1000" dirty="0" err="1">
                 <a:solidFill>
                   <a:srgbClr val="0070C0"/>
                 </a:solidFill>
@@ -15267,7 +14675,7 @@
               </a:rPr>
               <a:t>namedtuple</a:t>
             </a:r>
-            <a:endParaRPr lang="en-US" sz="1100" dirty="0">
+            <a:endParaRPr lang="en-US" sz="1000" dirty="0">
               <a:solidFill>
                 <a:srgbClr val="0070C0"/>
               </a:solidFill>
@@ -15277,7 +14685,7 @@
           </a:p>
           <a:p>
             <a:r>
-              <a:rPr lang="en-US" sz="1100" dirty="0">
+              <a:rPr lang="en-US" sz="1000" dirty="0">
                 <a:solidFill>
                   <a:srgbClr val="0070C0"/>
                 </a:solidFill>
@@ -15287,7 +14695,7 @@
               <a:t>from operator import </a:t>
             </a:r>
             <a:r>
-              <a:rPr lang="en-US" sz="1100" dirty="0" err="1">
+              <a:rPr lang="en-US" sz="1000" dirty="0" err="1">
                 <a:solidFill>
                   <a:srgbClr val="0070C0"/>
                 </a:solidFill>
@@ -15296,7 +14704,7 @@
               </a:rPr>
               <a:t>itemgetter</a:t>
             </a:r>
-            <a:endParaRPr lang="en-US" sz="1100" dirty="0">
+            <a:endParaRPr lang="en-US" sz="1000" dirty="0">
               <a:solidFill>
                 <a:srgbClr val="0070C0"/>
               </a:solidFill>
@@ -15306,7 +14714,7 @@
           </a:p>
           <a:p>
             <a:r>
-              <a:rPr lang="en-US" sz="1100" dirty="0">
+              <a:rPr lang="en-US" sz="1000" dirty="0">
                 <a:solidFill>
                   <a:srgbClr val="0070C0"/>
                 </a:solidFill>
@@ -15316,7 +14724,7 @@
               <a:t>from </a:t>
             </a:r>
             <a:r>
-              <a:rPr lang="en-US" sz="1100" dirty="0" err="1">
+              <a:rPr lang="en-US" sz="1000" dirty="0" err="1">
                 <a:solidFill>
                   <a:srgbClr val="0070C0"/>
                 </a:solidFill>
@@ -15326,7 +14734,7 @@
               <a:t>pprint</a:t>
             </a:r>
             <a:r>
-              <a:rPr lang="en-US" sz="1100" dirty="0">
+              <a:rPr lang="en-US" sz="1000" dirty="0">
                 <a:solidFill>
                   <a:srgbClr val="0070C0"/>
                 </a:solidFill>
@@ -15336,7 +14744,7 @@
               <a:t> import </a:t>
             </a:r>
             <a:r>
-              <a:rPr lang="en-US" sz="1100" dirty="0" err="1">
+              <a:rPr lang="en-US" sz="1000" dirty="0" err="1">
                 <a:solidFill>
                   <a:srgbClr val="0070C0"/>
                 </a:solidFill>
@@ -15345,7 +14753,7 @@
               </a:rPr>
               <a:t>pformat</a:t>
             </a:r>
-            <a:endParaRPr lang="en-US" sz="1100" dirty="0">
+            <a:endParaRPr lang="en-US" sz="1000" dirty="0">
               <a:solidFill>
                 <a:srgbClr val="0070C0"/>
               </a:solidFill>
@@ -15354,7 +14762,7 @@
             </a:endParaRPr>
           </a:p>
           <a:p>
-            <a:endParaRPr lang="en-US" sz="1100" dirty="0">
+            <a:endParaRPr lang="en-US" sz="1000" dirty="0">
               <a:solidFill>
                 <a:srgbClr val="0070C0"/>
               </a:solidFill>
@@ -15364,7 +14772,7 @@
           </a:p>
           <a:p>
             <a:r>
-              <a:rPr lang="en-US" sz="1100" dirty="0">
+              <a:rPr lang="en-US" sz="1000" dirty="0">
                 <a:solidFill>
                   <a:srgbClr val="0070C0"/>
                 </a:solidFill>
@@ -15374,7 +14782,7 @@
               <a:t>class Node(</a:t>
             </a:r>
             <a:r>
-              <a:rPr lang="en-US" sz="1100" dirty="0" err="1">
+              <a:rPr lang="en-US" sz="1000" dirty="0" err="1">
                 <a:solidFill>
                   <a:srgbClr val="0070C0"/>
                 </a:solidFill>
@@ -15384,7 +14792,7 @@
               <a:t>namedtuple</a:t>
             </a:r>
             <a:r>
-              <a:rPr lang="en-US" sz="1100" dirty="0">
+              <a:rPr lang="en-US" sz="1000" dirty="0">
                 <a:solidFill>
                   <a:srgbClr val="0070C0"/>
                 </a:solidFill>
@@ -15394,7 +14802,7 @@
               <a:t>("Node", "location </a:t>
             </a:r>
             <a:r>
-              <a:rPr lang="en-US" sz="1100" dirty="0" err="1">
+              <a:rPr lang="en-US" sz="1000" dirty="0" err="1">
                 <a:solidFill>
                   <a:srgbClr val="0070C0"/>
                 </a:solidFill>
@@ -15404,7 +14812,7 @@
               <a:t>left_child</a:t>
             </a:r>
             <a:r>
-              <a:rPr lang="en-US" sz="1100" dirty="0">
+              <a:rPr lang="en-US" sz="1000" dirty="0">
                 <a:solidFill>
                   <a:srgbClr val="0070C0"/>
                 </a:solidFill>
@@ -15414,7 +14822,7 @@
               <a:t> </a:t>
             </a:r>
             <a:r>
-              <a:rPr lang="en-US" sz="1100" dirty="0" err="1">
+              <a:rPr lang="en-US" sz="1000" dirty="0" err="1">
                 <a:solidFill>
                   <a:srgbClr val="0070C0"/>
                 </a:solidFill>
@@ -15424,7 +14832,7 @@
               <a:t>right_child</a:t>
             </a:r>
             <a:r>
-              <a:rPr lang="en-US" sz="1100" dirty="0">
+              <a:rPr lang="en-US" sz="1000" dirty="0">
                 <a:solidFill>
                   <a:srgbClr val="0070C0"/>
                 </a:solidFill>
@@ -15436,7 +14844,7 @@
           </a:p>
           <a:p>
             <a:r>
-              <a:rPr lang="en-US" sz="1100" dirty="0">
+              <a:rPr lang="en-US" sz="1000" dirty="0">
                 <a:solidFill>
                   <a:srgbClr val="0070C0"/>
                 </a:solidFill>
@@ -15446,7 +14854,7 @@
               <a:t>    def __</a:t>
             </a:r>
             <a:r>
-              <a:rPr lang="en-US" sz="1100" dirty="0" err="1">
+              <a:rPr lang="en-US" sz="1000" dirty="0" err="1">
                 <a:solidFill>
                   <a:srgbClr val="0070C0"/>
                 </a:solidFill>
@@ -15456,7 +14864,7 @@
               <a:t>repr</a:t>
             </a:r>
             <a:r>
-              <a:rPr lang="en-US" sz="1100" dirty="0">
+              <a:rPr lang="en-US" sz="1000" dirty="0">
                 <a:solidFill>
                   <a:srgbClr val="0070C0"/>
                 </a:solidFill>
@@ -15468,7 +14876,7 @@
           </a:p>
           <a:p>
             <a:r>
-              <a:rPr lang="en-US" sz="1100" dirty="0">
+              <a:rPr lang="en-US" sz="1000" dirty="0">
                 <a:solidFill>
                   <a:srgbClr val="0070C0"/>
                 </a:solidFill>
@@ -15478,7 +14886,7 @@
               <a:t>        return </a:t>
             </a:r>
             <a:r>
-              <a:rPr lang="en-US" sz="1100" dirty="0" err="1">
+              <a:rPr lang="en-US" sz="1000" dirty="0" err="1">
                 <a:solidFill>
                   <a:srgbClr val="0070C0"/>
                 </a:solidFill>
@@ -15488,7 +14896,7 @@
               <a:t>pformat</a:t>
             </a:r>
             <a:r>
-              <a:rPr lang="en-US" sz="1100" dirty="0">
+              <a:rPr lang="en-US" sz="1000" dirty="0">
                 <a:solidFill>
                   <a:srgbClr val="0070C0"/>
                 </a:solidFill>
@@ -15499,7 +14907,7 @@
             </a:r>
           </a:p>
           <a:p>
-            <a:endParaRPr lang="en-US" sz="1100" dirty="0">
+            <a:endParaRPr lang="en-US" sz="1000" dirty="0">
               <a:solidFill>
                 <a:srgbClr val="0070C0"/>
               </a:solidFill>
@@ -15509,7 +14917,7 @@
           </a:p>
           <a:p>
             <a:r>
-              <a:rPr lang="en-US" sz="1100" dirty="0">
+              <a:rPr lang="en-US" sz="1000" dirty="0">
                 <a:solidFill>
                   <a:srgbClr val="0070C0"/>
                 </a:solidFill>
@@ -15519,7 +14927,7 @@
               <a:t>def </a:t>
             </a:r>
             <a:r>
-              <a:rPr lang="en-US" sz="1100" dirty="0" err="1">
+              <a:rPr lang="en-US" sz="1000" dirty="0" err="1">
                 <a:solidFill>
                   <a:srgbClr val="0070C0"/>
                 </a:solidFill>
@@ -15529,7 +14937,7 @@
               <a:t>kdtree</a:t>
             </a:r>
             <a:r>
-              <a:rPr lang="en-US" sz="1100" dirty="0">
+              <a:rPr lang="en-US" sz="1000" dirty="0">
                 <a:solidFill>
                   <a:srgbClr val="0070C0"/>
                 </a:solidFill>
@@ -15539,7 +14947,7 @@
               <a:t>(</a:t>
             </a:r>
             <a:r>
-              <a:rPr lang="en-US" sz="1100" dirty="0" err="1">
+              <a:rPr lang="en-US" sz="1000" dirty="0" err="1">
                 <a:solidFill>
                   <a:srgbClr val="0070C0"/>
                 </a:solidFill>
@@ -15549,7 +14957,7 @@
               <a:t>point_list</a:t>
             </a:r>
             <a:r>
-              <a:rPr lang="en-US" sz="1100" dirty="0">
+              <a:rPr lang="en-US" sz="1000" dirty="0">
                 <a:solidFill>
                   <a:srgbClr val="0070C0"/>
                 </a:solidFill>
@@ -15559,7 +14967,7 @@
               <a:t>, depth: </a:t>
             </a:r>
             <a:r>
-              <a:rPr lang="en-US" sz="1100" dirty="0" err="1">
+              <a:rPr lang="en-US" sz="1000" dirty="0" err="1">
                 <a:solidFill>
                   <a:srgbClr val="0070C0"/>
                 </a:solidFill>
@@ -15569,7 +14977,7 @@
               <a:t>int</a:t>
             </a:r>
             <a:r>
-              <a:rPr lang="en-US" sz="1100" dirty="0">
+              <a:rPr lang="en-US" sz="1000" dirty="0">
                 <a:solidFill>
                   <a:srgbClr val="0070C0"/>
                 </a:solidFill>
@@ -15581,7 +14989,7 @@
           </a:p>
           <a:p>
             <a:r>
-              <a:rPr lang="en-US" sz="1100" dirty="0">
+              <a:rPr lang="en-US" sz="1000" dirty="0">
                 <a:solidFill>
                   <a:srgbClr val="0070C0"/>
                 </a:solidFill>
@@ -15591,7 +14999,7 @@
               <a:t>    if not </a:t>
             </a:r>
             <a:r>
-              <a:rPr lang="en-US" sz="1100" dirty="0" err="1">
+              <a:rPr lang="en-US" sz="1000" dirty="0" err="1">
                 <a:solidFill>
                   <a:srgbClr val="0070C0"/>
                 </a:solidFill>
@@ -15601,7 +15009,7 @@
               <a:t>point_list</a:t>
             </a:r>
             <a:r>
-              <a:rPr lang="en-US" sz="1100" dirty="0">
+              <a:rPr lang="en-US" sz="1000" dirty="0">
                 <a:solidFill>
                   <a:srgbClr val="0070C0"/>
                 </a:solidFill>
@@ -15613,7 +15021,7 @@
           </a:p>
           <a:p>
             <a:r>
-              <a:rPr lang="en-US" sz="1100" dirty="0">
+              <a:rPr lang="en-US" sz="1000" dirty="0">
                 <a:solidFill>
                   <a:srgbClr val="0070C0"/>
                 </a:solidFill>
@@ -15624,7 +15032,7 @@
             </a:r>
           </a:p>
           <a:p>
-            <a:endParaRPr lang="en-US" sz="1100" dirty="0">
+            <a:endParaRPr lang="en-US" sz="1000" dirty="0">
               <a:solidFill>
                 <a:srgbClr val="0070C0"/>
               </a:solidFill>
@@ -15634,7 +15042,7 @@
           </a:p>
           <a:p>
             <a:r>
-              <a:rPr lang="en-US" sz="1100" dirty="0">
+              <a:rPr lang="en-US" sz="1000" dirty="0">
                 <a:solidFill>
                   <a:srgbClr val="0070C0"/>
                 </a:solidFill>
@@ -15644,7 +15052,7 @@
               <a:t>    k = </a:t>
             </a:r>
             <a:r>
-              <a:rPr lang="en-US" sz="1100" dirty="0" err="1">
+              <a:rPr lang="en-US" sz="1000" dirty="0" err="1">
                 <a:solidFill>
                   <a:srgbClr val="0070C0"/>
                 </a:solidFill>
@@ -15654,7 +15062,7 @@
               <a:t>len</a:t>
             </a:r>
             <a:r>
-              <a:rPr lang="en-US" sz="1100" dirty="0">
+              <a:rPr lang="en-US" sz="1000" dirty="0">
                 <a:solidFill>
                   <a:srgbClr val="0070C0"/>
                 </a:solidFill>
@@ -15664,7 +15072,7 @@
               <a:t>(</a:t>
             </a:r>
             <a:r>
-              <a:rPr lang="en-US" sz="1100" dirty="0" err="1">
+              <a:rPr lang="en-US" sz="1000" dirty="0" err="1">
                 <a:solidFill>
                   <a:srgbClr val="0070C0"/>
                 </a:solidFill>
@@ -15674,7 +15082,7 @@
               <a:t>point_list</a:t>
             </a:r>
             <a:r>
-              <a:rPr lang="en-US" sz="1100" dirty="0">
+              <a:rPr lang="en-US" sz="1000" dirty="0">
                 <a:solidFill>
                   <a:srgbClr val="0070C0"/>
                 </a:solidFill>
@@ -15686,7 +15094,7 @@
           </a:p>
           <a:p>
             <a:r>
-              <a:rPr lang="en-US" sz="1100" dirty="0">
+              <a:rPr lang="en-US" sz="1000" dirty="0">
                 <a:solidFill>
                   <a:srgbClr val="0070C0"/>
                 </a:solidFill>
@@ -15698,7 +15106,7 @@
           </a:p>
           <a:p>
             <a:r>
-              <a:rPr lang="en-US" sz="1100" dirty="0">
+              <a:rPr lang="en-US" sz="1000" dirty="0">
                 <a:solidFill>
                   <a:srgbClr val="0070C0"/>
                 </a:solidFill>
@@ -15709,7 +15117,7 @@
             </a:r>
           </a:p>
           <a:p>
-            <a:endParaRPr lang="en-US" sz="1100" dirty="0">
+            <a:endParaRPr lang="en-US" sz="1000" dirty="0">
               <a:solidFill>
                 <a:srgbClr val="0070C0"/>
               </a:solidFill>
@@ -15719,7 +15127,7 @@
           </a:p>
           <a:p>
             <a:r>
-              <a:rPr lang="en-US" sz="1100" dirty="0">
+              <a:rPr lang="en-US" sz="1000" dirty="0">
                 <a:solidFill>
                   <a:srgbClr val="0070C0"/>
                 </a:solidFill>
@@ -15731,7 +15139,7 @@
           </a:p>
           <a:p>
             <a:r>
-              <a:rPr lang="en-US" sz="1100" dirty="0">
+              <a:rPr lang="en-US" sz="1000" dirty="0">
                 <a:solidFill>
                   <a:srgbClr val="0070C0"/>
                 </a:solidFill>
@@ -15741,7 +15149,7 @@
               <a:t>    </a:t>
             </a:r>
             <a:r>
-              <a:rPr lang="en-US" sz="1100" dirty="0" err="1">
+              <a:rPr lang="en-US" sz="1000" dirty="0" err="1">
                 <a:solidFill>
                   <a:srgbClr val="0070C0"/>
                 </a:solidFill>
@@ -15751,7 +15159,7 @@
               <a:t>point_list.sort</a:t>
             </a:r>
             <a:r>
-              <a:rPr lang="en-US" sz="1100" dirty="0">
+              <a:rPr lang="en-US" sz="1000" dirty="0">
                 <a:solidFill>
                   <a:srgbClr val="0070C0"/>
                 </a:solidFill>
@@ -15761,7 +15169,7 @@
               <a:t>(key=</a:t>
             </a:r>
             <a:r>
-              <a:rPr lang="en-US" sz="1100" dirty="0" err="1">
+              <a:rPr lang="en-US" sz="1000" dirty="0" err="1">
                 <a:solidFill>
                   <a:srgbClr val="0070C0"/>
                 </a:solidFill>
@@ -15771,7 +15179,7 @@
               <a:t>itemgetter</a:t>
             </a:r>
             <a:r>
-              <a:rPr lang="en-US" sz="1100" dirty="0">
+              <a:rPr lang="en-US" sz="1000" dirty="0">
                 <a:solidFill>
                   <a:srgbClr val="0070C0"/>
                 </a:solidFill>
@@ -15783,7 +15191,7 @@
           </a:p>
           <a:p>
             <a:r>
-              <a:rPr lang="en-US" sz="1100" dirty="0">
+              <a:rPr lang="en-US" sz="1000" dirty="0">
                 <a:solidFill>
                   <a:srgbClr val="0070C0"/>
                 </a:solidFill>
@@ -15793,7 +15201,7 @@
               <a:t>    median = </a:t>
             </a:r>
             <a:r>
-              <a:rPr lang="en-US" sz="1100" dirty="0" err="1">
+              <a:rPr lang="en-US" sz="1000" dirty="0" err="1">
                 <a:solidFill>
                   <a:srgbClr val="0070C0"/>
                 </a:solidFill>
@@ -15803,7 +15211,7 @@
               <a:t>len</a:t>
             </a:r>
             <a:r>
-              <a:rPr lang="en-US" sz="1100" dirty="0">
+              <a:rPr lang="en-US" sz="1000" dirty="0">
                 <a:solidFill>
                   <a:srgbClr val="0070C0"/>
                 </a:solidFill>
@@ -15813,7 +15221,7 @@
               <a:t>(</a:t>
             </a:r>
             <a:r>
-              <a:rPr lang="en-US" sz="1100" dirty="0" err="1">
+              <a:rPr lang="en-US" sz="1000" dirty="0" err="1">
                 <a:solidFill>
                   <a:srgbClr val="0070C0"/>
                 </a:solidFill>
@@ -15823,7 +15231,7 @@
               <a:t>point_list</a:t>
             </a:r>
             <a:r>
-              <a:rPr lang="en-US" sz="1100" dirty="0">
+              <a:rPr lang="en-US" sz="1000" dirty="0">
                 <a:solidFill>
                   <a:srgbClr val="0070C0"/>
                 </a:solidFill>
@@ -15834,7 +15242,7 @@
             </a:r>
           </a:p>
           <a:p>
-            <a:endParaRPr lang="en-US" sz="1100" dirty="0">
+            <a:endParaRPr lang="en-US" sz="1000" dirty="0">
               <a:solidFill>
                 <a:srgbClr val="0070C0"/>
               </a:solidFill>
@@ -15844,7 +15252,7 @@
           </a:p>
           <a:p>
             <a:r>
-              <a:rPr lang="en-US" sz="1100" dirty="0">
+              <a:rPr lang="en-US" sz="1000" dirty="0">
                 <a:solidFill>
                   <a:srgbClr val="0070C0"/>
                 </a:solidFill>
@@ -15856,7 +15264,7 @@
           </a:p>
           <a:p>
             <a:r>
-              <a:rPr lang="en-US" sz="1100" dirty="0">
+              <a:rPr lang="en-US" sz="1000" dirty="0">
                 <a:solidFill>
                   <a:srgbClr val="0070C0"/>
                 </a:solidFill>
@@ -15868,7 +15276,7 @@
           </a:p>
           <a:p>
             <a:r>
-              <a:rPr lang="en-US" sz="1100" dirty="0">
+              <a:rPr lang="en-US" sz="1000" dirty="0">
                 <a:solidFill>
                   <a:srgbClr val="0070C0"/>
                 </a:solidFill>
@@ -15878,7 +15286,7 @@
               <a:t>        location=</a:t>
             </a:r>
             <a:r>
-              <a:rPr lang="en-US" sz="1100" dirty="0" err="1">
+              <a:rPr lang="en-US" sz="1000" dirty="0" err="1">
                 <a:solidFill>
                   <a:srgbClr val="0070C0"/>
                 </a:solidFill>
@@ -15888,7 +15296,7 @@
               <a:t>point_list</a:t>
             </a:r>
             <a:r>
-              <a:rPr lang="en-US" sz="1100" dirty="0">
+              <a:rPr lang="en-US" sz="1000" dirty="0">
                 <a:solidFill>
                   <a:srgbClr val="0070C0"/>
                 </a:solidFill>
@@ -15900,7 +15308,7 @@
           </a:p>
           <a:p>
             <a:r>
-              <a:rPr lang="en-US" sz="1100" dirty="0">
+              <a:rPr lang="en-US" sz="1000" dirty="0">
                 <a:solidFill>
                   <a:srgbClr val="0070C0"/>
                 </a:solidFill>
@@ -15910,7 +15318,7 @@
               <a:t>        </a:t>
             </a:r>
             <a:r>
-              <a:rPr lang="en-US" sz="1100" dirty="0" err="1">
+              <a:rPr lang="en-US" sz="1000" dirty="0" err="1">
                 <a:solidFill>
                   <a:srgbClr val="0070C0"/>
                 </a:solidFill>
@@ -15920,7 +15328,7 @@
               <a:t>left_child</a:t>
             </a:r>
             <a:r>
-              <a:rPr lang="en-US" sz="1100" dirty="0">
+              <a:rPr lang="en-US" sz="1000" dirty="0">
                 <a:solidFill>
                   <a:srgbClr val="0070C0"/>
                 </a:solidFill>
@@ -15930,7 +15338,7 @@
               <a:t>=</a:t>
             </a:r>
             <a:r>
-              <a:rPr lang="en-US" sz="1100" dirty="0" err="1">
+              <a:rPr lang="en-US" sz="1000" dirty="0" err="1">
                 <a:solidFill>
                   <a:srgbClr val="0070C0"/>
                 </a:solidFill>
@@ -15940,7 +15348,7 @@
               <a:t>kdtree</a:t>
             </a:r>
             <a:r>
-              <a:rPr lang="en-US" sz="1100" dirty="0">
+              <a:rPr lang="en-US" sz="1000" dirty="0">
                 <a:solidFill>
                   <a:srgbClr val="0070C0"/>
                 </a:solidFill>
@@ -15950,7 +15358,7 @@
               <a:t>(</a:t>
             </a:r>
             <a:r>
-              <a:rPr lang="en-US" sz="1100" dirty="0" err="1">
+              <a:rPr lang="en-US" sz="1000" dirty="0" err="1">
                 <a:solidFill>
                   <a:srgbClr val="0070C0"/>
                 </a:solidFill>
@@ -15960,7 +15368,7 @@
               <a:t>point_list</a:t>
             </a:r>
             <a:r>
-              <a:rPr lang="en-US" sz="1100" dirty="0">
+              <a:rPr lang="en-US" sz="1000" dirty="0">
                 <a:solidFill>
                   <a:srgbClr val="0070C0"/>
                 </a:solidFill>
@@ -15972,7 +15380,7 @@
           </a:p>
           <a:p>
             <a:r>
-              <a:rPr lang="en-US" sz="1100" dirty="0">
+              <a:rPr lang="en-US" sz="1000" dirty="0">
                 <a:solidFill>
                   <a:srgbClr val="0070C0"/>
                 </a:solidFill>
@@ -15982,7 +15390,7 @@
               <a:t>        </a:t>
             </a:r>
             <a:r>
-              <a:rPr lang="en-US" sz="1100" dirty="0" err="1">
+              <a:rPr lang="en-US" sz="1000" dirty="0" err="1">
                 <a:solidFill>
                   <a:srgbClr val="0070C0"/>
                 </a:solidFill>
@@ -15992,7 +15400,7 @@
               <a:t>right_child</a:t>
             </a:r>
             <a:r>
-              <a:rPr lang="en-US" sz="1100" dirty="0">
+              <a:rPr lang="en-US" sz="1000" dirty="0">
                 <a:solidFill>
                   <a:srgbClr val="0070C0"/>
                 </a:solidFill>
@@ -16002,7 +15410,7 @@
               <a:t>=</a:t>
             </a:r>
             <a:r>
-              <a:rPr lang="en-US" sz="1100" dirty="0" err="1">
+              <a:rPr lang="en-US" sz="1000" dirty="0" err="1">
                 <a:solidFill>
                   <a:srgbClr val="0070C0"/>
                 </a:solidFill>
@@ -16012,7 +15420,7 @@
               <a:t>kdtree</a:t>
             </a:r>
             <a:r>
-              <a:rPr lang="en-US" sz="1100" dirty="0">
+              <a:rPr lang="en-US" sz="1000" dirty="0">
                 <a:solidFill>
                   <a:srgbClr val="0070C0"/>
                 </a:solidFill>
@@ -16022,7 +15430,7 @@
               <a:t>(</a:t>
             </a:r>
             <a:r>
-              <a:rPr lang="en-US" sz="1100" dirty="0" err="1">
+              <a:rPr lang="en-US" sz="1000" dirty="0" err="1">
                 <a:solidFill>
                   <a:srgbClr val="0070C0"/>
                 </a:solidFill>
@@ -16032,7 +15440,7 @@
               <a:t>point_list</a:t>
             </a:r>
             <a:r>
-              <a:rPr lang="en-US" sz="1100" dirty="0">
+              <a:rPr lang="en-US" sz="1000" dirty="0">
                 <a:solidFill>
                   <a:srgbClr val="0070C0"/>
                 </a:solidFill>
@@ -16044,7 +15452,7 @@
           </a:p>
           <a:p>
             <a:r>
-              <a:rPr lang="en-US" sz="1100" dirty="0">
+              <a:rPr lang="en-US" sz="1000" dirty="0">
                 <a:solidFill>
                   <a:srgbClr val="0070C0"/>
                 </a:solidFill>
@@ -16055,7 +15463,7 @@
             </a:r>
           </a:p>
           <a:p>
-            <a:endParaRPr lang="en-US" sz="1100" dirty="0">
+            <a:endParaRPr lang="en-US" sz="1000" dirty="0">
               <a:solidFill>
                 <a:srgbClr val="0070C0"/>
               </a:solidFill>
@@ -16065,7 +15473,7 @@
           </a:p>
           <a:p>
             <a:r>
-              <a:rPr lang="en-US" sz="1100" dirty="0">
+              <a:rPr lang="en-US" sz="1000" dirty="0">
                 <a:solidFill>
                   <a:srgbClr val="0070C0"/>
                 </a:solidFill>
@@ -16077,7 +15485,7 @@
           </a:p>
           <a:p>
             <a:r>
-              <a:rPr lang="en-US" sz="1100" dirty="0">
+              <a:rPr lang="en-US" sz="1000" dirty="0">
                 <a:solidFill>
                   <a:srgbClr val="0070C0"/>
                 </a:solidFill>
@@ -16089,7 +15497,7 @@
           </a:p>
           <a:p>
             <a:r>
-              <a:rPr lang="en-US" sz="1100" dirty="0">
+              <a:rPr lang="en-US" sz="1000" dirty="0">
                 <a:solidFill>
                   <a:srgbClr val="0070C0"/>
                 </a:solidFill>
@@ -16099,7 +15507,7 @@
               <a:t>    </a:t>
             </a:r>
             <a:r>
-              <a:rPr lang="en-US" sz="1100" dirty="0" err="1">
+              <a:rPr lang="en-US" sz="1000" dirty="0" err="1">
                 <a:solidFill>
                   <a:srgbClr val="0070C0"/>
                 </a:solidFill>
@@ -16109,7 +15517,7 @@
               <a:t>point_list</a:t>
             </a:r>
             <a:r>
-              <a:rPr lang="en-US" sz="1100" dirty="0">
+              <a:rPr lang="en-US" sz="1000" dirty="0">
                 <a:solidFill>
                   <a:srgbClr val="0070C0"/>
                 </a:solidFill>
@@ -16121,7 +15529,7 @@
           </a:p>
           <a:p>
             <a:r>
-              <a:rPr lang="en-US" sz="1100" dirty="0">
+              <a:rPr lang="en-US" sz="1000" dirty="0">
                 <a:solidFill>
                   <a:srgbClr val="0070C0"/>
                 </a:solidFill>
@@ -16131,7 +15539,7 @@
               <a:t>    tree = </a:t>
             </a:r>
             <a:r>
-              <a:rPr lang="en-US" sz="1100" dirty="0" err="1">
+              <a:rPr lang="en-US" sz="1000" dirty="0" err="1">
                 <a:solidFill>
                   <a:srgbClr val="0070C0"/>
                 </a:solidFill>
@@ -16141,7 +15549,7 @@
               <a:t>kdtree</a:t>
             </a:r>
             <a:r>
-              <a:rPr lang="en-US" sz="1100" dirty="0">
+              <a:rPr lang="en-US" sz="1000" dirty="0">
                 <a:solidFill>
                   <a:srgbClr val="0070C0"/>
                 </a:solidFill>
@@ -16151,7 +15559,7 @@
               <a:t>(</a:t>
             </a:r>
             <a:r>
-              <a:rPr lang="en-US" sz="1100" dirty="0" err="1">
+              <a:rPr lang="en-US" sz="1000" dirty="0" err="1">
                 <a:solidFill>
                   <a:srgbClr val="0070C0"/>
                 </a:solidFill>
@@ -16161,7 +15569,7 @@
               <a:t>point_list</a:t>
             </a:r>
             <a:r>
-              <a:rPr lang="en-US" sz="1100" dirty="0">
+              <a:rPr lang="en-US" sz="1000" dirty="0">
                 <a:solidFill>
                   <a:srgbClr val="0070C0"/>
                 </a:solidFill>
@@ -16173,7 +15581,7 @@
           </a:p>
           <a:p>
             <a:r>
-              <a:rPr lang="en-US" sz="1100" dirty="0">
+              <a:rPr lang="en-US" sz="1000" dirty="0">
                 <a:solidFill>
                   <a:srgbClr val="0070C0"/>
                 </a:solidFill>
@@ -16184,7 +15592,7 @@
             </a:r>
           </a:p>
           <a:p>
-            <a:endParaRPr lang="en-US" sz="1100" dirty="0">
+            <a:endParaRPr lang="en-US" sz="1000" dirty="0">
               <a:solidFill>
                 <a:srgbClr val="0070C0"/>
               </a:solidFill>
@@ -16194,7 +15602,7 @@
           </a:p>
           <a:p>
             <a:r>
-              <a:rPr lang="en-US" sz="1100" dirty="0">
+              <a:rPr lang="en-US" sz="1000" dirty="0">
                 <a:solidFill>
                   <a:srgbClr val="0070C0"/>
                 </a:solidFill>
@@ -16206,7 +15614,7 @@
           </a:p>
           <a:p>
             <a:r>
-              <a:rPr lang="en-US" sz="1100" dirty="0">
+              <a:rPr lang="en-US" sz="1000" dirty="0">
                 <a:solidFill>
                   <a:srgbClr val="0070C0"/>
                 </a:solidFill>
@@ -16232,8 +15640,8 @@
         </p:nvSpPr>
         <p:spPr>
           <a:xfrm>
-            <a:off x="134471" y="134471"/>
-            <a:ext cx="5607423" cy="523220"/>
+            <a:off x="0" y="0"/>
+            <a:ext cx="7373469" cy="523220"/>
           </a:xfrm>
           <a:prstGeom prst="rect">
             <a:avLst/>
@@ -16248,7 +15656,7 @@
           <a:p>
             <a:r>
               <a:rPr lang="en-US" sz="2800" b="1" dirty="0"/>
-              <a:t>Building k-d tree - recursively</a:t>
+              <a:t>Search - Building k-d tree - recursively</a:t>
             </a:r>
           </a:p>
         </p:txBody>
@@ -16420,7 +15828,7 @@
         </p:nvSpPr>
         <p:spPr>
           <a:xfrm>
-            <a:off x="3899646" y="6150114"/>
+            <a:off x="1766046" y="6017032"/>
             <a:ext cx="4128247" cy="707886"/>
           </a:xfrm>
           <a:prstGeom prst="rect">
@@ -16486,7 +15894,2221 @@
     </p:spTree>
     <p:extLst>
       <p:ext uri="{BB962C8B-B14F-4D97-AF65-F5344CB8AC3E}">
-        <p14:creationId xmlns:p14="http://schemas.microsoft.com/office/powerpoint/2010/main" val="3627112575"/>
+        <p14:creationId xmlns:p14="http://schemas.microsoft.com/office/powerpoint/2010/main" val="546265722"/>
+      </p:ext>
+    </p:extLst>
+  </p:cSld>
+  <p:clrMapOvr>
+    <a:masterClrMapping/>
+  </p:clrMapOvr>
+</p:sld>
+</file>
+
+<file path=ppt/slides/slide2.xml><?xml version="1.0" encoding="utf-8"?>
+<p:sld xmlns:a="http://schemas.openxmlformats.org/drawingml/2006/main" xmlns:r="http://schemas.openxmlformats.org/officeDocument/2006/relationships" xmlns:p="http://schemas.openxmlformats.org/presentationml/2006/main">
+  <p:cSld>
+    <p:spTree>
+      <p:nvGrpSpPr>
+        <p:cNvPr id="1" name=""/>
+        <p:cNvGrpSpPr/>
+        <p:nvPr/>
+      </p:nvGrpSpPr>
+      <p:grpSpPr>
+        <a:xfrm>
+          <a:off x="0" y="0"/>
+          <a:ext cx="0" cy="0"/>
+          <a:chOff x="0" y="0"/>
+          <a:chExt cx="0" cy="0"/>
+        </a:xfrm>
+      </p:grpSpPr>
+      <p:sp>
+        <p:nvSpPr>
+          <p:cNvPr id="4" name="TextBox 3">
+            <a:extLst>
+              <a:ext uri="{FF2B5EF4-FFF2-40B4-BE49-F238E27FC236}">
+                <a16:creationId xmlns:a16="http://schemas.microsoft.com/office/drawing/2014/main" id="{007F7286-8F8E-C541-997A-1A9028B22C52}"/>
+              </a:ext>
+            </a:extLst>
+          </p:cNvPr>
+          <p:cNvSpPr txBox="1"/>
+          <p:nvPr/>
+        </p:nvSpPr>
+        <p:spPr>
+          <a:xfrm>
+            <a:off x="2596836" y="3612842"/>
+            <a:ext cx="5047588" cy="3139321"/>
+          </a:xfrm>
+          <a:prstGeom prst="rect">
+            <a:avLst/>
+          </a:prstGeom>
+          <a:noFill/>
+        </p:spPr>
+        <p:txBody>
+          <a:bodyPr wrap="square" rtlCol="0">
+            <a:spAutoFit/>
+          </a:bodyPr>
+          <a:lstStyle/>
+          <a:p>
+            <a:r>
+              <a:rPr lang="en-US" sz="1100" b="1" dirty="0">
+                <a:solidFill>
+                  <a:srgbClr val="0070C0"/>
+                </a:solidFill>
+              </a:rPr>
+              <a:t>Spatial Data Science (SDS) Course Syllabus</a:t>
+            </a:r>
+          </a:p>
+          <a:p>
+            <a:endParaRPr lang="en-US" sz="1100" dirty="0">
+              <a:solidFill>
+                <a:srgbClr val="0070C0"/>
+              </a:solidFill>
+            </a:endParaRPr>
+          </a:p>
+          <a:p>
+            <a:r>
+              <a:rPr lang="en-US" sz="1100" dirty="0">
+                <a:solidFill>
+                  <a:srgbClr val="0070C0"/>
+                </a:solidFill>
+              </a:rPr>
+              <a:t>Section 1</a:t>
+            </a:r>
+          </a:p>
+          <a:p>
+            <a:r>
+              <a:rPr lang="en-US" sz="1100" dirty="0">
+                <a:solidFill>
+                  <a:srgbClr val="0070C0"/>
+                </a:solidFill>
+              </a:rPr>
+              <a:t>Introduction to Spatial Data Science (SDS)</a:t>
+            </a:r>
+          </a:p>
+          <a:p>
+            <a:r>
+              <a:rPr lang="en-US" sz="1100" dirty="0">
+                <a:solidFill>
+                  <a:srgbClr val="0070C0"/>
+                </a:solidFill>
+              </a:rPr>
+              <a:t> - spatial data, tools, and analysis</a:t>
+            </a:r>
+          </a:p>
+          <a:p>
+            <a:r>
+              <a:rPr lang="en-US" sz="1100" dirty="0">
+                <a:solidFill>
+                  <a:srgbClr val="0070C0"/>
+                </a:solidFill>
+              </a:rPr>
+              <a:t> - place-based context can reveal hidden patterns in data</a:t>
+            </a:r>
+          </a:p>
+          <a:p>
+            <a:r>
+              <a:rPr lang="en-US" sz="1100" dirty="0">
+                <a:solidFill>
+                  <a:srgbClr val="0070C0"/>
+                </a:solidFill>
+              </a:rPr>
+              <a:t> - use ArcGIS Pro and ArcGIS Notebooks.</a:t>
+            </a:r>
+          </a:p>
+          <a:p>
+            <a:endParaRPr lang="en-US" sz="1100" dirty="0">
+              <a:solidFill>
+                <a:srgbClr val="0070C0"/>
+              </a:solidFill>
+            </a:endParaRPr>
+          </a:p>
+          <a:p>
+            <a:r>
+              <a:rPr lang="en-US" sz="1100" dirty="0">
+                <a:solidFill>
+                  <a:srgbClr val="0070C0"/>
+                </a:solidFill>
+              </a:rPr>
+              <a:t>Section 2</a:t>
+            </a:r>
+          </a:p>
+          <a:p>
+            <a:r>
+              <a:rPr lang="en-US" sz="1100" dirty="0">
+                <a:solidFill>
+                  <a:srgbClr val="0070C0"/>
+                </a:solidFill>
+              </a:rPr>
+              <a:t>The Spatial Approach to Predictive Analysis</a:t>
+            </a:r>
+          </a:p>
+          <a:p>
+            <a:r>
+              <a:rPr lang="en-US" sz="1100" dirty="0">
+                <a:solidFill>
+                  <a:srgbClr val="0070C0"/>
+                </a:solidFill>
+              </a:rPr>
+              <a:t> - add spatial properties into modeling workflows to add predictive power. </a:t>
+            </a:r>
+          </a:p>
+          <a:p>
+            <a:r>
+              <a:rPr lang="en-US" sz="1100" dirty="0">
+                <a:solidFill>
+                  <a:srgbClr val="0070C0"/>
+                </a:solidFill>
+              </a:rPr>
+              <a:t> - Use Random Forest to train the model and make predictions.</a:t>
+            </a:r>
+          </a:p>
+          <a:p>
+            <a:endParaRPr lang="en-US" sz="1100" dirty="0">
+              <a:solidFill>
+                <a:srgbClr val="0070C0"/>
+              </a:solidFill>
+            </a:endParaRPr>
+          </a:p>
+          <a:p>
+            <a:r>
+              <a:rPr lang="en-US" sz="1100" dirty="0">
+                <a:solidFill>
+                  <a:srgbClr val="0070C0"/>
+                </a:solidFill>
+              </a:rPr>
+              <a:t>Section 3</a:t>
+            </a:r>
+          </a:p>
+          <a:p>
+            <a:r>
+              <a:rPr lang="en-US" sz="1100" dirty="0">
+                <a:solidFill>
+                  <a:srgbClr val="0070C0"/>
+                </a:solidFill>
+              </a:rPr>
+              <a:t>Finding Optimal Locations Using Suitability Models</a:t>
+            </a:r>
+          </a:p>
+          <a:p>
+            <a:r>
+              <a:rPr lang="en-US" sz="1100" dirty="0">
+                <a:solidFill>
+                  <a:srgbClr val="0070C0"/>
+                </a:solidFill>
+              </a:rPr>
+              <a:t> - Where is the best location for &lt;fill in the blank&gt;? </a:t>
+            </a:r>
+          </a:p>
+          <a:p>
+            <a:r>
+              <a:rPr lang="en-US" sz="1100" dirty="0">
+                <a:solidFill>
+                  <a:srgbClr val="0070C0"/>
+                </a:solidFill>
+              </a:rPr>
+              <a:t> - Perform a weighted overlay analysis, rank multiple suitability criteria. </a:t>
+            </a:r>
+          </a:p>
+          <a:p>
+            <a:r>
+              <a:rPr lang="en-US" sz="1100" dirty="0">
+                <a:solidFill>
+                  <a:srgbClr val="0070C0"/>
+                </a:solidFill>
+              </a:rPr>
+              <a:t> - Learn to transform data using functions to better represent suitability impact.</a:t>
+            </a:r>
+          </a:p>
+        </p:txBody>
+      </p:sp>
+      <p:sp>
+        <p:nvSpPr>
+          <p:cNvPr id="5" name="TextBox 4">
+            <a:extLst>
+              <a:ext uri="{FF2B5EF4-FFF2-40B4-BE49-F238E27FC236}">
+                <a16:creationId xmlns:a16="http://schemas.microsoft.com/office/drawing/2014/main" id="{54727A4B-34D6-6445-A4E7-AF7B4CF9B412}"/>
+              </a:ext>
+            </a:extLst>
+          </p:cNvPr>
+          <p:cNvSpPr txBox="1"/>
+          <p:nvPr/>
+        </p:nvSpPr>
+        <p:spPr>
+          <a:xfrm>
+            <a:off x="7818595" y="3782119"/>
+            <a:ext cx="4300688" cy="2970044"/>
+          </a:xfrm>
+          <a:prstGeom prst="rect">
+            <a:avLst/>
+          </a:prstGeom>
+          <a:noFill/>
+        </p:spPr>
+        <p:txBody>
+          <a:bodyPr wrap="square" rtlCol="0">
+            <a:spAutoFit/>
+          </a:bodyPr>
+          <a:lstStyle/>
+          <a:p>
+            <a:r>
+              <a:rPr lang="en-US" sz="1100" dirty="0">
+                <a:solidFill>
+                  <a:srgbClr val="0070C0"/>
+                </a:solidFill>
+              </a:rPr>
+              <a:t>Section 4</a:t>
+            </a:r>
+          </a:p>
+          <a:p>
+            <a:r>
+              <a:rPr lang="en-US" sz="1100" dirty="0">
+                <a:solidFill>
+                  <a:srgbClr val="0070C0"/>
+                </a:solidFill>
+              </a:rPr>
+              <a:t>Pattern Detection and Clustering</a:t>
+            </a:r>
+          </a:p>
+          <a:p>
+            <a:r>
+              <a:rPr lang="en-US" sz="1100" dirty="0">
+                <a:solidFill>
+                  <a:srgbClr val="0070C0"/>
+                </a:solidFill>
+              </a:rPr>
+              <a:t> - ArcGIS tools to identify patterns and clusters</a:t>
+            </a:r>
+          </a:p>
+          <a:p>
+            <a:r>
+              <a:rPr lang="en-US" sz="1100" dirty="0">
+                <a:solidFill>
+                  <a:srgbClr val="0070C0"/>
+                </a:solidFill>
+              </a:rPr>
+              <a:t> - statistical clustering - analyze patterns in space and time.</a:t>
+            </a:r>
+          </a:p>
+          <a:p>
+            <a:r>
+              <a:rPr lang="en-US" sz="1100" dirty="0">
+                <a:solidFill>
+                  <a:srgbClr val="0070C0"/>
+                </a:solidFill>
+              </a:rPr>
+              <a:t> - Create a spacetime cube, explore </a:t>
+            </a:r>
+            <a:r>
+              <a:rPr lang="en-US" sz="1100" dirty="0" err="1">
+                <a:solidFill>
+                  <a:srgbClr val="0070C0"/>
+                </a:solidFill>
+              </a:rPr>
+              <a:t>spatio</a:t>
+            </a:r>
+            <a:r>
+              <a:rPr lang="en-US" sz="1100" dirty="0">
+                <a:solidFill>
+                  <a:srgbClr val="0070C0"/>
+                </a:solidFill>
+              </a:rPr>
+              <a:t>-temporal </a:t>
+            </a:r>
+          </a:p>
+          <a:p>
+            <a:r>
+              <a:rPr lang="en-US" sz="1100" dirty="0">
+                <a:solidFill>
+                  <a:srgbClr val="0070C0"/>
+                </a:solidFill>
+              </a:rPr>
+              <a:t>   trends, find where and when high/low clusters occur.</a:t>
+            </a:r>
+          </a:p>
+          <a:p>
+            <a:endParaRPr lang="en-US" sz="1100" dirty="0">
+              <a:solidFill>
+                <a:srgbClr val="0070C0"/>
+              </a:solidFill>
+            </a:endParaRPr>
+          </a:p>
+          <a:p>
+            <a:r>
+              <a:rPr lang="en-US" sz="1100" dirty="0">
+                <a:solidFill>
+                  <a:srgbClr val="0070C0"/>
+                </a:solidFill>
+              </a:rPr>
+              <a:t>Section 5</a:t>
+            </a:r>
+          </a:p>
+          <a:p>
+            <a:r>
+              <a:rPr lang="en-US" sz="1100" dirty="0">
+                <a:solidFill>
+                  <a:srgbClr val="0070C0"/>
+                </a:solidFill>
+              </a:rPr>
+              <a:t>Object Detection with Deep Learning</a:t>
+            </a:r>
+          </a:p>
+          <a:p>
+            <a:r>
+              <a:rPr lang="en-US" sz="1100" dirty="0">
+                <a:solidFill>
+                  <a:srgbClr val="0070C0"/>
+                </a:solidFill>
+              </a:rPr>
+              <a:t>  - Prepare training sample data, </a:t>
+            </a:r>
+          </a:p>
+          <a:p>
+            <a:r>
+              <a:rPr lang="en-US" sz="1100" dirty="0">
+                <a:solidFill>
+                  <a:srgbClr val="0070C0"/>
+                </a:solidFill>
+              </a:rPr>
+              <a:t>  - Use a neural network to train an object detection model.</a:t>
+            </a:r>
+          </a:p>
+          <a:p>
+            <a:endParaRPr lang="en-US" sz="1100" dirty="0">
+              <a:solidFill>
+                <a:srgbClr val="0070C0"/>
+              </a:solidFill>
+            </a:endParaRPr>
+          </a:p>
+          <a:p>
+            <a:r>
+              <a:rPr lang="en-US" sz="1100" dirty="0">
+                <a:solidFill>
+                  <a:srgbClr val="0070C0"/>
+                </a:solidFill>
+              </a:rPr>
+              <a:t>Section 6</a:t>
+            </a:r>
+          </a:p>
+          <a:p>
+            <a:r>
+              <a:rPr lang="en-US" sz="1100" dirty="0">
+                <a:solidFill>
+                  <a:srgbClr val="0070C0"/>
+                </a:solidFill>
+              </a:rPr>
+              <a:t>Communicating Results with Impact</a:t>
+            </a:r>
+          </a:p>
+          <a:p>
+            <a:r>
+              <a:rPr lang="en-US" sz="1100" dirty="0">
+                <a:solidFill>
+                  <a:srgbClr val="0070C0"/>
+                </a:solidFill>
+              </a:rPr>
+              <a:t> - Be effective and visual storyteller. </a:t>
+            </a:r>
+          </a:p>
+          <a:p>
+            <a:r>
+              <a:rPr lang="en-US" sz="1100" dirty="0">
+                <a:solidFill>
+                  <a:srgbClr val="0070C0"/>
+                </a:solidFill>
+              </a:rPr>
+              <a:t> - Present facts using information products that resonate with your</a:t>
+            </a:r>
+          </a:p>
+          <a:p>
+            <a:r>
+              <a:rPr lang="en-US" sz="1100" dirty="0">
+                <a:solidFill>
+                  <a:srgbClr val="0070C0"/>
+                </a:solidFill>
+              </a:rPr>
+              <a:t>   audience, make decision-makers to understand and act on it.</a:t>
+            </a:r>
+          </a:p>
+        </p:txBody>
+      </p:sp>
+      <p:sp>
+        <p:nvSpPr>
+          <p:cNvPr id="6" name="TextBox 5">
+            <a:extLst>
+              <a:ext uri="{FF2B5EF4-FFF2-40B4-BE49-F238E27FC236}">
+                <a16:creationId xmlns:a16="http://schemas.microsoft.com/office/drawing/2014/main" id="{DFE8558B-F7AF-424E-8DB1-C56F17407651}"/>
+              </a:ext>
+            </a:extLst>
+          </p:cNvPr>
+          <p:cNvSpPr txBox="1"/>
+          <p:nvPr/>
+        </p:nvSpPr>
+        <p:spPr>
+          <a:xfrm>
+            <a:off x="41564" y="422587"/>
+            <a:ext cx="7322404" cy="2831544"/>
+          </a:xfrm>
+          <a:prstGeom prst="rect">
+            <a:avLst/>
+          </a:prstGeom>
+          <a:noFill/>
+        </p:spPr>
+        <p:txBody>
+          <a:bodyPr wrap="square" rtlCol="0">
+            <a:spAutoFit/>
+          </a:bodyPr>
+          <a:lstStyle/>
+          <a:p>
+            <a:r>
+              <a:rPr lang="en-US" sz="1200" b="1" dirty="0">
+                <a:solidFill>
+                  <a:srgbClr val="0070C0"/>
+                </a:solidFill>
+              </a:rPr>
+              <a:t>ESRI</a:t>
+            </a:r>
+            <a:r>
+              <a:rPr lang="en-US" sz="1200" dirty="0"/>
+              <a:t> = Environmental Systems Research Institute. Since 1969. 1+ Billion revenue, ~4K employees in 73 countries, 49 offices worldwide. GIS Mapping, Location Intelligence, Spatial Analytics.</a:t>
+            </a:r>
+          </a:p>
+          <a:p>
+            <a:r>
+              <a:rPr lang="en-US" sz="1100" dirty="0"/>
+              <a:t> - </a:t>
+            </a:r>
+            <a:r>
+              <a:rPr lang="en-US" sz="1100" dirty="0">
+                <a:hlinkClick r:id="rId2"/>
+              </a:rPr>
+              <a:t>https://en.wikipedia.org/wiki/Esri</a:t>
+            </a:r>
+            <a:r>
+              <a:rPr lang="en-US" sz="1100" dirty="0"/>
+              <a:t> </a:t>
+            </a:r>
+          </a:p>
+          <a:p>
+            <a:r>
+              <a:rPr lang="en-US" sz="1100" dirty="0"/>
+              <a:t> - </a:t>
+            </a:r>
+            <a:r>
+              <a:rPr lang="en-US" sz="1100" dirty="0">
+                <a:hlinkClick r:id="rId3"/>
+              </a:rPr>
+              <a:t>https://www.esri.com/en-us/about/about-esri/who-we-are</a:t>
+            </a:r>
+            <a:r>
+              <a:rPr lang="en-US" sz="1100" dirty="0"/>
+              <a:t> </a:t>
+            </a:r>
+          </a:p>
+          <a:p>
+            <a:r>
+              <a:rPr lang="en-US" sz="1100" dirty="0"/>
+              <a:t> - </a:t>
+            </a:r>
+            <a:r>
+              <a:rPr lang="en-US" sz="1100" dirty="0">
+                <a:hlinkClick r:id="rId4"/>
+              </a:rPr>
+              <a:t>https://www.esri.com/</a:t>
+            </a:r>
+            <a:r>
+              <a:rPr lang="en-US" sz="1100" dirty="0"/>
+              <a:t> </a:t>
+            </a:r>
+          </a:p>
+          <a:p>
+            <a:endParaRPr lang="en-US" sz="800" dirty="0"/>
+          </a:p>
+          <a:p>
+            <a:r>
+              <a:rPr lang="en-US" sz="1200" b="1" dirty="0">
+                <a:solidFill>
+                  <a:srgbClr val="0070C0"/>
+                </a:solidFill>
+              </a:rPr>
+              <a:t>ArcGIS</a:t>
+            </a:r>
+            <a:r>
+              <a:rPr lang="en-US" sz="1200" dirty="0"/>
+              <a:t> - GIS software (online and desktop) provided by ESRI (free, student, commercial options).</a:t>
+            </a:r>
+          </a:p>
+          <a:p>
+            <a:r>
+              <a:rPr lang="en-US" sz="1200" dirty="0"/>
+              <a:t>Arc = "arc" in geometry, GIS = Geographical Information System </a:t>
+            </a:r>
+          </a:p>
+          <a:p>
+            <a:r>
+              <a:rPr lang="en-US" sz="1200" dirty="0"/>
+              <a:t>- </a:t>
+            </a:r>
+            <a:r>
+              <a:rPr lang="en-US" sz="1200" dirty="0">
+                <a:hlinkClick r:id="rId5"/>
+              </a:rPr>
+              <a:t>https://en.wikipedia.org/wiki/ArcGIS</a:t>
+            </a:r>
+            <a:r>
+              <a:rPr lang="en-US" sz="1200" dirty="0"/>
+              <a:t> </a:t>
+            </a:r>
+          </a:p>
+          <a:p>
+            <a:r>
+              <a:rPr lang="en-US" sz="1100" dirty="0"/>
+              <a:t>- </a:t>
+            </a:r>
+            <a:r>
+              <a:rPr lang="en-US" sz="1100" dirty="0">
+                <a:hlinkClick r:id="rId6"/>
+              </a:rPr>
+              <a:t>https://www.esri.com/en-us/arcgis/about-arcgis/overview</a:t>
+            </a:r>
+            <a:r>
+              <a:rPr lang="en-US" sz="1100" dirty="0"/>
+              <a:t> </a:t>
+            </a:r>
+          </a:p>
+          <a:p>
+            <a:r>
+              <a:rPr lang="en-US" sz="1100" dirty="0"/>
+              <a:t>- </a:t>
+            </a:r>
+            <a:r>
+              <a:rPr lang="en-US" sz="1100" dirty="0">
+                <a:hlinkClick r:id="rId7"/>
+              </a:rPr>
+              <a:t>https://www.esri.com/en-us/arcgis/products/index</a:t>
+            </a:r>
+            <a:r>
+              <a:rPr lang="en-US" sz="1100" dirty="0"/>
+              <a:t> </a:t>
+            </a:r>
+          </a:p>
+          <a:p>
+            <a:r>
+              <a:rPr lang="en-US" sz="1100" dirty="0"/>
+              <a:t>- </a:t>
+            </a:r>
+            <a:r>
+              <a:rPr lang="en-US" sz="1100" dirty="0">
+                <a:hlinkClick r:id="rId8"/>
+              </a:rPr>
+              <a:t>https://www.esri.com/en-us/arcgis/products/arcgis-notebooks/overview</a:t>
+            </a:r>
+            <a:r>
+              <a:rPr lang="en-US" sz="1100" dirty="0"/>
+              <a:t> - ArcGIS Notebooks</a:t>
+            </a:r>
+          </a:p>
+          <a:p>
+            <a:r>
+              <a:rPr lang="en-US" sz="1100" dirty="0"/>
+              <a:t>- </a:t>
+            </a:r>
+            <a:r>
+              <a:rPr lang="en-US" sz="1100" dirty="0">
+                <a:hlinkClick r:id="rId9"/>
+              </a:rPr>
+              <a:t>https://github.com/Esri</a:t>
+            </a:r>
+            <a:r>
+              <a:rPr lang="en-US" sz="1100" dirty="0"/>
+              <a:t> - about 600 repositories</a:t>
+            </a:r>
+          </a:p>
+          <a:p>
+            <a:r>
+              <a:rPr lang="en-US" sz="1100" dirty="0"/>
+              <a:t>- </a:t>
+            </a:r>
+            <a:r>
+              <a:rPr lang="en-US" sz="1100" dirty="0">
+                <a:hlinkClick r:id="rId10"/>
+              </a:rPr>
+              <a:t>https://www.youtube.com/watch?v=UL6atkzPvsw</a:t>
+            </a:r>
+            <a:r>
+              <a:rPr lang="en-US" sz="1100" dirty="0"/>
+              <a:t> - Spatial Data Science - A Tour</a:t>
+            </a:r>
+          </a:p>
+          <a:p>
+            <a:r>
+              <a:rPr lang="en-US" sz="1100" dirty="0"/>
+              <a:t>- </a:t>
+            </a:r>
+            <a:r>
+              <a:rPr lang="en-US" sz="1100" dirty="0">
+                <a:hlinkClick r:id="rId11"/>
+              </a:rPr>
+              <a:t>https://desktop.arcgis.com/en/documentation/</a:t>
+            </a:r>
+            <a:r>
+              <a:rPr lang="en-US" sz="1100" dirty="0"/>
+              <a:t> - documentation</a:t>
+            </a:r>
+          </a:p>
+          <a:p>
+            <a:r>
+              <a:rPr lang="en-US" sz="1100" dirty="0"/>
+              <a:t>- </a:t>
+            </a:r>
+            <a:r>
+              <a:rPr lang="en-US" sz="1100" dirty="0">
+                <a:hlinkClick r:id="rId12"/>
+              </a:rPr>
+              <a:t>https://www.youtube.com/watch?v=BbUctneHfKc</a:t>
+            </a:r>
+            <a:r>
+              <a:rPr lang="en-US" sz="1100" dirty="0"/>
+              <a:t> – ArcGIS tutorial (part 1 of series)</a:t>
+            </a:r>
+          </a:p>
+        </p:txBody>
+      </p:sp>
+      <p:pic>
+        <p:nvPicPr>
+          <p:cNvPr id="9" name="Picture 8">
+            <a:extLst>
+              <a:ext uri="{FF2B5EF4-FFF2-40B4-BE49-F238E27FC236}">
+                <a16:creationId xmlns:a16="http://schemas.microsoft.com/office/drawing/2014/main" id="{2C5CDEF7-A365-AE46-A844-151E3C7CF717}"/>
+              </a:ext>
+            </a:extLst>
+          </p:cNvPr>
+          <p:cNvPicPr>
+            <a:picLocks noChangeAspect="1"/>
+          </p:cNvPicPr>
+          <p:nvPr/>
+        </p:nvPicPr>
+        <p:blipFill>
+          <a:blip r:embed="rId13"/>
+          <a:stretch>
+            <a:fillRect/>
+          </a:stretch>
+        </p:blipFill>
+        <p:spPr>
+          <a:xfrm>
+            <a:off x="9614390" y="277090"/>
+            <a:ext cx="2112906" cy="1633690"/>
+          </a:xfrm>
+          <a:prstGeom prst="rect">
+            <a:avLst/>
+          </a:prstGeom>
+        </p:spPr>
+      </p:pic>
+      <p:sp>
+        <p:nvSpPr>
+          <p:cNvPr id="2" name="TextBox 1">
+            <a:extLst>
+              <a:ext uri="{FF2B5EF4-FFF2-40B4-BE49-F238E27FC236}">
+                <a16:creationId xmlns:a16="http://schemas.microsoft.com/office/drawing/2014/main" id="{E00E778D-3D28-8745-A810-7736FD1C8266}"/>
+              </a:ext>
+            </a:extLst>
+          </p:cNvPr>
+          <p:cNvSpPr txBox="1"/>
+          <p:nvPr/>
+        </p:nvSpPr>
+        <p:spPr>
+          <a:xfrm>
+            <a:off x="41564" y="0"/>
+            <a:ext cx="2422236" cy="461665"/>
+          </a:xfrm>
+          <a:prstGeom prst="rect">
+            <a:avLst/>
+          </a:prstGeom>
+          <a:noFill/>
+        </p:spPr>
+        <p:txBody>
+          <a:bodyPr wrap="square" rtlCol="0">
+            <a:spAutoFit/>
+          </a:bodyPr>
+          <a:lstStyle/>
+          <a:p>
+            <a:r>
+              <a:rPr lang="en-US" sz="2400" b="1" dirty="0"/>
+              <a:t>ESRI ArcGIS</a:t>
+            </a:r>
+            <a:endParaRPr lang="en-US" sz="2400" dirty="0"/>
+          </a:p>
+        </p:txBody>
+      </p:sp>
+    </p:spTree>
+    <p:extLst>
+      <p:ext uri="{BB962C8B-B14F-4D97-AF65-F5344CB8AC3E}">
+        <p14:creationId xmlns:p14="http://schemas.microsoft.com/office/powerpoint/2010/main" val="778473791"/>
+      </p:ext>
+    </p:extLst>
+  </p:cSld>
+  <p:clrMapOvr>
+    <a:masterClrMapping/>
+  </p:clrMapOvr>
+</p:sld>
+</file>
+
+<file path=ppt/slides/slide3.xml><?xml version="1.0" encoding="utf-8"?>
+<p:sld xmlns:a="http://schemas.openxmlformats.org/drawingml/2006/main" xmlns:r="http://schemas.openxmlformats.org/officeDocument/2006/relationships" xmlns:p="http://schemas.openxmlformats.org/presentationml/2006/main">
+  <p:cSld>
+    <p:spTree>
+      <p:nvGrpSpPr>
+        <p:cNvPr id="1" name=""/>
+        <p:cNvGrpSpPr/>
+        <p:nvPr/>
+      </p:nvGrpSpPr>
+      <p:grpSpPr>
+        <a:xfrm>
+          <a:off x="0" y="0"/>
+          <a:ext cx="0" cy="0"/>
+          <a:chOff x="0" y="0"/>
+          <a:chExt cx="0" cy="0"/>
+        </a:xfrm>
+      </p:grpSpPr>
+      <p:sp>
+        <p:nvSpPr>
+          <p:cNvPr id="3" name="TextBox 2">
+            <a:extLst>
+              <a:ext uri="{FF2B5EF4-FFF2-40B4-BE49-F238E27FC236}">
+                <a16:creationId xmlns:a16="http://schemas.microsoft.com/office/drawing/2014/main" id="{BC4AA98A-16C3-F04C-9FCA-DF4D7B490343}"/>
+              </a:ext>
+            </a:extLst>
+          </p:cNvPr>
+          <p:cNvSpPr txBox="1"/>
+          <p:nvPr/>
+        </p:nvSpPr>
+        <p:spPr>
+          <a:xfrm>
+            <a:off x="5996859" y="4771782"/>
+            <a:ext cx="5963493" cy="1754326"/>
+          </a:xfrm>
+          <a:prstGeom prst="rect">
+            <a:avLst/>
+          </a:prstGeom>
+          <a:noFill/>
+        </p:spPr>
+        <p:txBody>
+          <a:bodyPr wrap="square" rtlCol="0">
+            <a:spAutoFit/>
+          </a:bodyPr>
+          <a:lstStyle/>
+          <a:p>
+            <a:r>
+              <a:rPr lang="en-US" sz="1200" dirty="0"/>
+              <a:t>You typically you don't need to read the entire </a:t>
+            </a:r>
+            <a:r>
+              <a:rPr lang="en-US" sz="1200" b="1" dirty="0">
+                <a:solidFill>
+                  <a:srgbClr val="0070C0"/>
+                </a:solidFill>
+              </a:rPr>
+              <a:t>TIFF</a:t>
+            </a:r>
+            <a:r>
+              <a:rPr lang="en-US" sz="1200" dirty="0"/>
+              <a:t> file when doing analysis.</a:t>
+            </a:r>
+          </a:p>
+          <a:p>
+            <a:r>
+              <a:rPr lang="en-US" sz="1200" dirty="0"/>
+              <a:t>Better approach is to use cloud-optimized </a:t>
+            </a:r>
+            <a:r>
+              <a:rPr lang="en-US" sz="1200" b="1" dirty="0" err="1">
+                <a:solidFill>
+                  <a:srgbClr val="0070C0"/>
+                </a:solidFill>
+              </a:rPr>
+              <a:t>GeoTIFF</a:t>
+            </a:r>
+            <a:r>
+              <a:rPr lang="en-US" sz="1200" dirty="0"/>
+              <a:t> format:</a:t>
+            </a:r>
+          </a:p>
+          <a:p>
+            <a:r>
+              <a:rPr lang="en-US" sz="1200" dirty="0"/>
+              <a:t> - </a:t>
+            </a:r>
+            <a:r>
+              <a:rPr lang="en-US" sz="1200" dirty="0">
+                <a:hlinkClick r:id="rId2"/>
+              </a:rPr>
+              <a:t>http://cogeo.org</a:t>
+            </a:r>
+            <a:r>
+              <a:rPr lang="en-US" sz="1200" dirty="0"/>
+              <a:t> .</a:t>
+            </a:r>
+          </a:p>
+          <a:p>
+            <a:endParaRPr lang="en-US" sz="1200" dirty="0"/>
+          </a:p>
+          <a:p>
+            <a:r>
+              <a:rPr lang="en-US" sz="1200" dirty="0"/>
+              <a:t>This is still a proper </a:t>
+            </a:r>
+            <a:r>
+              <a:rPr lang="en-US" sz="1200" b="1" dirty="0">
+                <a:solidFill>
+                  <a:srgbClr val="0070C0"/>
+                </a:solidFill>
+              </a:rPr>
+              <a:t>TIFF</a:t>
+            </a:r>
+            <a:r>
+              <a:rPr lang="en-US" sz="1200" dirty="0"/>
+              <a:t> file, but its header contains</a:t>
+            </a:r>
+          </a:p>
+          <a:p>
+            <a:r>
+              <a:rPr lang="en-US" sz="1200" dirty="0"/>
+              <a:t>"table of contents" for the file (which areas of the image are in what parts of the file). </a:t>
+            </a:r>
+          </a:p>
+          <a:p>
+            <a:endParaRPr lang="en-US" sz="1200" dirty="0"/>
+          </a:p>
+          <a:p>
+            <a:r>
+              <a:rPr lang="en-US" sz="1200" dirty="0"/>
+              <a:t>You can typically convert </a:t>
+            </a:r>
+            <a:r>
+              <a:rPr lang="en-US" sz="1200" b="1" dirty="0" err="1">
+                <a:solidFill>
+                  <a:srgbClr val="0070C0"/>
+                </a:solidFill>
+              </a:rPr>
+              <a:t>GeoTIFF</a:t>
+            </a:r>
+            <a:r>
+              <a:rPr lang="en-US" sz="1200" dirty="0"/>
+              <a:t> to </a:t>
+            </a:r>
+            <a:r>
+              <a:rPr lang="en-US" sz="1200" b="1" dirty="0">
+                <a:solidFill>
+                  <a:srgbClr val="0070C0"/>
+                </a:solidFill>
+              </a:rPr>
+              <a:t>COG</a:t>
+            </a:r>
+            <a:r>
+              <a:rPr lang="en-US" sz="1200" dirty="0"/>
+              <a:t> with </a:t>
+            </a:r>
+            <a:r>
+              <a:rPr lang="en-US" sz="1200" b="1" dirty="0">
+                <a:solidFill>
+                  <a:srgbClr val="0070C0"/>
+                </a:solidFill>
+              </a:rPr>
+              <a:t>GDAL</a:t>
+            </a:r>
+            <a:r>
+              <a:rPr lang="en-US" sz="1200" dirty="0"/>
+              <a:t>:</a:t>
+            </a:r>
+            <a:br>
+              <a:rPr lang="en-US" sz="1200" dirty="0"/>
+            </a:br>
+            <a:r>
+              <a:rPr lang="en-US" sz="1200" dirty="0"/>
+              <a:t> - </a:t>
+            </a:r>
+            <a:r>
+              <a:rPr lang="en-US" sz="1200" dirty="0">
+                <a:hlinkClick r:id="rId3"/>
+              </a:rPr>
+              <a:t>https://gdal.org/drivers/raster/cog.html</a:t>
+            </a:r>
+            <a:r>
+              <a:rPr lang="en-US" sz="1200" dirty="0"/>
+              <a:t>  </a:t>
+            </a:r>
+          </a:p>
+        </p:txBody>
+      </p:sp>
+      <p:pic>
+        <p:nvPicPr>
+          <p:cNvPr id="4098" name="Picture 2" descr="Azure Database for PostgreSQL (@AzureDBPostgres) | Twitter">
+            <a:extLst>
+              <a:ext uri="{FF2B5EF4-FFF2-40B4-BE49-F238E27FC236}">
+                <a16:creationId xmlns:a16="http://schemas.microsoft.com/office/drawing/2014/main" id="{BDD05455-AF8E-EB4A-B2B0-F6618975AC92}"/>
+              </a:ext>
+            </a:extLst>
+          </p:cNvPr>
+          <p:cNvPicPr>
+            <a:picLocks noChangeAspect="1" noChangeArrowheads="1"/>
+          </p:cNvPicPr>
+          <p:nvPr/>
+        </p:nvPicPr>
+        <p:blipFill rotWithShape="1">
+          <a:blip r:embed="rId4" cstate="email">
+            <a:extLst>
+              <a:ext uri="{28A0092B-C50C-407E-A947-70E740481C1C}">
+                <a14:useLocalDpi xmlns:a14="http://schemas.microsoft.com/office/drawing/2010/main"/>
+              </a:ext>
+            </a:extLst>
+          </a:blip>
+          <a:srcRect/>
+          <a:stretch/>
+        </p:blipFill>
+        <p:spPr bwMode="auto">
+          <a:xfrm flipH="1">
+            <a:off x="1002956" y="1585642"/>
+            <a:ext cx="610803" cy="778291"/>
+          </a:xfrm>
+          <a:prstGeom prst="rect">
+            <a:avLst/>
+          </a:prstGeom>
+          <a:noFill/>
+          <a:extLst>
+            <a:ext uri="{909E8E84-426E-40DD-AFC4-6F175D3DCCD1}">
+              <a14:hiddenFill xmlns:a14="http://schemas.microsoft.com/office/drawing/2010/main">
+                <a:solidFill>
+                  <a:srgbClr val="FFFFFF"/>
+                </a:solidFill>
+              </a14:hiddenFill>
+            </a:ext>
+          </a:extLst>
+        </p:spPr>
+      </p:pic>
+      <p:pic>
+        <p:nvPicPr>
+          <p:cNvPr id="4100" name="Picture 4" descr="Azure Storage Blob Icon – Free Download, PNG and Vector">
+            <a:extLst>
+              <a:ext uri="{FF2B5EF4-FFF2-40B4-BE49-F238E27FC236}">
+                <a16:creationId xmlns:a16="http://schemas.microsoft.com/office/drawing/2014/main" id="{21A122A1-57C2-514A-9838-D1E47A10384E}"/>
+              </a:ext>
+            </a:extLst>
+          </p:cNvPr>
+          <p:cNvPicPr>
+            <a:picLocks noChangeAspect="1" noChangeArrowheads="1"/>
+          </p:cNvPicPr>
+          <p:nvPr/>
+        </p:nvPicPr>
+        <p:blipFill rotWithShape="1">
+          <a:blip r:embed="rId5" cstate="email">
+            <a:extLst>
+              <a:ext uri="{28A0092B-C50C-407E-A947-70E740481C1C}">
+                <a14:useLocalDpi xmlns:a14="http://schemas.microsoft.com/office/drawing/2010/main"/>
+              </a:ext>
+            </a:extLst>
+          </a:blip>
+          <a:srcRect/>
+          <a:stretch/>
+        </p:blipFill>
+        <p:spPr bwMode="auto">
+          <a:xfrm>
+            <a:off x="3137759" y="1585642"/>
+            <a:ext cx="912249" cy="816346"/>
+          </a:xfrm>
+          <a:prstGeom prst="rect">
+            <a:avLst/>
+          </a:prstGeom>
+          <a:noFill/>
+          <a:extLst>
+            <a:ext uri="{909E8E84-426E-40DD-AFC4-6F175D3DCCD1}">
+              <a14:hiddenFill xmlns:a14="http://schemas.microsoft.com/office/drawing/2010/main">
+                <a:solidFill>
+                  <a:srgbClr val="FFFFFF"/>
+                </a:solidFill>
+              </a14:hiddenFill>
+            </a:ext>
+          </a:extLst>
+        </p:spPr>
+      </p:pic>
+      <p:sp>
+        <p:nvSpPr>
+          <p:cNvPr id="4" name="TextBox 3">
+            <a:extLst>
+              <a:ext uri="{FF2B5EF4-FFF2-40B4-BE49-F238E27FC236}">
+                <a16:creationId xmlns:a16="http://schemas.microsoft.com/office/drawing/2014/main" id="{664D2222-A259-0547-B9A3-C4E2F347B18A}"/>
+              </a:ext>
+            </a:extLst>
+          </p:cNvPr>
+          <p:cNvSpPr txBox="1"/>
+          <p:nvPr/>
+        </p:nvSpPr>
+        <p:spPr>
+          <a:xfrm>
+            <a:off x="733125" y="2385714"/>
+            <a:ext cx="1150463" cy="523220"/>
+          </a:xfrm>
+          <a:prstGeom prst="rect">
+            <a:avLst/>
+          </a:prstGeom>
+          <a:noFill/>
+        </p:spPr>
+        <p:txBody>
+          <a:bodyPr wrap="square" rtlCol="0">
+            <a:spAutoFit/>
+          </a:bodyPr>
+          <a:lstStyle/>
+          <a:p>
+            <a:pPr algn="ctr"/>
+            <a:r>
+              <a:rPr lang="en-US" sz="1400" b="1" dirty="0">
+                <a:solidFill>
+                  <a:srgbClr val="0070C0"/>
+                </a:solidFill>
+              </a:rPr>
+              <a:t>Metadata</a:t>
+            </a:r>
+            <a:br>
+              <a:rPr lang="en-US" sz="1400" b="1" dirty="0">
+                <a:solidFill>
+                  <a:srgbClr val="0070C0"/>
+                </a:solidFill>
+              </a:rPr>
+            </a:br>
+            <a:r>
+              <a:rPr lang="en-US" sz="1400" b="1" dirty="0">
+                <a:solidFill>
+                  <a:srgbClr val="0070C0"/>
+                </a:solidFill>
+              </a:rPr>
+              <a:t>in SQL DB</a:t>
+            </a:r>
+          </a:p>
+        </p:txBody>
+      </p:sp>
+      <p:sp>
+        <p:nvSpPr>
+          <p:cNvPr id="8" name="TextBox 7">
+            <a:extLst>
+              <a:ext uri="{FF2B5EF4-FFF2-40B4-BE49-F238E27FC236}">
+                <a16:creationId xmlns:a16="http://schemas.microsoft.com/office/drawing/2014/main" id="{7BE84D19-955B-864F-9A3A-CA3BFE0A16B5}"/>
+              </a:ext>
+            </a:extLst>
+          </p:cNvPr>
+          <p:cNvSpPr txBox="1"/>
+          <p:nvPr/>
+        </p:nvSpPr>
+        <p:spPr>
+          <a:xfrm>
+            <a:off x="2795001" y="2413503"/>
+            <a:ext cx="1597764" cy="307777"/>
+          </a:xfrm>
+          <a:prstGeom prst="rect">
+            <a:avLst/>
+          </a:prstGeom>
+          <a:noFill/>
+        </p:spPr>
+        <p:txBody>
+          <a:bodyPr wrap="square" rtlCol="0">
+            <a:spAutoFit/>
+          </a:bodyPr>
+          <a:lstStyle/>
+          <a:p>
+            <a:pPr algn="ctr"/>
+            <a:r>
+              <a:rPr lang="en-US" sz="1400" b="1" dirty="0" err="1">
+                <a:solidFill>
+                  <a:srgbClr val="0070C0"/>
+                </a:solidFill>
+              </a:rPr>
+              <a:t>GeoTIFF</a:t>
+            </a:r>
+            <a:r>
+              <a:rPr lang="en-US" sz="1400" b="1" dirty="0">
+                <a:solidFill>
+                  <a:srgbClr val="0070C0"/>
+                </a:solidFill>
+              </a:rPr>
+              <a:t> files </a:t>
+            </a:r>
+          </a:p>
+        </p:txBody>
+      </p:sp>
+      <p:sp>
+        <p:nvSpPr>
+          <p:cNvPr id="6" name="TextBox 5">
+            <a:extLst>
+              <a:ext uri="{FF2B5EF4-FFF2-40B4-BE49-F238E27FC236}">
+                <a16:creationId xmlns:a16="http://schemas.microsoft.com/office/drawing/2014/main" id="{75DD3E81-E361-6449-BBA1-AE1C255BE66E}"/>
+              </a:ext>
+            </a:extLst>
+          </p:cNvPr>
+          <p:cNvSpPr txBox="1"/>
+          <p:nvPr/>
+        </p:nvSpPr>
+        <p:spPr>
+          <a:xfrm>
+            <a:off x="361695" y="3147473"/>
+            <a:ext cx="4844289" cy="2862322"/>
+          </a:xfrm>
+          <a:prstGeom prst="rect">
+            <a:avLst/>
+          </a:prstGeom>
+          <a:noFill/>
+        </p:spPr>
+        <p:txBody>
+          <a:bodyPr wrap="square" rtlCol="0">
+            <a:spAutoFit/>
+          </a:bodyPr>
+          <a:lstStyle/>
+          <a:p>
+            <a:r>
+              <a:rPr lang="en-US" sz="1200" b="1" dirty="0" err="1">
+                <a:solidFill>
+                  <a:srgbClr val="0070C0"/>
+                </a:solidFill>
+              </a:rPr>
+              <a:t>PostGIS</a:t>
+            </a:r>
+            <a:r>
+              <a:rPr lang="en-US" sz="1200" dirty="0"/>
+              <a:t> - spatial database extender for PostgreSQL</a:t>
+            </a:r>
+          </a:p>
+          <a:p>
+            <a:r>
+              <a:rPr lang="en-US" sz="1200" dirty="0"/>
+              <a:t>   (since 2001) </a:t>
+            </a:r>
+            <a:br>
+              <a:rPr lang="en-US" sz="1200" dirty="0"/>
+            </a:br>
+            <a:r>
+              <a:rPr lang="en-US" sz="1200" dirty="0"/>
+              <a:t> - </a:t>
+            </a:r>
+            <a:r>
+              <a:rPr lang="en-US" sz="1200" dirty="0">
+                <a:hlinkClick r:id="rId6"/>
+              </a:rPr>
+              <a:t>https://postgis.net/</a:t>
+            </a:r>
+            <a:r>
+              <a:rPr lang="en-US" sz="1200" dirty="0"/>
+              <a:t> </a:t>
+            </a:r>
+          </a:p>
+          <a:p>
+            <a:r>
+              <a:rPr lang="en-US" sz="1200" dirty="0"/>
+              <a:t> - </a:t>
+            </a:r>
+            <a:r>
+              <a:rPr lang="en-US" sz="1200" dirty="0">
+                <a:hlinkClick r:id="rId7"/>
+              </a:rPr>
+              <a:t>https://postgis.net/stuff/postgis-3.1.pdf</a:t>
+            </a:r>
+            <a:r>
+              <a:rPr lang="en-US" sz="1200" dirty="0"/>
+              <a:t> ( 874p. manual)</a:t>
+            </a:r>
+          </a:p>
+          <a:p>
+            <a:r>
+              <a:rPr lang="en-US" sz="1200" dirty="0"/>
+              <a:t> - </a:t>
+            </a:r>
+            <a:r>
+              <a:rPr lang="en-US" sz="1200" dirty="0">
+                <a:hlinkClick r:id="rId8"/>
+              </a:rPr>
+              <a:t>https://en.wikipedia.org/wiki/PostGIS</a:t>
+            </a:r>
+            <a:r>
+              <a:rPr lang="en-US" sz="1200" dirty="0"/>
+              <a:t> </a:t>
+            </a:r>
+          </a:p>
+          <a:p>
+            <a:endParaRPr lang="en-US" sz="1200" dirty="0"/>
+          </a:p>
+          <a:p>
+            <a:r>
+              <a:rPr lang="en-US" sz="1200" dirty="0"/>
+              <a:t>Great lecture by Paul Ramsey:</a:t>
+            </a:r>
+          </a:p>
+          <a:p>
+            <a:r>
+              <a:rPr lang="en-US" sz="1200" dirty="0"/>
+              <a:t> - </a:t>
+            </a:r>
+            <a:r>
+              <a:rPr lang="en-US" sz="1200" dirty="0">
+                <a:hlinkClick r:id="rId9"/>
+              </a:rPr>
+              <a:t>https://www.youtube.com/watch?v=g4DgAVCmiDE</a:t>
+            </a:r>
+            <a:r>
+              <a:rPr lang="en-US" sz="1200" dirty="0"/>
+              <a:t> </a:t>
+            </a:r>
+          </a:p>
+          <a:p>
+            <a:endParaRPr lang="en-US" sz="1200" dirty="0"/>
+          </a:p>
+          <a:p>
+            <a:r>
+              <a:rPr lang="en-US" sz="1200" dirty="0"/>
+              <a:t>Azure </a:t>
+            </a:r>
+            <a:r>
+              <a:rPr lang="en-US" sz="1200" b="1" dirty="0">
+                <a:solidFill>
+                  <a:srgbClr val="0070C0"/>
+                </a:solidFill>
+              </a:rPr>
+              <a:t>PostgreSQL</a:t>
+            </a:r>
+            <a:r>
+              <a:rPr lang="en-US" sz="1200" dirty="0"/>
+              <a:t> flexible server</a:t>
+            </a:r>
+          </a:p>
+          <a:p>
+            <a:r>
+              <a:rPr lang="en-US" sz="1200" dirty="0"/>
+              <a:t>- </a:t>
+            </a:r>
+            <a:r>
+              <a:rPr lang="en-US" sz="1200" dirty="0">
+                <a:hlinkClick r:id="rId10"/>
+              </a:rPr>
+              <a:t>https://docs.microsoft.com/en-us/azure/postgresql/flexible-server/</a:t>
+            </a:r>
+            <a:r>
+              <a:rPr lang="en-US" sz="1200" dirty="0"/>
+              <a:t> </a:t>
+            </a:r>
+          </a:p>
+          <a:p>
+            <a:endParaRPr lang="en-US" sz="1200" dirty="0"/>
+          </a:p>
+          <a:p>
+            <a:r>
+              <a:rPr lang="en-US" sz="1200" dirty="0"/>
+              <a:t>Good advisor - Dan Morris, </a:t>
+            </a:r>
+            <a:r>
+              <a:rPr lang="en-US" sz="1200" dirty="0" err="1"/>
+              <a:t>MicrosoftAI</a:t>
+            </a:r>
+            <a:r>
+              <a:rPr lang="en-US" sz="1200" dirty="0"/>
+              <a:t> for Earth Program Director (also Rob on his team)</a:t>
+            </a:r>
+          </a:p>
+          <a:p>
+            <a:r>
+              <a:rPr lang="en-US" sz="1200" dirty="0"/>
+              <a:t> - </a:t>
+            </a:r>
+            <a:r>
+              <a:rPr lang="en-US" sz="1200" dirty="0">
+                <a:hlinkClick r:id="rId11"/>
+              </a:rPr>
+              <a:t>https://github.com/microsoft/AIforEarthDatasets</a:t>
+            </a:r>
+            <a:r>
+              <a:rPr lang="en-US" sz="1200" dirty="0"/>
+              <a:t>  </a:t>
+            </a:r>
+          </a:p>
+        </p:txBody>
+      </p:sp>
+      <p:sp>
+        <p:nvSpPr>
+          <p:cNvPr id="7" name="Up-Down Arrow 6">
+            <a:extLst>
+              <a:ext uri="{FF2B5EF4-FFF2-40B4-BE49-F238E27FC236}">
+                <a16:creationId xmlns:a16="http://schemas.microsoft.com/office/drawing/2014/main" id="{3F666B02-3312-9F4C-B66F-5EE32A443FC1}"/>
+              </a:ext>
+            </a:extLst>
+          </p:cNvPr>
+          <p:cNvSpPr/>
+          <p:nvPr/>
+        </p:nvSpPr>
+        <p:spPr>
+          <a:xfrm rot="5400000">
+            <a:off x="2264496" y="1688275"/>
+            <a:ext cx="329184" cy="573024"/>
+          </a:xfrm>
+          <a:prstGeom prst="upDownArrow">
+            <a:avLst/>
+          </a:prstGeom>
+        </p:spPr>
+        <p:style>
+          <a:lnRef idx="2">
+            <a:schemeClr val="accent1">
+              <a:shade val="50000"/>
+            </a:schemeClr>
+          </a:lnRef>
+          <a:fillRef idx="1">
+            <a:schemeClr val="accent1"/>
+          </a:fillRef>
+          <a:effectRef idx="0">
+            <a:schemeClr val="accent1"/>
+          </a:effectRef>
+          <a:fontRef idx="minor">
+            <a:schemeClr val="lt1"/>
+          </a:fontRef>
+        </p:style>
+        <p:txBody>
+          <a:bodyPr rtlCol="0" anchor="ctr"/>
+          <a:lstStyle/>
+          <a:p>
+            <a:pPr algn="ctr"/>
+            <a:endParaRPr lang="en-US"/>
+          </a:p>
+        </p:txBody>
+      </p:sp>
+      <p:sp>
+        <p:nvSpPr>
+          <p:cNvPr id="10" name="Rectangle 9">
+            <a:extLst>
+              <a:ext uri="{FF2B5EF4-FFF2-40B4-BE49-F238E27FC236}">
+                <a16:creationId xmlns:a16="http://schemas.microsoft.com/office/drawing/2014/main" id="{B788F115-CF76-CF4C-84D8-3F667DCD8E43}"/>
+              </a:ext>
+            </a:extLst>
+          </p:cNvPr>
+          <p:cNvSpPr/>
+          <p:nvPr/>
+        </p:nvSpPr>
+        <p:spPr>
+          <a:xfrm>
+            <a:off x="1806346" y="196782"/>
+            <a:ext cx="2648482" cy="830997"/>
+          </a:xfrm>
+          <a:prstGeom prst="rect">
+            <a:avLst/>
+          </a:prstGeom>
+        </p:spPr>
+        <p:txBody>
+          <a:bodyPr wrap="none">
+            <a:spAutoFit/>
+          </a:bodyPr>
+          <a:lstStyle/>
+          <a:p>
+            <a:r>
+              <a:rPr lang="en-US" sz="2400" b="1" dirty="0" err="1">
+                <a:solidFill>
+                  <a:srgbClr val="0070C0"/>
+                </a:solidFill>
+              </a:rPr>
+              <a:t>PostGIS</a:t>
+            </a:r>
+            <a:endParaRPr lang="en-US" sz="2400" b="1" dirty="0">
+              <a:solidFill>
+                <a:srgbClr val="0070C0"/>
+              </a:solidFill>
+            </a:endParaRPr>
+          </a:p>
+          <a:p>
+            <a:r>
+              <a:rPr lang="en-US" sz="2400" b="1" dirty="0">
+                <a:solidFill>
+                  <a:srgbClr val="0070C0"/>
+                </a:solidFill>
+              </a:rPr>
+              <a:t>Spatial Database</a:t>
+            </a:r>
+          </a:p>
+        </p:txBody>
+      </p:sp>
+      <p:sp>
+        <p:nvSpPr>
+          <p:cNvPr id="12" name="TextBox 11">
+            <a:extLst>
+              <a:ext uri="{FF2B5EF4-FFF2-40B4-BE49-F238E27FC236}">
+                <a16:creationId xmlns:a16="http://schemas.microsoft.com/office/drawing/2014/main" id="{4CD7E713-8C34-6D4B-8A84-E737665D4764}"/>
+              </a:ext>
+            </a:extLst>
+          </p:cNvPr>
+          <p:cNvSpPr txBox="1"/>
+          <p:nvPr/>
+        </p:nvSpPr>
+        <p:spPr>
+          <a:xfrm>
+            <a:off x="5996859" y="563540"/>
+            <a:ext cx="6278880" cy="3231654"/>
+          </a:xfrm>
+          <a:prstGeom prst="rect">
+            <a:avLst/>
+          </a:prstGeom>
+          <a:noFill/>
+        </p:spPr>
+        <p:txBody>
+          <a:bodyPr wrap="square" rtlCol="0">
+            <a:spAutoFit/>
+          </a:bodyPr>
+          <a:lstStyle/>
+          <a:p>
+            <a:r>
+              <a:rPr lang="en-US" sz="1200" b="1" dirty="0">
+                <a:solidFill>
+                  <a:srgbClr val="0070C0"/>
+                </a:solidFill>
+              </a:rPr>
+              <a:t>The essence of ESRI Image Server: </a:t>
+            </a:r>
+          </a:p>
+          <a:p>
+            <a:r>
+              <a:rPr lang="en-US" sz="1200" b="1" dirty="0">
+                <a:solidFill>
+                  <a:srgbClr val="0070C0"/>
+                </a:solidFill>
+              </a:rPr>
+              <a:t>store the data about the geometry of the images </a:t>
+            </a:r>
+          </a:p>
+          <a:p>
+            <a:r>
+              <a:rPr lang="en-US" sz="1200" b="1" dirty="0">
+                <a:solidFill>
+                  <a:srgbClr val="0070C0"/>
+                </a:solidFill>
+              </a:rPr>
+              <a:t>in a big metadata store (SQL database)</a:t>
+            </a:r>
+          </a:p>
+          <a:p>
+            <a:r>
+              <a:rPr lang="en-US" sz="1200" b="1" dirty="0">
+                <a:solidFill>
+                  <a:srgbClr val="0070C0"/>
+                </a:solidFill>
+              </a:rPr>
+              <a:t>(with pointers to blob storage).</a:t>
+            </a:r>
+          </a:p>
+          <a:p>
+            <a:endParaRPr lang="en-US" sz="1200" dirty="0"/>
+          </a:p>
+          <a:p>
+            <a:r>
+              <a:rPr lang="en-US" sz="1200" b="1" dirty="0">
+                <a:solidFill>
+                  <a:srgbClr val="FF0000"/>
+                </a:solidFill>
+              </a:rPr>
+              <a:t>You can achieve similar functionality </a:t>
+            </a:r>
+          </a:p>
+          <a:p>
+            <a:r>
+              <a:rPr lang="en-US" sz="1200" b="1" dirty="0">
+                <a:solidFill>
+                  <a:srgbClr val="FF0000"/>
+                </a:solidFill>
+              </a:rPr>
+              <a:t>by using a managed database with geospatial extensions </a:t>
+            </a:r>
+          </a:p>
+          <a:p>
+            <a:r>
+              <a:rPr lang="en-US" sz="1200" dirty="0"/>
+              <a:t>that will let you run spatial/temporal queries over geospatial metadata:</a:t>
+            </a:r>
+          </a:p>
+          <a:p>
+            <a:endParaRPr lang="en-US" sz="1200" dirty="0"/>
+          </a:p>
+          <a:p>
+            <a:r>
+              <a:rPr lang="en-US" sz="1200" b="1" dirty="0">
+                <a:solidFill>
+                  <a:srgbClr val="0070C0"/>
+                </a:solidFill>
+              </a:rPr>
+              <a:t>PostgreSQL + </a:t>
+            </a:r>
+            <a:r>
+              <a:rPr lang="en-US" sz="1200" b="1" dirty="0" err="1">
+                <a:solidFill>
+                  <a:srgbClr val="0070C0"/>
+                </a:solidFill>
+              </a:rPr>
+              <a:t>PostGIS</a:t>
+            </a:r>
+            <a:r>
+              <a:rPr lang="en-US" sz="1200" b="1" dirty="0">
+                <a:solidFill>
+                  <a:srgbClr val="0070C0"/>
+                </a:solidFill>
+              </a:rPr>
+              <a:t>:</a:t>
+            </a:r>
+          </a:p>
+          <a:p>
+            <a:r>
+              <a:rPr lang="en-US" sz="1200" dirty="0"/>
+              <a:t> - </a:t>
+            </a:r>
+            <a:r>
+              <a:rPr lang="en-US" sz="1200" dirty="0">
+                <a:hlinkClick r:id="rId12"/>
+              </a:rPr>
+              <a:t>https://azure.microsoft.com/en-us/services/postgresql/</a:t>
+            </a:r>
+            <a:r>
+              <a:rPr lang="en-US" sz="1200" dirty="0"/>
+              <a:t>     </a:t>
+            </a:r>
+          </a:p>
+          <a:p>
+            <a:endParaRPr lang="en-US" sz="1200" dirty="0"/>
+          </a:p>
+          <a:p>
+            <a:r>
+              <a:rPr lang="en-US" sz="1200" b="1" dirty="0">
+                <a:solidFill>
+                  <a:srgbClr val="0070C0"/>
+                </a:solidFill>
+              </a:rPr>
+              <a:t>MS SQL Server:</a:t>
+            </a:r>
+            <a:r>
+              <a:rPr lang="en-US" sz="1200" dirty="0"/>
+              <a:t> </a:t>
+            </a:r>
+            <a:br>
+              <a:rPr lang="en-US" sz="1200" dirty="0"/>
+            </a:br>
+            <a:r>
+              <a:rPr lang="en-US" sz="1200" dirty="0"/>
+              <a:t> - </a:t>
+            </a:r>
+            <a:r>
+              <a:rPr lang="en-US" sz="1200" dirty="0">
+                <a:hlinkClick r:id="rId13"/>
+              </a:rPr>
+              <a:t>https://docs.microsoft.com/en-us/sql/relational-databases/spatial/spatial-data-sql-server</a:t>
+            </a:r>
+            <a:r>
+              <a:rPr lang="en-US" sz="1200" dirty="0"/>
+              <a:t> </a:t>
+            </a:r>
+          </a:p>
+          <a:p>
+            <a:endParaRPr lang="en-US" sz="1200" dirty="0"/>
+          </a:p>
+          <a:p>
+            <a:r>
+              <a:rPr lang="en-US" sz="1200" b="1" dirty="0">
+                <a:solidFill>
+                  <a:srgbClr val="0070C0"/>
+                </a:solidFill>
+              </a:rPr>
+              <a:t>Oracle Spatial:</a:t>
+            </a:r>
+            <a:r>
+              <a:rPr lang="en-US" sz="1200" dirty="0"/>
+              <a:t> </a:t>
+            </a:r>
+            <a:br>
+              <a:rPr lang="en-US" sz="1200" dirty="0"/>
+            </a:br>
+            <a:r>
+              <a:rPr lang="en-US" sz="1200" dirty="0"/>
+              <a:t> - </a:t>
+            </a:r>
+            <a:r>
+              <a:rPr lang="en-US" sz="1200" dirty="0">
+                <a:hlinkClick r:id="rId14"/>
+              </a:rPr>
+              <a:t>https://www.oracle.com/database/spatial/</a:t>
+            </a:r>
+            <a:r>
+              <a:rPr lang="en-US" sz="1200" dirty="0"/>
+              <a:t> </a:t>
+            </a:r>
+          </a:p>
+        </p:txBody>
+      </p:sp>
+      <p:sp>
+        <p:nvSpPr>
+          <p:cNvPr id="13" name="Rectangle 12">
+            <a:extLst>
+              <a:ext uri="{FF2B5EF4-FFF2-40B4-BE49-F238E27FC236}">
+                <a16:creationId xmlns:a16="http://schemas.microsoft.com/office/drawing/2014/main" id="{82CFF91E-5FAF-8C4D-A67E-7BCBD87F0249}"/>
+              </a:ext>
+            </a:extLst>
+          </p:cNvPr>
+          <p:cNvSpPr/>
+          <p:nvPr/>
+        </p:nvSpPr>
+        <p:spPr>
+          <a:xfrm>
+            <a:off x="5996859" y="101875"/>
+            <a:ext cx="2504212" cy="461665"/>
+          </a:xfrm>
+          <a:prstGeom prst="rect">
+            <a:avLst/>
+          </a:prstGeom>
+        </p:spPr>
+        <p:txBody>
+          <a:bodyPr wrap="none">
+            <a:spAutoFit/>
+          </a:bodyPr>
+          <a:lstStyle/>
+          <a:p>
+            <a:r>
+              <a:rPr lang="en-US" sz="2400" b="1" dirty="0">
+                <a:solidFill>
+                  <a:srgbClr val="0070C0"/>
+                </a:solidFill>
+              </a:rPr>
+              <a:t>GIS without GIS</a:t>
+            </a:r>
+            <a:endParaRPr lang="en-US" sz="2400" b="1" dirty="0"/>
+          </a:p>
+        </p:txBody>
+      </p:sp>
+      <p:pic>
+        <p:nvPicPr>
+          <p:cNvPr id="1026" name="Picture 2" descr="PostGIS - OSGeo">
+            <a:extLst>
+              <a:ext uri="{FF2B5EF4-FFF2-40B4-BE49-F238E27FC236}">
+                <a16:creationId xmlns:a16="http://schemas.microsoft.com/office/drawing/2014/main" id="{E99F3F7F-C86C-E84D-8961-0B9E156F6B8B}"/>
+              </a:ext>
+            </a:extLst>
+          </p:cNvPr>
+          <p:cNvPicPr>
+            <a:picLocks noChangeAspect="1" noChangeArrowheads="1"/>
+          </p:cNvPicPr>
+          <p:nvPr/>
+        </p:nvPicPr>
+        <p:blipFill>
+          <a:blip r:embed="rId15" cstate="email">
+            <a:extLst>
+              <a:ext uri="{28A0092B-C50C-407E-A947-70E740481C1C}">
+                <a14:useLocalDpi xmlns:a14="http://schemas.microsoft.com/office/drawing/2010/main"/>
+              </a:ext>
+            </a:extLst>
+          </a:blip>
+          <a:srcRect/>
+          <a:stretch>
+            <a:fillRect/>
+          </a:stretch>
+        </p:blipFill>
+        <p:spPr bwMode="auto">
+          <a:xfrm>
+            <a:off x="142239" y="265595"/>
+            <a:ext cx="1387901" cy="817965"/>
+          </a:xfrm>
+          <a:prstGeom prst="rect">
+            <a:avLst/>
+          </a:prstGeom>
+          <a:noFill/>
+          <a:extLst>
+            <a:ext uri="{909E8E84-426E-40DD-AFC4-6F175D3DCCD1}">
+              <a14:hiddenFill xmlns:a14="http://schemas.microsoft.com/office/drawing/2010/main">
+                <a:solidFill>
+                  <a:srgbClr val="FFFFFF"/>
+                </a:solidFill>
+              </a14:hiddenFill>
+            </a:ext>
+          </a:extLst>
+        </p:spPr>
+      </p:pic>
+      <p:sp>
+        <p:nvSpPr>
+          <p:cNvPr id="15" name="Rectangle 14">
+            <a:extLst>
+              <a:ext uri="{FF2B5EF4-FFF2-40B4-BE49-F238E27FC236}">
+                <a16:creationId xmlns:a16="http://schemas.microsoft.com/office/drawing/2014/main" id="{90B75787-FBE6-FC4C-AA93-7B6108E9C255}"/>
+              </a:ext>
+            </a:extLst>
+          </p:cNvPr>
+          <p:cNvSpPr/>
+          <p:nvPr/>
+        </p:nvSpPr>
+        <p:spPr>
+          <a:xfrm>
+            <a:off x="5996859" y="4255624"/>
+            <a:ext cx="1430200" cy="461665"/>
+          </a:xfrm>
+          <a:prstGeom prst="rect">
+            <a:avLst/>
+          </a:prstGeom>
+        </p:spPr>
+        <p:txBody>
+          <a:bodyPr wrap="none">
+            <a:spAutoFit/>
+          </a:bodyPr>
+          <a:lstStyle/>
+          <a:p>
+            <a:r>
+              <a:rPr lang="en-US" sz="2400" b="1" dirty="0" err="1">
+                <a:solidFill>
+                  <a:srgbClr val="0070C0"/>
+                </a:solidFill>
+              </a:rPr>
+              <a:t>GeoTIFF</a:t>
+            </a:r>
+            <a:endParaRPr lang="en-US" sz="2400" b="1" dirty="0"/>
+          </a:p>
+        </p:txBody>
+      </p:sp>
+    </p:spTree>
+    <p:extLst>
+      <p:ext uri="{BB962C8B-B14F-4D97-AF65-F5344CB8AC3E}">
+        <p14:creationId xmlns:p14="http://schemas.microsoft.com/office/powerpoint/2010/main" val="4242054576"/>
+      </p:ext>
+    </p:extLst>
+  </p:cSld>
+  <p:clrMapOvr>
+    <a:masterClrMapping/>
+  </p:clrMapOvr>
+</p:sld>
+</file>
+
+<file path=ppt/slides/slide4.xml><?xml version="1.0" encoding="utf-8"?>
+<p:sld xmlns:a="http://schemas.openxmlformats.org/drawingml/2006/main" xmlns:r="http://schemas.openxmlformats.org/officeDocument/2006/relationships" xmlns:p="http://schemas.openxmlformats.org/presentationml/2006/main">
+  <p:cSld>
+    <p:spTree>
+      <p:nvGrpSpPr>
+        <p:cNvPr id="1" name=""/>
+        <p:cNvGrpSpPr/>
+        <p:nvPr/>
+      </p:nvGrpSpPr>
+      <p:grpSpPr>
+        <a:xfrm>
+          <a:off x="0" y="0"/>
+          <a:ext cx="0" cy="0"/>
+          <a:chOff x="0" y="0"/>
+          <a:chExt cx="0" cy="0"/>
+        </a:xfrm>
+      </p:grpSpPr>
+      <p:sp>
+        <p:nvSpPr>
+          <p:cNvPr id="4" name="TextBox 3">
+            <a:extLst>
+              <a:ext uri="{FF2B5EF4-FFF2-40B4-BE49-F238E27FC236}">
+                <a16:creationId xmlns:a16="http://schemas.microsoft.com/office/drawing/2014/main" id="{3EC536C9-9CDE-7F44-8F6D-2EF3C020C7BE}"/>
+              </a:ext>
+            </a:extLst>
+          </p:cNvPr>
+          <p:cNvSpPr txBox="1"/>
+          <p:nvPr/>
+        </p:nvSpPr>
+        <p:spPr>
+          <a:xfrm>
+            <a:off x="3599394" y="986705"/>
+            <a:ext cx="6602506" cy="1661993"/>
+          </a:xfrm>
+          <a:prstGeom prst="rect">
+            <a:avLst/>
+          </a:prstGeom>
+          <a:noFill/>
+        </p:spPr>
+        <p:txBody>
+          <a:bodyPr wrap="square" rtlCol="0">
+            <a:spAutoFit/>
+          </a:bodyPr>
+          <a:lstStyle/>
+          <a:p>
+            <a:r>
+              <a:rPr lang="en-US" b="1" dirty="0"/>
+              <a:t>CARTO</a:t>
+            </a:r>
+          </a:p>
+          <a:p>
+            <a:pPr marL="171450" indent="-171450">
+              <a:buFont typeface="Arial" panose="020B0604020202020204" pitchFamily="34" charset="0"/>
+              <a:buChar char="•"/>
+            </a:pPr>
+            <a:r>
+              <a:rPr lang="en-US" sz="1200" dirty="0">
+                <a:hlinkClick r:id="rId2"/>
+              </a:rPr>
+              <a:t>https://carto.com/</a:t>
+            </a:r>
+            <a:r>
+              <a:rPr lang="en-US" sz="1200" dirty="0"/>
+              <a:t> - Location Intelligence platform allows organizations </a:t>
+            </a:r>
+            <a:br>
+              <a:rPr lang="en-US" sz="1200" dirty="0"/>
+            </a:br>
+            <a:r>
+              <a:rPr lang="en-US" sz="1200" dirty="0"/>
+              <a:t>to store, enrich, analyze &amp; visualize their data to make spatially-aware decisions.</a:t>
+            </a:r>
+          </a:p>
+          <a:p>
+            <a:pPr marL="171450" indent="-171450">
+              <a:buFont typeface="Arial" panose="020B0604020202020204" pitchFamily="34" charset="0"/>
+              <a:buChar char="•"/>
+            </a:pPr>
+            <a:r>
+              <a:rPr lang="en-US" sz="1200" dirty="0"/>
+              <a:t>CARTO uses Google </a:t>
+            </a:r>
+            <a:r>
+              <a:rPr lang="en-US" sz="1200" dirty="0" err="1"/>
+              <a:t>BigQuery</a:t>
+            </a:r>
+            <a:endParaRPr lang="en-US" sz="1200" dirty="0"/>
+          </a:p>
+          <a:p>
+            <a:pPr marL="171450" indent="-171450">
+              <a:buFont typeface="Arial" panose="020B0604020202020204" pitchFamily="34" charset="0"/>
+              <a:buChar char="•"/>
+            </a:pPr>
+            <a:r>
+              <a:rPr lang="en-US" sz="1200" b="1" dirty="0" err="1">
+                <a:solidFill>
+                  <a:srgbClr val="0070C0"/>
+                </a:solidFill>
+              </a:rPr>
+              <a:t>CARTOframes</a:t>
+            </a:r>
+            <a:r>
+              <a:rPr lang="en-US" sz="1200" dirty="0"/>
+              <a:t> - </a:t>
+            </a:r>
+            <a:r>
+              <a:rPr lang="en-US" sz="1200" b="1" dirty="0">
+                <a:solidFill>
+                  <a:srgbClr val="FF0000"/>
+                </a:solidFill>
+              </a:rPr>
+              <a:t>Python</a:t>
+            </a:r>
+            <a:r>
+              <a:rPr lang="en-US" sz="1200" dirty="0"/>
+              <a:t> package for integrating CARTO maps, analysis, </a:t>
+            </a:r>
+            <a:br>
+              <a:rPr lang="en-US" sz="1200" dirty="0"/>
+            </a:br>
+            <a:r>
+              <a:rPr lang="en-US" sz="1200" dirty="0"/>
+              <a:t>and data services into data science workflows.</a:t>
+            </a:r>
+            <a:br>
+              <a:rPr lang="en-US" sz="1200" dirty="0"/>
+            </a:br>
+            <a:r>
+              <a:rPr lang="en-US" sz="1200" dirty="0"/>
+              <a:t> - </a:t>
+            </a:r>
+            <a:r>
+              <a:rPr lang="en-US" sz="1200" dirty="0">
+                <a:hlinkClick r:id="rId3"/>
+              </a:rPr>
+              <a:t>https://github.com/CartoDB/cartoframes</a:t>
+            </a:r>
+            <a:r>
+              <a:rPr lang="en-US" sz="1200" dirty="0"/>
+              <a:t> </a:t>
+            </a:r>
+          </a:p>
+          <a:p>
+            <a:pPr marL="171450" indent="-171450">
+              <a:buFont typeface="Arial" panose="020B0604020202020204" pitchFamily="34" charset="0"/>
+              <a:buChar char="•"/>
+            </a:pPr>
+            <a:r>
+              <a:rPr lang="en-US" sz="1200" dirty="0"/>
+              <a:t>Pricing – limited 12 month free plan, normally $200/month (or more)</a:t>
+            </a:r>
+          </a:p>
+        </p:txBody>
+      </p:sp>
+      <p:pic>
+        <p:nvPicPr>
+          <p:cNvPr id="5" name="Picture 4">
+            <a:extLst>
+              <a:ext uri="{FF2B5EF4-FFF2-40B4-BE49-F238E27FC236}">
+                <a16:creationId xmlns:a16="http://schemas.microsoft.com/office/drawing/2014/main" id="{477E1E75-8164-654C-AC8A-337667483CED}"/>
+              </a:ext>
+            </a:extLst>
+          </p:cNvPr>
+          <p:cNvPicPr>
+            <a:picLocks noChangeAspect="1"/>
+          </p:cNvPicPr>
+          <p:nvPr/>
+        </p:nvPicPr>
+        <p:blipFill rotWithShape="1">
+          <a:blip r:embed="rId4" cstate="email">
+            <a:extLst>
+              <a:ext uri="{28A0092B-C50C-407E-A947-70E740481C1C}">
+                <a14:useLocalDpi xmlns:a14="http://schemas.microsoft.com/office/drawing/2010/main"/>
+              </a:ext>
+            </a:extLst>
+          </a:blip>
+          <a:srcRect/>
+          <a:stretch/>
+        </p:blipFill>
+        <p:spPr>
+          <a:xfrm>
+            <a:off x="1911389" y="1036345"/>
+            <a:ext cx="1543013" cy="596632"/>
+          </a:xfrm>
+          <a:prstGeom prst="rect">
+            <a:avLst/>
+          </a:prstGeom>
+        </p:spPr>
+      </p:pic>
+      <p:sp>
+        <p:nvSpPr>
+          <p:cNvPr id="6" name="TextBox 5">
+            <a:extLst>
+              <a:ext uri="{FF2B5EF4-FFF2-40B4-BE49-F238E27FC236}">
+                <a16:creationId xmlns:a16="http://schemas.microsoft.com/office/drawing/2014/main" id="{D6CE0CF5-A2C8-BB49-BDF6-FB52C63AE29B}"/>
+              </a:ext>
+            </a:extLst>
+          </p:cNvPr>
+          <p:cNvSpPr txBox="1"/>
+          <p:nvPr/>
+        </p:nvSpPr>
+        <p:spPr>
+          <a:xfrm>
+            <a:off x="3599393" y="3237522"/>
+            <a:ext cx="4483149" cy="738664"/>
+          </a:xfrm>
+          <a:prstGeom prst="rect">
+            <a:avLst/>
+          </a:prstGeom>
+          <a:noFill/>
+        </p:spPr>
+        <p:txBody>
+          <a:bodyPr wrap="square" rtlCol="0">
+            <a:spAutoFit/>
+          </a:bodyPr>
+          <a:lstStyle/>
+          <a:p>
+            <a:r>
+              <a:rPr lang="en-US" b="1" dirty="0"/>
+              <a:t>QGIS</a:t>
+            </a:r>
+          </a:p>
+          <a:p>
+            <a:r>
+              <a:rPr lang="en-US" sz="1200" dirty="0"/>
+              <a:t>A Free and Open Source GIS (Geographic Information System)</a:t>
+            </a:r>
+          </a:p>
+          <a:p>
+            <a:r>
+              <a:rPr lang="en-US" sz="1200" b="1" dirty="0"/>
+              <a:t> - </a:t>
+            </a:r>
+            <a:r>
+              <a:rPr lang="en-US" sz="1200" dirty="0">
+                <a:hlinkClick r:id="rId5"/>
+              </a:rPr>
+              <a:t>https://www.qgis.org/en/site/</a:t>
+            </a:r>
+            <a:r>
+              <a:rPr lang="en-US" sz="1200" dirty="0"/>
+              <a:t> - </a:t>
+            </a:r>
+          </a:p>
+        </p:txBody>
+      </p:sp>
+      <p:pic>
+        <p:nvPicPr>
+          <p:cNvPr id="7" name="Picture 6">
+            <a:extLst>
+              <a:ext uri="{FF2B5EF4-FFF2-40B4-BE49-F238E27FC236}">
+                <a16:creationId xmlns:a16="http://schemas.microsoft.com/office/drawing/2014/main" id="{3449D432-448A-0046-88A9-7C934CCD5D27}"/>
+              </a:ext>
+            </a:extLst>
+          </p:cNvPr>
+          <p:cNvPicPr>
+            <a:picLocks noChangeAspect="1"/>
+          </p:cNvPicPr>
+          <p:nvPr/>
+        </p:nvPicPr>
+        <p:blipFill rotWithShape="1">
+          <a:blip r:embed="rId6" cstate="email">
+            <a:extLst>
+              <a:ext uri="{28A0092B-C50C-407E-A947-70E740481C1C}">
+                <a14:useLocalDpi xmlns:a14="http://schemas.microsoft.com/office/drawing/2010/main"/>
+              </a:ext>
+            </a:extLst>
+          </a:blip>
+          <a:srcRect/>
+          <a:stretch/>
+        </p:blipFill>
+        <p:spPr>
+          <a:xfrm>
+            <a:off x="2189289" y="2988302"/>
+            <a:ext cx="1168840" cy="1125235"/>
+          </a:xfrm>
+          <a:prstGeom prst="rect">
+            <a:avLst/>
+          </a:prstGeom>
+        </p:spPr>
+      </p:pic>
+      <p:sp>
+        <p:nvSpPr>
+          <p:cNvPr id="8" name="TextBox 7">
+            <a:extLst>
+              <a:ext uri="{FF2B5EF4-FFF2-40B4-BE49-F238E27FC236}">
+                <a16:creationId xmlns:a16="http://schemas.microsoft.com/office/drawing/2014/main" id="{2C8A1651-A1FC-374A-B077-2181B0B9F09A}"/>
+              </a:ext>
+            </a:extLst>
+          </p:cNvPr>
+          <p:cNvSpPr txBox="1"/>
+          <p:nvPr/>
+        </p:nvSpPr>
+        <p:spPr>
+          <a:xfrm>
+            <a:off x="3599394" y="4971331"/>
+            <a:ext cx="6044478" cy="1107996"/>
+          </a:xfrm>
+          <a:prstGeom prst="rect">
+            <a:avLst/>
+          </a:prstGeom>
+          <a:noFill/>
+        </p:spPr>
+        <p:txBody>
+          <a:bodyPr wrap="square" rtlCol="0">
+            <a:spAutoFit/>
+          </a:bodyPr>
+          <a:lstStyle/>
+          <a:p>
+            <a:pPr lvl="0"/>
+            <a:r>
+              <a:rPr lang="en-US" b="1" dirty="0"/>
+              <a:t>Google Earth Engine</a:t>
+            </a:r>
+          </a:p>
+          <a:p>
+            <a:r>
+              <a:rPr lang="en-US" sz="1200" dirty="0"/>
+              <a:t>multi-petabyte catalog of satellite imagery and geospatial datasets </a:t>
+            </a:r>
+          </a:p>
+          <a:p>
+            <a:r>
+              <a:rPr lang="en-US" sz="1200" dirty="0"/>
+              <a:t>with planetary-scale analysis capabilities </a:t>
+            </a:r>
+          </a:p>
+          <a:p>
+            <a:r>
+              <a:rPr lang="en-US" sz="1200" dirty="0"/>
+              <a:t>allows to detect changes, map trends, and quantify differences on the Earth's surface</a:t>
+            </a:r>
+          </a:p>
+          <a:p>
+            <a:pPr lvl="0"/>
+            <a:r>
+              <a:rPr lang="en-US" sz="1200" dirty="0"/>
+              <a:t> - </a:t>
+            </a:r>
+            <a:r>
+              <a:rPr lang="en-US" sz="1200" dirty="0">
+                <a:hlinkClick r:id="rId7"/>
+              </a:rPr>
+              <a:t>https://earthengine.google.com/</a:t>
+            </a:r>
+            <a:r>
+              <a:rPr lang="en-US" sz="1200" dirty="0"/>
+              <a:t> </a:t>
+            </a:r>
+          </a:p>
+        </p:txBody>
+      </p:sp>
+      <p:sp>
+        <p:nvSpPr>
+          <p:cNvPr id="9" name="Rectangle 8">
+            <a:extLst>
+              <a:ext uri="{FF2B5EF4-FFF2-40B4-BE49-F238E27FC236}">
+                <a16:creationId xmlns:a16="http://schemas.microsoft.com/office/drawing/2014/main" id="{67775C50-3A54-824E-AB9E-9C4F57613C30}"/>
+              </a:ext>
+            </a:extLst>
+          </p:cNvPr>
+          <p:cNvSpPr/>
+          <p:nvPr/>
+        </p:nvSpPr>
+        <p:spPr>
+          <a:xfrm>
+            <a:off x="0" y="14227"/>
+            <a:ext cx="4483150" cy="461665"/>
+          </a:xfrm>
+          <a:prstGeom prst="rect">
+            <a:avLst/>
+          </a:prstGeom>
+        </p:spPr>
+        <p:txBody>
+          <a:bodyPr wrap="none">
+            <a:spAutoFit/>
+          </a:bodyPr>
+          <a:lstStyle/>
+          <a:p>
+            <a:r>
+              <a:rPr lang="en-US" sz="2400" b="1" dirty="0"/>
+              <a:t>CARTO, QGIS, Google Earth</a:t>
+            </a:r>
+          </a:p>
+        </p:txBody>
+      </p:sp>
+      <p:pic>
+        <p:nvPicPr>
+          <p:cNvPr id="2052" name="Picture 4" descr="Google Earth 2017 - Google Earth Icon Svg Transparent PNG - 1417x1417 -  Free Download on NicePNG">
+            <a:extLst>
+              <a:ext uri="{FF2B5EF4-FFF2-40B4-BE49-F238E27FC236}">
+                <a16:creationId xmlns:a16="http://schemas.microsoft.com/office/drawing/2014/main" id="{56272FA5-C014-8A4F-8D73-A42BCF6F3401}"/>
+              </a:ext>
+            </a:extLst>
+          </p:cNvPr>
+          <p:cNvPicPr>
+            <a:picLocks noChangeAspect="1" noChangeArrowheads="1"/>
+          </p:cNvPicPr>
+          <p:nvPr/>
+        </p:nvPicPr>
+        <p:blipFill>
+          <a:blip r:embed="rId8" cstate="email">
+            <a:extLst>
+              <a:ext uri="{28A0092B-C50C-407E-A947-70E740481C1C}">
+                <a14:useLocalDpi xmlns:a14="http://schemas.microsoft.com/office/drawing/2010/main"/>
+              </a:ext>
+            </a:extLst>
+          </a:blip>
+          <a:srcRect/>
+          <a:stretch>
+            <a:fillRect/>
+          </a:stretch>
+        </p:blipFill>
+        <p:spPr bwMode="auto">
+          <a:xfrm>
+            <a:off x="2250249" y="4900293"/>
+            <a:ext cx="927799" cy="973074"/>
+          </a:xfrm>
+          <a:prstGeom prst="rect">
+            <a:avLst/>
+          </a:prstGeom>
+          <a:noFill/>
+          <a:extLst>
+            <a:ext uri="{909E8E84-426E-40DD-AFC4-6F175D3DCCD1}">
+              <a14:hiddenFill xmlns:a14="http://schemas.microsoft.com/office/drawing/2010/main">
+                <a:solidFill>
+                  <a:srgbClr val="FFFFFF"/>
+                </a:solidFill>
+              </a14:hiddenFill>
+            </a:ext>
+          </a:extLst>
+        </p:spPr>
+      </p:pic>
+    </p:spTree>
+    <p:extLst>
+      <p:ext uri="{BB962C8B-B14F-4D97-AF65-F5344CB8AC3E}">
+        <p14:creationId xmlns:p14="http://schemas.microsoft.com/office/powerpoint/2010/main" val="1482997193"/>
       </p:ext>
     </p:extLst>
   </p:cSld>
@@ -16518,7 +18140,7 @@
           <p:cNvPr id="4" name="TextBox 3">
             <a:extLst>
               <a:ext uri="{FF2B5EF4-FFF2-40B4-BE49-F238E27FC236}">
-                <a16:creationId xmlns:a16="http://schemas.microsoft.com/office/drawing/2014/main" id="{007F7286-8F8E-C541-997A-1A9028B22C52}"/>
+                <a16:creationId xmlns:a16="http://schemas.microsoft.com/office/drawing/2014/main" id="{F913C6ED-646F-6040-8078-AC119F6D23BB}"/>
               </a:ext>
             </a:extLst>
           </p:cNvPr>
@@ -16527,8 +18149,8 @@
         </p:nvSpPr>
         <p:spPr>
           <a:xfrm>
-            <a:off x="110837" y="3278603"/>
-            <a:ext cx="5805055" cy="3416320"/>
+            <a:off x="5052899" y="3354696"/>
+            <a:ext cx="5181601" cy="1231106"/>
           </a:xfrm>
           <a:prstGeom prst="rect">
             <a:avLst/>
@@ -16542,115 +18164,102 @@
           <a:lstStyle/>
           <a:p>
             <a:r>
-              <a:rPr lang="en-US" sz="1200" b="1" dirty="0">
+              <a:rPr lang="en-US" sz="1400" b="1" dirty="0" err="1">
+                <a:solidFill>
+                  <a:srgbClr val="FF0000"/>
+                </a:solidFill>
+              </a:rPr>
+              <a:t>GeoSpark</a:t>
+            </a:r>
+            <a:r>
+              <a:rPr lang="en-US" sz="1400" b="1" dirty="0">
                 <a:solidFill>
                   <a:srgbClr val="0070C0"/>
                 </a:solidFill>
               </a:rPr>
-              <a:t>SDS Course Syllabus</a:t>
-            </a:r>
-          </a:p>
-          <a:p>
-            <a:endParaRPr lang="en-US" sz="1200" dirty="0"/>
-          </a:p>
-          <a:p>
-            <a:r>
-              <a:rPr lang="en-US" sz="1200" dirty="0"/>
-              <a:t>Section 1</a:t>
-            </a:r>
-          </a:p>
-          <a:p>
-            <a:r>
-              <a:rPr lang="en-US" sz="1200" dirty="0"/>
-              <a:t>Introduction to Spatial Data Science</a:t>
-            </a:r>
-          </a:p>
-          <a:p>
-            <a:r>
-              <a:rPr lang="en-US" sz="1200" dirty="0"/>
-              <a:t> - spatial data, tools, and analysis</a:t>
-            </a:r>
-          </a:p>
-          <a:p>
-            <a:r>
-              <a:rPr lang="en-US" sz="1200" dirty="0"/>
-              <a:t> - place-based context can reveal hidden patterns in data</a:t>
-            </a:r>
-          </a:p>
-          <a:p>
-            <a:r>
-              <a:rPr lang="en-US" sz="1200" dirty="0"/>
-              <a:t> - use ArcGIS Pro and ArcGIS Notebooks.</a:t>
-            </a:r>
-          </a:p>
-          <a:p>
-            <a:endParaRPr lang="en-US" sz="1200" dirty="0"/>
-          </a:p>
-          <a:p>
-            <a:r>
-              <a:rPr lang="en-US" sz="1200" dirty="0"/>
-              <a:t>Section 2</a:t>
-            </a:r>
-          </a:p>
-          <a:p>
-            <a:r>
-              <a:rPr lang="en-US" sz="1200" dirty="0"/>
-              <a:t>The Spatial Approach to Predictive Analysis</a:t>
-            </a:r>
-          </a:p>
-          <a:p>
-            <a:r>
-              <a:rPr lang="en-US" sz="1200" dirty="0"/>
-              <a:t> - add spatial properties into modeling workflows to add predictive power. </a:t>
-            </a:r>
-          </a:p>
-          <a:p>
-            <a:r>
-              <a:rPr lang="en-US" sz="1200" dirty="0"/>
-              <a:t> - Use Random Forest to train the model and make predictions.</a:t>
-            </a:r>
-          </a:p>
-          <a:p>
-            <a:endParaRPr lang="en-US" sz="1200" dirty="0"/>
-          </a:p>
-          <a:p>
-            <a:r>
-              <a:rPr lang="en-US" sz="1200" dirty="0"/>
-              <a:t>Section 3</a:t>
-            </a:r>
-          </a:p>
-          <a:p>
-            <a:r>
-              <a:rPr lang="en-US" sz="1200" dirty="0"/>
-              <a:t>Finding Optimal Locations Using Suitability Models</a:t>
-            </a:r>
-          </a:p>
-          <a:p>
-            <a:r>
-              <a:rPr lang="en-US" sz="1200" dirty="0"/>
-              <a:t> - Where is the best location for &lt;fill in the blank&gt;? </a:t>
-            </a:r>
-          </a:p>
-          <a:p>
-            <a:r>
-              <a:rPr lang="en-US" sz="1200" dirty="0"/>
-              <a:t> - Perform a weighted overlay analysis, rank multiple suitability criteria. </a:t>
-            </a:r>
-          </a:p>
-          <a:p>
-            <a:r>
-              <a:rPr lang="en-US" sz="1200" dirty="0"/>
-              <a:t> - Learn to transform data using functions to better represent suitability impact.</a:t>
+              <a:t>  (Spatial RDDs and Spatial SQL)</a:t>
+            </a:r>
+          </a:p>
+          <a:p>
+            <a:r>
+              <a:rPr lang="en-US" sz="1200" dirty="0"/>
+              <a:t>- </a:t>
+            </a:r>
+            <a:r>
+              <a:rPr lang="en-US" sz="1200" dirty="0">
+                <a:hlinkClick r:id="rId2"/>
+              </a:rPr>
+              <a:t>https://github.com/apache/incubator-sedona</a:t>
+            </a:r>
+            <a:r>
+              <a:rPr lang="en-US" sz="1200" dirty="0"/>
+              <a:t> </a:t>
+            </a:r>
+          </a:p>
+          <a:p>
+            <a:r>
+              <a:rPr lang="en-US" sz="1200" dirty="0"/>
+              <a:t>- </a:t>
+            </a:r>
+            <a:r>
+              <a:rPr lang="en-US" sz="1200" dirty="0">
+                <a:hlinkClick r:id="rId3"/>
+              </a:rPr>
+              <a:t>https://pypi.org/project/geospark/</a:t>
+            </a:r>
+            <a:r>
+              <a:rPr lang="en-US" sz="1200" dirty="0"/>
+              <a:t> - Python wrapper on </a:t>
+            </a:r>
+            <a:r>
+              <a:rPr lang="en-US" sz="1200" dirty="0" err="1"/>
+              <a:t>GeoSpark</a:t>
+            </a:r>
+            <a:r>
+              <a:rPr lang="en-US" sz="1200" dirty="0"/>
+              <a:t> library</a:t>
+            </a:r>
+          </a:p>
+          <a:p>
+            <a:r>
+              <a:rPr lang="en-US" sz="1200" dirty="0"/>
+              <a:t>- </a:t>
+            </a:r>
+            <a:r>
+              <a:rPr lang="en-US" sz="1200" dirty="0">
+                <a:hlinkClick r:id="rId4"/>
+              </a:rPr>
+              <a:t>https://cran.r-project.org/web/packages/geospark/index.html</a:t>
+            </a:r>
+            <a:r>
+              <a:rPr lang="en-US" sz="1200" dirty="0"/>
+              <a:t>  - R-library</a:t>
+            </a:r>
+          </a:p>
+          <a:p>
+            <a:r>
+              <a:rPr lang="en-US" sz="1200" dirty="0"/>
+              <a:t>- </a:t>
+            </a:r>
+            <a:r>
+              <a:rPr lang="en-US" sz="1200" dirty="0">
+                <a:hlinkClick r:id="rId5"/>
+              </a:rPr>
+              <a:t>https://cloudarchitected.com/2019/07/geospatial-analytics-in-databricks-with-python-and-geomesa/</a:t>
+            </a:r>
+            <a:r>
+              <a:rPr lang="en-US" sz="1200" dirty="0"/>
+              <a:t> </a:t>
             </a:r>
           </a:p>
         </p:txBody>
       </p:sp>
       <p:sp>
         <p:nvSpPr>
-          <p:cNvPr id="5" name="TextBox 4">
+          <p:cNvPr id="3" name="TextBox 2">
             <a:extLst>
               <a:ext uri="{FF2B5EF4-FFF2-40B4-BE49-F238E27FC236}">
-                <a16:creationId xmlns:a16="http://schemas.microsoft.com/office/drawing/2014/main" id="{54727A4B-34D6-6445-A4E7-AF7B4CF9B412}"/>
+                <a16:creationId xmlns:a16="http://schemas.microsoft.com/office/drawing/2014/main" id="{7205344D-7E9F-4544-B948-650564F65FF0}"/>
               </a:ext>
             </a:extLst>
           </p:cNvPr>
@@ -16659,8 +18268,8 @@
         </p:nvSpPr>
         <p:spPr>
           <a:xfrm>
-            <a:off x="5915892" y="3463269"/>
-            <a:ext cx="5638799" cy="3231654"/>
+            <a:off x="-1" y="556080"/>
+            <a:ext cx="7510272" cy="1569660"/>
           </a:xfrm>
           <a:prstGeom prst="rect">
             <a:avLst/>
@@ -16675,45 +18284,43 @@
           <a:p>
             <a:r>
               <a:rPr lang="en-US" sz="1200" dirty="0"/>
-              <a:t>Section 4</a:t>
-            </a:r>
-          </a:p>
-          <a:p>
-            <a:r>
-              <a:rPr lang="en-US" sz="1200" dirty="0"/>
-              <a:t>Pattern Detection and Clustering</a:t>
-            </a:r>
-          </a:p>
-          <a:p>
-            <a:r>
-              <a:rPr lang="en-US" sz="1200" dirty="0"/>
-              <a:t> - ArcGIS tools to identify patterns and clusters</a:t>
-            </a:r>
-          </a:p>
-          <a:p>
-            <a:r>
-              <a:rPr lang="en-US" sz="1200" dirty="0"/>
-              <a:t> - statistical clustering - analyze patterns in space and time.</a:t>
-            </a:r>
-          </a:p>
-          <a:p>
-            <a:r>
-              <a:rPr lang="en-US" sz="1200" dirty="0"/>
-              <a:t> - Create a spacetime cube, explore </a:t>
+              <a:t>Spark was initially started by </a:t>
             </a:r>
             <a:r>
               <a:rPr lang="en-US" sz="1200" dirty="0" err="1"/>
-              <a:t>spatio</a:t>
-            </a:r>
-            <a:r>
-              <a:rPr lang="en-US" sz="1200" dirty="0"/>
-              <a:t>-temporal </a:t>
-            </a:r>
-          </a:p>
-          <a:p>
-            <a:r>
-              <a:rPr lang="en-US" sz="1200" dirty="0"/>
-              <a:t>   trends, find where and when high/low clusters occur.</a:t>
+              <a:t>Matei</a:t>
+            </a:r>
+            <a:r>
+              <a:rPr lang="en-US" sz="1200" dirty="0"/>
+              <a:t> </a:t>
+            </a:r>
+            <a:r>
+              <a:rPr lang="en-US" sz="1200" dirty="0" err="1"/>
+              <a:t>Zaharia</a:t>
+            </a:r>
+            <a:r>
+              <a:rPr lang="en-US" sz="1200" dirty="0"/>
+              <a:t> at UC Berkeley's </a:t>
+            </a:r>
+            <a:r>
+              <a:rPr lang="en-US" sz="1200" dirty="0" err="1"/>
+              <a:t>AMPLab</a:t>
+            </a:r>
+            <a:r>
+              <a:rPr lang="en-US" sz="1200" dirty="0"/>
+              <a:t> in 2009, </a:t>
+            </a:r>
+          </a:p>
+          <a:p>
+            <a:r>
+              <a:rPr lang="en-US" sz="1200" dirty="0"/>
+              <a:t>and open sourced in 2010 under a BSD license.</a:t>
+            </a:r>
+          </a:p>
+          <a:p>
+            <a:r>
+              <a:rPr lang="en-US" sz="1200" dirty="0"/>
+              <a:t>In 2013 the project was donated to the Apache Software Foundation, Databricks was formed </a:t>
             </a:r>
           </a:p>
           <a:p>
@@ -16722,68 +18329,72 @@
           <a:p>
             <a:r>
               <a:rPr lang="en-US" sz="1200" dirty="0"/>
-              <a:t>Section 5</a:t>
-            </a:r>
-          </a:p>
-          <a:p>
-            <a:r>
-              <a:rPr lang="en-US" sz="1200" dirty="0"/>
-              <a:t>Object Detection with Deep Learning</a:t>
-            </a:r>
-          </a:p>
-          <a:p>
-            <a:r>
-              <a:rPr lang="en-US" sz="1200" dirty="0"/>
-              <a:t>  - Prepare training sample data, </a:t>
-            </a:r>
-          </a:p>
-          <a:p>
-            <a:r>
-              <a:rPr lang="en-US" sz="1200" dirty="0"/>
-              <a:t>  - Use a neural network to train an object detection model.</a:t>
-            </a:r>
-          </a:p>
-          <a:p>
+              <a:t> - </a:t>
+            </a:r>
+            <a:r>
+              <a:rPr lang="en-US" sz="1200" dirty="0">
+                <a:hlinkClick r:id="rId6"/>
+              </a:rPr>
+              <a:t>https://logz.io/blog/hadoop-vs-spark/</a:t>
+            </a:r>
+            <a:r>
+              <a:rPr lang="en-US" sz="1200" dirty="0"/>
+              <a:t> </a:t>
+            </a:r>
+          </a:p>
+          <a:p>
+            <a:r>
+              <a:rPr lang="en-US" sz="1200" dirty="0"/>
+              <a:t> - </a:t>
+            </a:r>
+            <a:r>
+              <a:rPr lang="en-US" sz="1200" dirty="0">
+                <a:hlinkClick r:id="rId7"/>
+              </a:rPr>
+              <a:t>https://en.wikipedia.org/wiki/Apache_Spark</a:t>
+            </a:r>
             <a:endParaRPr lang="en-US" sz="1200" dirty="0"/>
           </a:p>
           <a:p>
             <a:r>
               <a:rPr lang="en-US" sz="1200" dirty="0"/>
-              <a:t>Section 6</a:t>
-            </a:r>
-          </a:p>
-          <a:p>
-            <a:r>
-              <a:rPr lang="en-US" sz="1200" dirty="0"/>
-              <a:t>Communicating Results with Impact</a:t>
-            </a:r>
-          </a:p>
-          <a:p>
-            <a:r>
-              <a:rPr lang="en-US" sz="1200" dirty="0"/>
-              <a:t> - Be effective and visual storyteller. </a:t>
-            </a:r>
-          </a:p>
-          <a:p>
-            <a:r>
-              <a:rPr lang="en-US" sz="1200" dirty="0"/>
-              <a:t> - Present facts using information products that resonate with your audience, </a:t>
-            </a:r>
-          </a:p>
-          <a:p>
-            <a:r>
-              <a:rPr lang="en-US" sz="1200" dirty="0"/>
-              <a:t>   make decision-makers to understand and act on it.</a:t>
+              <a:t> - </a:t>
+            </a:r>
+            <a:r>
+              <a:rPr lang="en-US" sz="1200" dirty="0">
+                <a:hlinkClick r:id="rId8"/>
+              </a:rPr>
+              <a:t>https://en.wikipedia.org/wiki/Databricks</a:t>
+            </a:r>
+            <a:r>
+              <a:rPr lang="en-US" sz="1200" dirty="0"/>
+              <a:t> </a:t>
+            </a:r>
+          </a:p>
+          <a:p>
+            <a:r>
+              <a:rPr lang="en-US" sz="1200" dirty="0"/>
+              <a:t> - </a:t>
+            </a:r>
+            <a:r>
+              <a:rPr lang="en-US" sz="1200" dirty="0">
+                <a:hlinkClick r:id="rId9"/>
+              </a:rPr>
+              <a:t>http://spark.apache.org/docs/latest/</a:t>
+            </a:r>
+            <a:r>
+              <a:rPr lang="en-US" sz="1200" dirty="0"/>
+              <a:t> - documentation and tutorials</a:t>
             </a:r>
           </a:p>
         </p:txBody>
       </p:sp>
       <p:sp>
         <p:nvSpPr>
-          <p:cNvPr id="6" name="TextBox 5">
+          <p:cNvPr id="5" name="TextBox 4">
             <a:extLst>
               <a:ext uri="{FF2B5EF4-FFF2-40B4-BE49-F238E27FC236}">
-                <a16:creationId xmlns:a16="http://schemas.microsoft.com/office/drawing/2014/main" id="{DFE8558B-F7AF-424E-8DB1-C56F17407651}"/>
+                <a16:creationId xmlns:a16="http://schemas.microsoft.com/office/drawing/2014/main" id="{1E521637-33DF-2F44-AA64-6D9E3B6698C3}"/>
               </a:ext>
             </a:extLst>
           </p:cNvPr>
@@ -16792,8 +18403,8 @@
         </p:nvSpPr>
         <p:spPr>
           <a:xfrm>
-            <a:off x="41564" y="277090"/>
-            <a:ext cx="9448800" cy="2677656"/>
+            <a:off x="10336007" y="2175467"/>
+            <a:ext cx="1563072" cy="830997"/>
           </a:xfrm>
           <a:prstGeom prst="rect">
             <a:avLst/>
@@ -16806,189 +18417,529 @@
           </a:bodyPr>
           <a:lstStyle/>
           <a:p>
-            <a:r>
-              <a:rPr lang="en-US" b="1" dirty="0">
-                <a:solidFill>
-                  <a:srgbClr val="0070C0"/>
-                </a:solidFill>
-              </a:rPr>
-              <a:t>ArcGIS</a:t>
-            </a:r>
-            <a:r>
-              <a:rPr lang="en-US" dirty="0"/>
-              <a:t> - a geographic information system for working with maps and geographic information</a:t>
-            </a:r>
-          </a:p>
-          <a:p>
-            <a:r>
-              <a:rPr lang="en-US" dirty="0"/>
-              <a:t> - </a:t>
-            </a:r>
-            <a:r>
-              <a:rPr lang="en-US" dirty="0">
-                <a:hlinkClick r:id="rId2"/>
-              </a:rPr>
-              <a:t>https://en.wikipedia.org/wiki/ArcGIS</a:t>
-            </a:r>
-            <a:r>
-              <a:rPr lang="en-US" dirty="0"/>
+            <a:pPr algn="ctr"/>
+            <a:r>
+              <a:rPr lang="en-US" sz="1600" dirty="0" err="1"/>
+              <a:t>Matei</a:t>
+            </a:r>
+            <a:r>
+              <a:rPr lang="en-US" sz="1600" dirty="0"/>
               <a:t> </a:t>
             </a:r>
-          </a:p>
-          <a:p>
-            <a:endParaRPr lang="en-US" dirty="0"/>
-          </a:p>
-          <a:p>
-            <a:r>
-              <a:rPr lang="en-US" b="1" dirty="0">
-                <a:solidFill>
-                  <a:srgbClr val="0070C0"/>
-                </a:solidFill>
-              </a:rPr>
-              <a:t>ArcGIS</a:t>
-            </a:r>
-            <a:r>
-              <a:rPr lang="en-US" dirty="0"/>
-              <a:t> software (online and desktop) is maintained by </a:t>
-            </a:r>
-            <a:r>
-              <a:rPr lang="en-US" b="1" dirty="0">
-                <a:solidFill>
-                  <a:srgbClr val="0070C0"/>
-                </a:solidFill>
-              </a:rPr>
-              <a:t>ESRI</a:t>
-            </a:r>
-            <a:r>
-              <a:rPr lang="en-US" dirty="0"/>
-              <a:t> (Environmental Systems Research Institute) - a consulting company founded in 1969, headquarters in  Redlands, CA.  </a:t>
-            </a:r>
-          </a:p>
-          <a:p>
-            <a:r>
-              <a:rPr lang="en-US" dirty="0"/>
-              <a:t>ArcGIS Online is free for noncommercial use, $100/year for students, more than $1,100 per user per year for business</a:t>
-            </a:r>
-          </a:p>
-          <a:p>
-            <a:endParaRPr lang="en-US" dirty="0"/>
-          </a:p>
-          <a:p>
-            <a:r>
-              <a:rPr lang="en-US" dirty="0"/>
-              <a:t>- </a:t>
-            </a:r>
-            <a:r>
-              <a:rPr lang="en-US" dirty="0">
-                <a:hlinkClick r:id="rId3"/>
-              </a:rPr>
-              <a:t>https://www.esri.com/en-us/home</a:t>
-            </a:r>
-            <a:r>
-              <a:rPr lang="en-US" dirty="0"/>
-              <a:t> </a:t>
-            </a:r>
-          </a:p>
-          <a:p>
-            <a:r>
-              <a:rPr lang="en-US" dirty="0"/>
-              <a:t>- </a:t>
-            </a:r>
-            <a:r>
-              <a:rPr lang="en-US" dirty="0">
-                <a:hlinkClick r:id="rId4"/>
-              </a:rPr>
-              <a:t>https://www.esri.com/en-us/arcgis/about-arcgis/overview</a:t>
-            </a:r>
-            <a:r>
-              <a:rPr lang="en-US" dirty="0"/>
-              <a:t> </a:t>
-            </a:r>
-          </a:p>
-          <a:p>
-            <a:r>
-              <a:rPr lang="en-US" dirty="0"/>
-              <a:t>- </a:t>
-            </a:r>
-            <a:r>
-              <a:rPr lang="en-US" dirty="0">
-                <a:hlinkClick r:id="rId5"/>
-              </a:rPr>
-              <a:t>https://www.esri.com/en-us/arcgis/products/index</a:t>
-            </a:r>
-            <a:r>
-              <a:rPr lang="en-US" dirty="0"/>
-              <a:t> </a:t>
-            </a:r>
-          </a:p>
-          <a:p>
-            <a:r>
-              <a:rPr lang="en-US" dirty="0"/>
-              <a:t>- </a:t>
-            </a:r>
-            <a:r>
-              <a:rPr lang="en-US" dirty="0">
-                <a:hlinkClick r:id="rId6"/>
-              </a:rPr>
-              <a:t>https://www.esri.com/en-us/arcgis/products/arcgis-notebooks/overview</a:t>
-            </a:r>
-            <a:r>
-              <a:rPr lang="en-US" dirty="0"/>
-              <a:t> - ArcGIS Notebooks</a:t>
-            </a:r>
-          </a:p>
-          <a:p>
-            <a:r>
-              <a:rPr lang="en-US" dirty="0"/>
-              <a:t>- </a:t>
-            </a:r>
-            <a:r>
-              <a:rPr lang="en-US" dirty="0">
-                <a:hlinkClick r:id="rId7"/>
-              </a:rPr>
-              <a:t>https://github.com/Esri</a:t>
-            </a:r>
-            <a:r>
-              <a:rPr lang="en-US" dirty="0"/>
-              <a:t> - about 600 repositories</a:t>
+            <a:r>
+              <a:rPr lang="en-US" sz="1600" dirty="0" err="1"/>
+              <a:t>Zaharia</a:t>
+            </a:r>
+            <a:endParaRPr lang="en-US" sz="1600" dirty="0"/>
+          </a:p>
+          <a:p>
+            <a:pPr algn="ctr"/>
+            <a:r>
+              <a:rPr lang="en-US" sz="1600" dirty="0"/>
+              <a:t>Spark</a:t>
+            </a:r>
+          </a:p>
+          <a:p>
+            <a:pPr algn="ctr"/>
+            <a:r>
+              <a:rPr lang="en-US" sz="1600" dirty="0"/>
+              <a:t>Databricks</a:t>
             </a:r>
           </a:p>
         </p:txBody>
       </p:sp>
       <p:pic>
         <p:nvPicPr>
-          <p:cNvPr id="9" name="Picture 8">
+          <p:cNvPr id="6" name="Picture 2" descr="Matei Zaharia">
             <a:extLst>
               <a:ext uri="{FF2B5EF4-FFF2-40B4-BE49-F238E27FC236}">
-                <a16:creationId xmlns:a16="http://schemas.microsoft.com/office/drawing/2014/main" id="{2C5CDEF7-A365-AE46-A844-151E3C7CF717}"/>
+                <a16:creationId xmlns:a16="http://schemas.microsoft.com/office/drawing/2014/main" id="{F151F7BC-E1A6-3841-B2EE-DFC2F3E70F61}"/>
               </a:ext>
             </a:extLst>
           </p:cNvPr>
           <p:cNvPicPr>
-            <a:picLocks noChangeAspect="1"/>
+            <a:picLocks noChangeAspect="1" noChangeArrowheads="1"/>
           </p:cNvPicPr>
           <p:nvPr/>
         </p:nvPicPr>
         <p:blipFill>
-          <a:blip r:embed="rId8"/>
+          <a:blip r:embed="rId10" cstate="email">
+            <a:extLst>
+              <a:ext uri="{28A0092B-C50C-407E-A947-70E740481C1C}">
+                <a14:useLocalDpi xmlns:a14="http://schemas.microsoft.com/office/drawing/2010/main"/>
+              </a:ext>
+            </a:extLst>
+          </a:blip>
+          <a:srcRect/>
           <a:stretch>
             <a:fillRect/>
           </a:stretch>
         </p:blipFill>
+        <p:spPr bwMode="auto">
+          <a:xfrm>
+            <a:off x="10279559" y="160531"/>
+            <a:ext cx="1714520" cy="1999117"/>
+          </a:xfrm>
+          <a:prstGeom prst="rect">
+            <a:avLst/>
+          </a:prstGeom>
+          <a:noFill/>
+          <a:extLst>
+            <a:ext uri="{909E8E84-426E-40DD-AFC4-6F175D3DCCD1}">
+              <a14:hiddenFill xmlns:a14="http://schemas.microsoft.com/office/drawing/2010/main">
+                <a:solidFill>
+                  <a:srgbClr val="FFFFFF"/>
+                </a:solidFill>
+              </a14:hiddenFill>
+            </a:ext>
+          </a:extLst>
+        </p:spPr>
+      </p:pic>
+      <p:sp>
+        <p:nvSpPr>
+          <p:cNvPr id="2" name="Rectangle 1">
+            <a:extLst>
+              <a:ext uri="{FF2B5EF4-FFF2-40B4-BE49-F238E27FC236}">
+                <a16:creationId xmlns:a16="http://schemas.microsoft.com/office/drawing/2014/main" id="{181F634F-C9AF-2446-B2D6-F8E83500238F}"/>
+              </a:ext>
+            </a:extLst>
+          </p:cNvPr>
+          <p:cNvSpPr/>
+          <p:nvPr/>
+        </p:nvSpPr>
         <p:spPr>
           <a:xfrm>
-            <a:off x="9614390" y="277090"/>
-            <a:ext cx="2112906" cy="1633690"/>
+            <a:off x="0" y="14227"/>
+            <a:ext cx="6458819" cy="461665"/>
           </a:xfrm>
           <a:prstGeom prst="rect">
             <a:avLst/>
           </a:prstGeom>
         </p:spPr>
+        <p:txBody>
+          <a:bodyPr wrap="none">
+            <a:spAutoFit/>
+          </a:bodyPr>
+          <a:lstStyle/>
+          <a:p>
+            <a:r>
+              <a:rPr lang="en-US" sz="2400" b="1" dirty="0"/>
+              <a:t>Hadoop &gt;&gt; Spark &gt;&gt; </a:t>
+            </a:r>
+            <a:r>
+              <a:rPr lang="en-US" sz="2400" b="1" dirty="0" err="1"/>
+              <a:t>PySpark</a:t>
+            </a:r>
+            <a:r>
+              <a:rPr lang="en-US" sz="2400" b="1" dirty="0"/>
+              <a:t> &gt;&gt; </a:t>
+            </a:r>
+            <a:r>
+              <a:rPr lang="en-US" sz="2400" b="1" dirty="0" err="1">
+                <a:solidFill>
+                  <a:srgbClr val="0070C0"/>
+                </a:solidFill>
+              </a:rPr>
+              <a:t>GeoSpark</a:t>
+            </a:r>
+            <a:endParaRPr lang="en-US" sz="2400" b="1" dirty="0">
+              <a:solidFill>
+                <a:srgbClr val="0070C0"/>
+              </a:solidFill>
+            </a:endParaRPr>
+          </a:p>
+        </p:txBody>
+      </p:sp>
+      <p:pic>
+        <p:nvPicPr>
+          <p:cNvPr id="1028" name="Picture 4">
+            <a:extLst>
+              <a:ext uri="{FF2B5EF4-FFF2-40B4-BE49-F238E27FC236}">
+                <a16:creationId xmlns:a16="http://schemas.microsoft.com/office/drawing/2014/main" id="{895D8B9A-F513-CC41-97D4-7E516435976A}"/>
+              </a:ext>
+            </a:extLst>
+          </p:cNvPr>
+          <p:cNvPicPr>
+            <a:picLocks noChangeAspect="1" noChangeArrowheads="1"/>
+          </p:cNvPicPr>
+          <p:nvPr/>
+        </p:nvPicPr>
+        <p:blipFill>
+          <a:blip r:embed="rId11" cstate="email">
+            <a:extLst>
+              <a:ext uri="{28A0092B-C50C-407E-A947-70E740481C1C}">
+                <a14:useLocalDpi xmlns:a14="http://schemas.microsoft.com/office/drawing/2010/main"/>
+              </a:ext>
+            </a:extLst>
+          </a:blip>
+          <a:srcRect/>
+          <a:stretch>
+            <a:fillRect/>
+          </a:stretch>
+        </p:blipFill>
+        <p:spPr bwMode="auto">
+          <a:xfrm>
+            <a:off x="6707008" y="52386"/>
+            <a:ext cx="1407886" cy="733274"/>
+          </a:xfrm>
+          <a:prstGeom prst="rect">
+            <a:avLst/>
+          </a:prstGeom>
+          <a:noFill/>
+          <a:extLst>
+            <a:ext uri="{909E8E84-426E-40DD-AFC4-6F175D3DCCD1}">
+              <a14:hiddenFill xmlns:a14="http://schemas.microsoft.com/office/drawing/2010/main">
+                <a:solidFill>
+                  <a:srgbClr val="FFFFFF"/>
+                </a:solidFill>
+              </a14:hiddenFill>
+            </a:ext>
+          </a:extLst>
+        </p:spPr>
       </p:pic>
+      <p:pic>
+        <p:nvPicPr>
+          <p:cNvPr id="1030" name="Picture 6" descr="Unit Testing with PySpark. By David Illes, Vice President at FS… | by  Cambridge Spark | Cambridge Spark">
+            <a:extLst>
+              <a:ext uri="{FF2B5EF4-FFF2-40B4-BE49-F238E27FC236}">
+                <a16:creationId xmlns:a16="http://schemas.microsoft.com/office/drawing/2014/main" id="{ADBA205C-13A1-2746-A6E6-F7040EE02149}"/>
+              </a:ext>
+            </a:extLst>
+          </p:cNvPr>
+          <p:cNvPicPr>
+            <a:picLocks noChangeAspect="1" noChangeArrowheads="1"/>
+          </p:cNvPicPr>
+          <p:nvPr/>
+        </p:nvPicPr>
+        <p:blipFill rotWithShape="1">
+          <a:blip r:embed="rId12" cstate="email">
+            <a:extLst>
+              <a:ext uri="{28A0092B-C50C-407E-A947-70E740481C1C}">
+                <a14:useLocalDpi xmlns:a14="http://schemas.microsoft.com/office/drawing/2010/main"/>
+              </a:ext>
+            </a:extLst>
+          </a:blip>
+          <a:srcRect/>
+          <a:stretch/>
+        </p:blipFill>
+        <p:spPr bwMode="auto">
+          <a:xfrm>
+            <a:off x="8165420" y="40075"/>
+            <a:ext cx="1714520" cy="744633"/>
+          </a:xfrm>
+          <a:prstGeom prst="rect">
+            <a:avLst/>
+          </a:prstGeom>
+          <a:noFill/>
+          <a:extLst>
+            <a:ext uri="{909E8E84-426E-40DD-AFC4-6F175D3DCCD1}">
+              <a14:hiddenFill xmlns:a14="http://schemas.microsoft.com/office/drawing/2010/main">
+                <a:solidFill>
+                  <a:srgbClr val="FFFFFF"/>
+                </a:solidFill>
+              </a14:hiddenFill>
+            </a:ext>
+          </a:extLst>
+        </p:spPr>
+      </p:pic>
+      <p:pic>
+        <p:nvPicPr>
+          <p:cNvPr id="1032" name="Picture 8" descr="Databricks: Make Log4J Configurable | by Knoldus Inc. | Medium">
+            <a:extLst>
+              <a:ext uri="{FF2B5EF4-FFF2-40B4-BE49-F238E27FC236}">
+                <a16:creationId xmlns:a16="http://schemas.microsoft.com/office/drawing/2014/main" id="{13591F43-464B-7E49-98E1-909D4D9B50CE}"/>
+              </a:ext>
+            </a:extLst>
+          </p:cNvPr>
+          <p:cNvPicPr>
+            <a:picLocks noChangeAspect="1" noChangeArrowheads="1"/>
+          </p:cNvPicPr>
+          <p:nvPr/>
+        </p:nvPicPr>
+        <p:blipFill rotWithShape="1">
+          <a:blip r:embed="rId13" cstate="email">
+            <a:extLst>
+              <a:ext uri="{28A0092B-C50C-407E-A947-70E740481C1C}">
+                <a14:useLocalDpi xmlns:a14="http://schemas.microsoft.com/office/drawing/2010/main"/>
+              </a:ext>
+            </a:extLst>
+          </a:blip>
+          <a:srcRect/>
+          <a:stretch/>
+        </p:blipFill>
+        <p:spPr bwMode="auto">
+          <a:xfrm>
+            <a:off x="8232989" y="827478"/>
+            <a:ext cx="1441947" cy="776433"/>
+          </a:xfrm>
+          <a:prstGeom prst="rect">
+            <a:avLst/>
+          </a:prstGeom>
+          <a:noFill/>
+          <a:extLst>
+            <a:ext uri="{909E8E84-426E-40DD-AFC4-6F175D3DCCD1}">
+              <a14:hiddenFill xmlns:a14="http://schemas.microsoft.com/office/drawing/2010/main">
+                <a:solidFill>
+                  <a:srgbClr val="FFFFFF"/>
+                </a:solidFill>
+              </a14:hiddenFill>
+            </a:ext>
+          </a:extLst>
+        </p:spPr>
+      </p:pic>
+      <p:pic>
+        <p:nvPicPr>
+          <p:cNvPr id="7" name="Picture 2" descr="GitHub - apache/incubator-sedona: A cluster computing framework for  processing large-scale geospatial data">
+            <a:extLst>
+              <a:ext uri="{FF2B5EF4-FFF2-40B4-BE49-F238E27FC236}">
+                <a16:creationId xmlns:a16="http://schemas.microsoft.com/office/drawing/2014/main" id="{C7799C1C-B786-6940-8272-706B526A90EC}"/>
+              </a:ext>
+            </a:extLst>
+          </p:cNvPr>
+          <p:cNvPicPr>
+            <a:picLocks noChangeAspect="1" noChangeArrowheads="1"/>
+          </p:cNvPicPr>
+          <p:nvPr/>
+        </p:nvPicPr>
+        <p:blipFill rotWithShape="1">
+          <a:blip r:embed="rId14" cstate="email">
+            <a:extLst>
+              <a:ext uri="{28A0092B-C50C-407E-A947-70E740481C1C}">
+                <a14:useLocalDpi xmlns:a14="http://schemas.microsoft.com/office/drawing/2010/main"/>
+              </a:ext>
+            </a:extLst>
+          </a:blip>
+          <a:srcRect/>
+          <a:stretch/>
+        </p:blipFill>
+        <p:spPr bwMode="auto">
+          <a:xfrm>
+            <a:off x="6599581" y="1074067"/>
+            <a:ext cx="1515313" cy="448012"/>
+          </a:xfrm>
+          <a:prstGeom prst="rect">
+            <a:avLst/>
+          </a:prstGeom>
+          <a:noFill/>
+          <a:extLst>
+            <a:ext uri="{909E8E84-426E-40DD-AFC4-6F175D3DCCD1}">
+              <a14:hiddenFill xmlns:a14="http://schemas.microsoft.com/office/drawing/2010/main">
+                <a:solidFill>
+                  <a:srgbClr val="FFFFFF"/>
+                </a:solidFill>
+              </a14:hiddenFill>
+            </a:ext>
+          </a:extLst>
+        </p:spPr>
+      </p:pic>
+      <p:sp>
+        <p:nvSpPr>
+          <p:cNvPr id="12" name="TextBox 11">
+            <a:extLst>
+              <a:ext uri="{FF2B5EF4-FFF2-40B4-BE49-F238E27FC236}">
+                <a16:creationId xmlns:a16="http://schemas.microsoft.com/office/drawing/2014/main" id="{10915AB3-B952-C843-B132-9A62F802D063}"/>
+              </a:ext>
+            </a:extLst>
+          </p:cNvPr>
+          <p:cNvSpPr txBox="1"/>
+          <p:nvPr/>
+        </p:nvSpPr>
+        <p:spPr>
+          <a:xfrm>
+            <a:off x="0" y="5200692"/>
+            <a:ext cx="11994079" cy="830997"/>
+          </a:xfrm>
+          <a:prstGeom prst="rect">
+            <a:avLst/>
+          </a:prstGeom>
+          <a:noFill/>
+        </p:spPr>
+        <p:txBody>
+          <a:bodyPr wrap="square" rtlCol="0">
+            <a:spAutoFit/>
+          </a:bodyPr>
+          <a:lstStyle/>
+          <a:p>
+            <a:r>
+              <a:rPr lang="en-US" sz="1200" dirty="0"/>
+              <a:t>- </a:t>
+            </a:r>
+            <a:r>
+              <a:rPr lang="en-US" sz="1200" dirty="0">
+                <a:hlinkClick r:id="rId15"/>
+              </a:rPr>
+              <a:t>https://www.linkedin.com/pulse/automating-webgis-azure-databricks-andy-tangeman-gisp/</a:t>
+            </a:r>
+            <a:r>
+              <a:rPr lang="en-US" sz="1200" dirty="0"/>
+              <a:t> - Azure Databricks for Web GIS </a:t>
+            </a:r>
+          </a:p>
+          <a:p>
+            <a:r>
+              <a:rPr lang="en-US" sz="1200" dirty="0"/>
+              <a:t>- </a:t>
+            </a:r>
+            <a:r>
+              <a:rPr lang="en-US" sz="1200" dirty="0">
+                <a:hlinkClick r:id="rId16"/>
+              </a:rPr>
+              <a:t>https://rasterframes.io/</a:t>
+            </a:r>
+            <a:r>
+              <a:rPr lang="en-US" sz="1200" dirty="0"/>
+              <a:t> - </a:t>
+            </a:r>
+            <a:r>
+              <a:rPr lang="en-US" sz="1200" dirty="0" err="1"/>
+              <a:t>DataFrame</a:t>
+            </a:r>
+            <a:r>
+              <a:rPr lang="en-US" sz="1200" dirty="0"/>
+              <a:t>-centric view over geospatial raster data, spatiotemporal queries, map algebra raster operations, and interoperability with Spark ML</a:t>
+            </a:r>
+          </a:p>
+          <a:p>
+            <a:r>
+              <a:rPr lang="en-US" sz="1200" dirty="0"/>
+              <a:t>- </a:t>
+            </a:r>
+            <a:r>
+              <a:rPr lang="en-US" sz="1200" dirty="0">
+                <a:hlinkClick r:id="rId17"/>
+              </a:rPr>
+              <a:t>https://www.geomesa.org/</a:t>
+            </a:r>
+            <a:r>
+              <a:rPr lang="en-US" sz="1200" dirty="0"/>
+              <a:t> - Store, index, query, and transform </a:t>
+            </a:r>
+            <a:r>
+              <a:rPr lang="en-US" sz="1200" dirty="0" err="1"/>
+              <a:t>spatio</a:t>
+            </a:r>
+            <a:r>
+              <a:rPr lang="en-US" sz="1200" dirty="0"/>
+              <a:t>-temporal data at scale in HBase, </a:t>
+            </a:r>
+            <a:r>
+              <a:rPr lang="en-US" sz="1200" dirty="0" err="1"/>
+              <a:t>Accumulo</a:t>
+            </a:r>
+            <a:r>
+              <a:rPr lang="en-US" sz="1200" dirty="0"/>
+              <a:t>, Cassandra, Redis, Kafka and Spark</a:t>
+            </a:r>
+          </a:p>
+          <a:p>
+            <a:r>
+              <a:rPr lang="en-US" sz="1200" dirty="0"/>
+              <a:t>- </a:t>
+            </a:r>
+            <a:r>
+              <a:rPr lang="en-US" sz="1200" dirty="0">
+                <a:hlinkClick r:id="rId18"/>
+              </a:rPr>
+              <a:t>https://www.opengeohub.org/machine-learning-spatial-data</a:t>
+            </a:r>
+            <a:r>
+              <a:rPr lang="en-US" sz="1200" dirty="0"/>
+              <a:t> - a course</a:t>
+            </a:r>
+          </a:p>
+        </p:txBody>
+      </p:sp>
+      <p:pic>
+        <p:nvPicPr>
+          <p:cNvPr id="8" name="Picture 4">
+            <a:extLst>
+              <a:ext uri="{FF2B5EF4-FFF2-40B4-BE49-F238E27FC236}">
+                <a16:creationId xmlns:a16="http://schemas.microsoft.com/office/drawing/2014/main" id="{4432E73B-F3B4-4F40-A961-4A51C5DD7E1F}"/>
+              </a:ext>
+            </a:extLst>
+          </p:cNvPr>
+          <p:cNvPicPr>
+            <a:picLocks noChangeAspect="1" noChangeArrowheads="1"/>
+          </p:cNvPicPr>
+          <p:nvPr/>
+        </p:nvPicPr>
+        <p:blipFill>
+          <a:blip r:embed="rId19" cstate="email">
+            <a:extLst>
+              <a:ext uri="{28A0092B-C50C-407E-A947-70E740481C1C}">
+                <a14:useLocalDpi xmlns:a14="http://schemas.microsoft.com/office/drawing/2010/main"/>
+              </a:ext>
+            </a:extLst>
+          </a:blip>
+          <a:srcRect/>
+          <a:stretch>
+            <a:fillRect/>
+          </a:stretch>
+        </p:blipFill>
+        <p:spPr bwMode="auto">
+          <a:xfrm>
+            <a:off x="669035" y="3282825"/>
+            <a:ext cx="3086100" cy="1594485"/>
+          </a:xfrm>
+          <a:prstGeom prst="rect">
+            <a:avLst/>
+          </a:prstGeom>
+          <a:noFill/>
+          <a:extLst>
+            <a:ext uri="{909E8E84-426E-40DD-AFC4-6F175D3DCCD1}">
+              <a14:hiddenFill xmlns:a14="http://schemas.microsoft.com/office/drawing/2010/main">
+                <a:solidFill>
+                  <a:srgbClr val="FFFFFF"/>
+                </a:solidFill>
+              </a14:hiddenFill>
+            </a:ext>
+          </a:extLst>
+        </p:spPr>
+      </p:pic>
+      <p:sp>
+        <p:nvSpPr>
+          <p:cNvPr id="9" name="TextBox 8">
+            <a:extLst>
+              <a:ext uri="{FF2B5EF4-FFF2-40B4-BE49-F238E27FC236}">
+                <a16:creationId xmlns:a16="http://schemas.microsoft.com/office/drawing/2014/main" id="{0631E047-6086-9A45-ADA6-BE7460F6307A}"/>
+              </a:ext>
+            </a:extLst>
+          </p:cNvPr>
+          <p:cNvSpPr txBox="1"/>
+          <p:nvPr/>
+        </p:nvSpPr>
+        <p:spPr>
+          <a:xfrm>
+            <a:off x="2889504" y="2490204"/>
+            <a:ext cx="4864608" cy="646331"/>
+          </a:xfrm>
+          <a:prstGeom prst="rect">
+            <a:avLst/>
+          </a:prstGeom>
+          <a:noFill/>
+        </p:spPr>
+        <p:txBody>
+          <a:bodyPr wrap="square" rtlCol="0">
+            <a:spAutoFit/>
+          </a:bodyPr>
+          <a:lstStyle/>
+          <a:p>
+            <a:pPr algn="ctr"/>
+            <a:r>
+              <a:rPr lang="en-US" b="1" dirty="0">
+                <a:solidFill>
+                  <a:srgbClr val="FF0000"/>
+                </a:solidFill>
+              </a:rPr>
+              <a:t>Distribute and process large spatial data across multiple computers</a:t>
+            </a:r>
+          </a:p>
+        </p:txBody>
+      </p:sp>
     </p:spTree>
     <p:extLst>
       <p:ext uri="{BB962C8B-B14F-4D97-AF65-F5344CB8AC3E}">
-        <p14:creationId xmlns:p14="http://schemas.microsoft.com/office/powerpoint/2010/main" val="3347577117"/>
+        <p14:creationId xmlns:p14="http://schemas.microsoft.com/office/powerpoint/2010/main" val="1394765237"/>
       </p:ext>
     </p:extLst>
   </p:cSld>
@@ -17017,10 +18968,48 @@
       </p:grpSpPr>
       <p:sp>
         <p:nvSpPr>
-          <p:cNvPr id="4" name="TextBox 3">
+          <p:cNvPr id="2" name="Rectangle 1">
             <a:extLst>
               <a:ext uri="{FF2B5EF4-FFF2-40B4-BE49-F238E27FC236}">
-                <a16:creationId xmlns:a16="http://schemas.microsoft.com/office/drawing/2014/main" id="{3EC536C9-9CDE-7F44-8F6D-2EF3C020C7BE}"/>
+                <a16:creationId xmlns:a16="http://schemas.microsoft.com/office/drawing/2014/main" id="{6219FE3B-C31C-A649-A284-9159AEEAA9CE}"/>
+              </a:ext>
+            </a:extLst>
+          </p:cNvPr>
+          <p:cNvSpPr/>
+          <p:nvPr/>
+        </p:nvSpPr>
+        <p:spPr>
+          <a:xfrm>
+            <a:off x="0" y="14227"/>
+            <a:ext cx="4435060" cy="461665"/>
+          </a:xfrm>
+          <a:prstGeom prst="rect">
+            <a:avLst/>
+          </a:prstGeom>
+        </p:spPr>
+        <p:txBody>
+          <a:bodyPr wrap="none">
+            <a:spAutoFit/>
+          </a:bodyPr>
+          <a:lstStyle/>
+          <a:p>
+            <a:r>
+              <a:rPr lang="en-US" sz="2400" b="1" dirty="0" err="1"/>
+              <a:t>PySpark</a:t>
+            </a:r>
+            <a:r>
+              <a:rPr lang="en-US" sz="2400" b="1" dirty="0"/>
+              <a:t> – Working with Data</a:t>
+            </a:r>
+          </a:p>
+        </p:txBody>
+      </p:sp>
+      <p:sp>
+        <p:nvSpPr>
+          <p:cNvPr id="3" name="TextBox 2">
+            <a:extLst>
+              <a:ext uri="{FF2B5EF4-FFF2-40B4-BE49-F238E27FC236}">
+                <a16:creationId xmlns:a16="http://schemas.microsoft.com/office/drawing/2014/main" id="{CB58E8FB-7040-1F46-884B-2CC7309C770D}"/>
               </a:ext>
             </a:extLst>
           </p:cNvPr>
@@ -17029,8 +19018,8 @@
         </p:nvSpPr>
         <p:spPr>
           <a:xfrm>
-            <a:off x="336176" y="188259"/>
-            <a:ext cx="6602506" cy="3108543"/>
+            <a:off x="0" y="749623"/>
+            <a:ext cx="5937504" cy="2492990"/>
           </a:xfrm>
           <a:prstGeom prst="rect">
             <a:avLst/>
@@ -17044,142 +19033,125 @@
           <a:lstStyle/>
           <a:p>
             <a:r>
-              <a:rPr lang="en-US" sz="2800" b="1" dirty="0"/>
-              <a:t>CARTO</a:t>
-            </a:r>
-          </a:p>
-          <a:p>
-            <a:r>
-              <a:rPr lang="en-US" dirty="0">
-                <a:hlinkClick r:id="rId2"/>
-              </a:rPr>
-              <a:t>https://carto.com/</a:t>
-            </a:r>
-            <a:r>
-              <a:rPr lang="en-US" dirty="0"/>
-              <a:t> - Location Intelligence platform allows organizations </a:t>
+              <a:rPr lang="en-US" sz="1200" dirty="0"/>
+              <a:t>Central idea in Spark is parallel processing of data </a:t>
+            </a:r>
+          </a:p>
+          <a:p>
+            <a:r>
+              <a:rPr lang="en-US" sz="1200" dirty="0"/>
+              <a:t>by multiple compute nodes of the cluster.</a:t>
+            </a:r>
+          </a:p>
+          <a:p>
+            <a:endParaRPr lang="en-US" sz="1200" dirty="0"/>
+          </a:p>
+          <a:p>
+            <a:r>
+              <a:rPr lang="en-US" sz="1200" dirty="0"/>
+              <a:t>There are three main distributed data structures in Spark:</a:t>
+            </a:r>
+          </a:p>
+          <a:p>
+            <a:endParaRPr lang="en-US" sz="1200" dirty="0"/>
+          </a:p>
+          <a:p>
+            <a:pPr marL="171450" indent="-171450">
+              <a:buFont typeface="Arial" panose="020B0604020202020204" pitchFamily="34" charset="0"/>
+              <a:buChar char="•"/>
+            </a:pPr>
+            <a:r>
+              <a:rPr lang="en-US" sz="1200" b="1" dirty="0">
+                <a:solidFill>
+                  <a:srgbClr val="FF0000"/>
+                </a:solidFill>
+              </a:rPr>
+              <a:t>Spark RDD</a:t>
+            </a:r>
+            <a:r>
+              <a:rPr lang="en-US" sz="1200" dirty="0"/>
+              <a:t> ( Resilient Distributed Dataset ) - immutable (Read-only) </a:t>
             </a:r>
             <a:br>
-              <a:rPr lang="en-US" dirty="0"/>
+              <a:rPr lang="en-US" sz="1200" dirty="0"/>
             </a:br>
             <a:r>
-              <a:rPr lang="en-US" dirty="0"/>
-              <a:t>to store, enrich, analyze &amp; visualize their data to make spatially-aware decisions.</a:t>
-            </a:r>
-          </a:p>
-          <a:p>
-            <a:endParaRPr lang="en-US" dirty="0"/>
-          </a:p>
-          <a:p>
-            <a:r>
-              <a:rPr lang="en-US" b="1" dirty="0" err="1">
-                <a:solidFill>
-                  <a:srgbClr val="0070C0"/>
-                </a:solidFill>
-              </a:rPr>
-              <a:t>CARTOframes</a:t>
-            </a:r>
-            <a:r>
-              <a:rPr lang="en-US" dirty="0"/>
-              <a:t> - Python package for integrating CARTO maps, analysis, </a:t>
+              <a:rPr lang="en-US" sz="1200" dirty="0"/>
+              <a:t>collections of objects of varying types, which computes on the different </a:t>
             </a:r>
             <a:br>
-              <a:rPr lang="en-US" dirty="0"/>
+              <a:rPr lang="en-US" sz="1200" dirty="0"/>
             </a:br>
             <a:r>
-              <a:rPr lang="en-US" dirty="0"/>
-              <a:t>and data services into data science workflows.</a:t>
+              <a:rPr lang="en-US" sz="1200" dirty="0"/>
+              <a:t>nodes of a given cluster</a:t>
+            </a:r>
+          </a:p>
+          <a:p>
+            <a:endParaRPr lang="en-US" sz="1200" dirty="0"/>
+          </a:p>
+          <a:p>
+            <a:pPr marL="171450" indent="-171450">
+              <a:buFont typeface="Arial" panose="020B0604020202020204" pitchFamily="34" charset="0"/>
+              <a:buChar char="•"/>
+            </a:pPr>
+            <a:r>
+              <a:rPr lang="en-US" sz="1200" b="1" dirty="0">
+                <a:solidFill>
+                  <a:srgbClr val="FF0000"/>
+                </a:solidFill>
+              </a:rPr>
+              <a:t>Spark </a:t>
+            </a:r>
+            <a:r>
+              <a:rPr lang="en-US" sz="1200" b="1" dirty="0" err="1">
+                <a:solidFill>
+                  <a:srgbClr val="FF0000"/>
+                </a:solidFill>
+              </a:rPr>
+              <a:t>DataFrame</a:t>
+            </a:r>
+            <a:r>
+              <a:rPr lang="en-US" sz="1200" dirty="0"/>
+              <a:t> (distributed, not a pandas one) - distributed collection </a:t>
             </a:r>
             <a:br>
-              <a:rPr lang="en-US" dirty="0"/>
+              <a:rPr lang="en-US" sz="1200" dirty="0"/>
             </a:br>
             <a:r>
-              <a:rPr lang="en-US" dirty="0"/>
-              <a:t> - </a:t>
-            </a:r>
-            <a:r>
-              <a:rPr lang="en-US" dirty="0">
-                <a:hlinkClick r:id="rId3"/>
-              </a:rPr>
-              <a:t>https://github.com/CartoDB/cartoframes</a:t>
-            </a:r>
-            <a:r>
-              <a:rPr lang="en-US" dirty="0"/>
-              <a:t> </a:t>
-            </a:r>
-          </a:p>
-          <a:p>
-            <a:endParaRPr lang="en-US" dirty="0"/>
-          </a:p>
-          <a:p>
-            <a:r>
-              <a:rPr lang="en-US" dirty="0"/>
-              <a:t>CARTO uses Google </a:t>
-            </a:r>
-            <a:r>
-              <a:rPr lang="en-US" dirty="0" err="1"/>
-              <a:t>BigQuery</a:t>
-            </a:r>
-            <a:endParaRPr lang="en-US" dirty="0"/>
-          </a:p>
-          <a:p>
-            <a:endParaRPr lang="en-US" dirty="0"/>
-          </a:p>
-          <a:p>
-            <a:r>
-              <a:rPr lang="en-US" dirty="0"/>
-              <a:t>Pricing – limited 12 month free plan, normally $200/month (or more)</a:t>
-            </a:r>
-          </a:p>
-          <a:p>
-            <a:endParaRPr lang="en-US" dirty="0"/>
-          </a:p>
-          <a:p>
-            <a:endParaRPr lang="en-US" dirty="0"/>
+              <a:rPr lang="en-US" sz="1200" dirty="0"/>
+              <a:t>of data organized into named columns. Like a table in a relational database</a:t>
+            </a:r>
+          </a:p>
+          <a:p>
+            <a:endParaRPr lang="en-US" sz="1200" dirty="0"/>
+          </a:p>
+          <a:p>
+            <a:pPr marL="171450" indent="-171450">
+              <a:buFont typeface="Arial" panose="020B0604020202020204" pitchFamily="34" charset="0"/>
+              <a:buChar char="•"/>
+            </a:pPr>
+            <a:r>
+              <a:rPr lang="en-US" sz="1200" b="1" dirty="0">
+                <a:solidFill>
+                  <a:srgbClr val="FF0000"/>
+                </a:solidFill>
+              </a:rPr>
+              <a:t>Spark Dataset</a:t>
+            </a:r>
+            <a:r>
+              <a:rPr lang="en-US" sz="1200" dirty="0"/>
+              <a:t> - strongly typed, represents queries with encoders (Java, Scala)</a:t>
+            </a:r>
           </a:p>
         </p:txBody>
       </p:sp>
-      <p:pic>
-        <p:nvPicPr>
-          <p:cNvPr id="5" name="Picture 4">
-            <a:extLst>
-              <a:ext uri="{FF2B5EF4-FFF2-40B4-BE49-F238E27FC236}">
-                <a16:creationId xmlns:a16="http://schemas.microsoft.com/office/drawing/2014/main" id="{477E1E75-8164-654C-AC8A-337667483CED}"/>
-              </a:ext>
-            </a:extLst>
-          </p:cNvPr>
-          <p:cNvPicPr>
-            <a:picLocks noChangeAspect="1"/>
-          </p:cNvPicPr>
-          <p:nvPr/>
-        </p:nvPicPr>
-        <p:blipFill rotWithShape="1">
-          <a:blip r:embed="rId4" cstate="email">
-            <a:extLst>
-              <a:ext uri="{28A0092B-C50C-407E-A947-70E740481C1C}">
-                <a14:useLocalDpi xmlns:a14="http://schemas.microsoft.com/office/drawing/2010/main"/>
-              </a:ext>
-            </a:extLst>
-          </a:blip>
-          <a:srcRect/>
-          <a:stretch/>
-        </p:blipFill>
-        <p:spPr>
-          <a:xfrm>
-            <a:off x="9345706" y="531713"/>
-            <a:ext cx="2017059" cy="779930"/>
-          </a:xfrm>
-          <a:prstGeom prst="rect">
-            <a:avLst/>
-          </a:prstGeom>
-        </p:spPr>
-      </p:pic>
       <p:sp>
         <p:nvSpPr>
           <p:cNvPr id="6" name="TextBox 5">
             <a:extLst>
               <a:ext uri="{FF2B5EF4-FFF2-40B4-BE49-F238E27FC236}">
-                <a16:creationId xmlns:a16="http://schemas.microsoft.com/office/drawing/2014/main" id="{D6CE0CF5-A2C8-BB49-BDF6-FB52C63AE29B}"/>
+                <a16:creationId xmlns:a16="http://schemas.microsoft.com/office/drawing/2014/main" id="{B651FF21-7E66-B048-8BC6-0092082984E0}"/>
               </a:ext>
             </a:extLst>
           </p:cNvPr>
@@ -17188,8 +19160,8 @@
         </p:nvSpPr>
         <p:spPr>
           <a:xfrm>
-            <a:off x="389965" y="3603812"/>
-            <a:ext cx="7691717" cy="954107"/>
+            <a:off x="3241550" y="4215976"/>
+            <a:ext cx="4537680" cy="2492990"/>
           </a:xfrm>
           <a:prstGeom prst="rect">
             <a:avLst/>
@@ -17203,38 +19175,243 @@
           <a:lstStyle/>
           <a:p>
             <a:r>
-              <a:rPr lang="en-US" sz="2800" b="1" dirty="0"/>
-              <a:t>QGIS</a:t>
-            </a:r>
-          </a:p>
-          <a:p>
-            <a:r>
-              <a:rPr lang="en-US" dirty="0">
-                <a:hlinkClick r:id="rId5"/>
-              </a:rPr>
-              <a:t>https://www.qgis.org/en/site/</a:t>
-            </a:r>
-            <a:r>
-              <a:rPr lang="en-US" dirty="0"/>
-              <a:t> - A Free and Open Source Geographic Information System</a:t>
-            </a:r>
-          </a:p>
-          <a:p>
-            <a:endParaRPr lang="en-US" dirty="0"/>
+              <a:rPr lang="en-US" sz="1200" b="1" dirty="0">
+                <a:solidFill>
+                  <a:srgbClr val="FF0000"/>
+                </a:solidFill>
+              </a:rPr>
+              <a:t>Apache Parquet vs Apache Arrow</a:t>
+            </a:r>
+          </a:p>
+          <a:p>
+            <a:endParaRPr lang="en-US" sz="1200" b="1" dirty="0">
+              <a:solidFill>
+                <a:srgbClr val="FF0000"/>
+              </a:solidFill>
+            </a:endParaRPr>
+          </a:p>
+          <a:p>
+            <a:r>
+              <a:rPr lang="en-US" sz="1200" b="1" dirty="0">
+                <a:solidFill>
+                  <a:srgbClr val="FF0000"/>
+                </a:solidFill>
+              </a:rPr>
+              <a:t>Apache Parquet</a:t>
+            </a:r>
+            <a:r>
+              <a:rPr lang="en-US" sz="1200" dirty="0"/>
+              <a:t> - free open-source column-oriented data storage format of the </a:t>
+            </a:r>
+            <a:r>
+              <a:rPr lang="en-US" sz="1200" b="1" dirty="0">
+                <a:solidFill>
+                  <a:srgbClr val="0070C0"/>
+                </a:solidFill>
+              </a:rPr>
+              <a:t>Apache Hadoop</a:t>
+            </a:r>
+            <a:r>
+              <a:rPr lang="en-US" sz="1200" dirty="0"/>
+              <a:t> ecosystem. It uses compression. Designed for disk storage.</a:t>
+            </a:r>
+          </a:p>
+          <a:p>
+            <a:endParaRPr lang="en-US" sz="1200" dirty="0"/>
+          </a:p>
+          <a:p>
+            <a:r>
+              <a:rPr lang="en-US" sz="1200" b="1" dirty="0">
+                <a:solidFill>
+                  <a:srgbClr val="FF0000"/>
+                </a:solidFill>
+              </a:rPr>
+              <a:t>Apache Arrow</a:t>
+            </a:r>
+            <a:r>
+              <a:rPr lang="en-US" sz="1200" dirty="0"/>
+              <a:t> – protocol to store </a:t>
+            </a:r>
+            <a:r>
+              <a:rPr lang="en-US" sz="1200" dirty="0" err="1"/>
+              <a:t>DataFrames</a:t>
+            </a:r>
+            <a:r>
+              <a:rPr lang="en-US" sz="1200" dirty="0"/>
+              <a:t> in memory and on disk. Designed for "in-memory".</a:t>
+            </a:r>
+          </a:p>
+          <a:p>
+            <a:endParaRPr lang="en-US" sz="1200" dirty="0"/>
+          </a:p>
+          <a:p>
+            <a:r>
+              <a:rPr lang="en-US" sz="1200" b="1" dirty="0">
+                <a:solidFill>
+                  <a:srgbClr val="FF0000"/>
+                </a:solidFill>
+              </a:rPr>
+              <a:t>Parquet</a:t>
+            </a:r>
+            <a:r>
+              <a:rPr lang="en-US" sz="1200" dirty="0"/>
+              <a:t> files are often much smaller than </a:t>
+            </a:r>
+            <a:r>
+              <a:rPr lang="en-US" sz="1200" b="1" dirty="0">
+                <a:solidFill>
+                  <a:srgbClr val="FF0000"/>
+                </a:solidFill>
+              </a:rPr>
+              <a:t>Arrow</a:t>
+            </a:r>
+            <a:r>
+              <a:rPr lang="en-US" sz="1200" dirty="0"/>
+              <a:t>-files.</a:t>
+            </a:r>
+          </a:p>
+          <a:p>
+            <a:endParaRPr lang="en-US" sz="1200" dirty="0"/>
+          </a:p>
+          <a:p>
+            <a:r>
+              <a:rPr lang="en-US" sz="1200" dirty="0"/>
+              <a:t> - </a:t>
+            </a:r>
+            <a:r>
+              <a:rPr lang="en-US" sz="1200" dirty="0">
+                <a:hlinkClick r:id="rId2"/>
+              </a:rPr>
+              <a:t>https://parquet.apache.org/</a:t>
+            </a:r>
+            <a:r>
+              <a:rPr lang="en-US" sz="1200" dirty="0"/>
+              <a:t> </a:t>
+            </a:r>
+          </a:p>
+          <a:p>
+            <a:r>
+              <a:rPr lang="en-US" sz="1200" dirty="0"/>
+              <a:t> - </a:t>
+            </a:r>
+            <a:r>
+              <a:rPr lang="en-US" sz="1200" dirty="0">
+                <a:hlinkClick r:id="rId3"/>
+              </a:rPr>
+              <a:t>https://arrow.apache.org/</a:t>
+            </a:r>
+            <a:r>
+              <a:rPr lang="en-US" sz="1200" dirty="0"/>
+              <a:t> </a:t>
+            </a:r>
           </a:p>
         </p:txBody>
       </p:sp>
       <p:pic>
         <p:nvPicPr>
-          <p:cNvPr id="7" name="Picture 6">
+          <p:cNvPr id="1026" name="Picture 2" descr="Apache Spark – RDD, DataFrames, Transformations (Narrow &amp; Wide), Actions,  Lazy Evaluation (Part 3) | SQL with Manoj">
             <a:extLst>
               <a:ext uri="{FF2B5EF4-FFF2-40B4-BE49-F238E27FC236}">
-                <a16:creationId xmlns:a16="http://schemas.microsoft.com/office/drawing/2014/main" id="{3449D432-448A-0046-88A9-7C934CCD5D27}"/>
+                <a16:creationId xmlns:a16="http://schemas.microsoft.com/office/drawing/2014/main" id="{B1CE795A-54A5-A44C-AE7F-9090D6735D9B}"/>
               </a:ext>
             </a:extLst>
           </p:cNvPr>
           <p:cNvPicPr>
-            <a:picLocks noChangeAspect="1"/>
+            <a:picLocks noChangeAspect="1" noChangeArrowheads="1"/>
+          </p:cNvPicPr>
+          <p:nvPr/>
+        </p:nvPicPr>
+        <p:blipFill>
+          <a:blip r:embed="rId4" cstate="email">
+            <a:extLst>
+              <a:ext uri="{28A0092B-C50C-407E-A947-70E740481C1C}">
+                <a14:useLocalDpi xmlns:a14="http://schemas.microsoft.com/office/drawing/2010/main"/>
+              </a:ext>
+            </a:extLst>
+          </a:blip>
+          <a:srcRect/>
+          <a:stretch>
+            <a:fillRect/>
+          </a:stretch>
+        </p:blipFill>
+        <p:spPr bwMode="auto">
+          <a:xfrm>
+            <a:off x="5524392" y="87378"/>
+            <a:ext cx="6667608" cy="2070605"/>
+          </a:xfrm>
+          <a:prstGeom prst="rect">
+            <a:avLst/>
+          </a:prstGeom>
+          <a:noFill/>
+          <a:extLst>
+            <a:ext uri="{909E8E84-426E-40DD-AFC4-6F175D3DCCD1}">
+              <a14:hiddenFill xmlns:a14="http://schemas.microsoft.com/office/drawing/2010/main">
+                <a:solidFill>
+                  <a:srgbClr val="FFFFFF"/>
+                </a:solidFill>
+              </a14:hiddenFill>
+            </a:ext>
+          </a:extLst>
+        </p:spPr>
+      </p:pic>
+      <p:pic>
+        <p:nvPicPr>
+          <p:cNvPr id="4" name="Picture 2" descr="Trimming Parquet files to a single row | by Ruurtjan Pul | Medium">
+            <a:extLst>
+              <a:ext uri="{FF2B5EF4-FFF2-40B4-BE49-F238E27FC236}">
+                <a16:creationId xmlns:a16="http://schemas.microsoft.com/office/drawing/2014/main" id="{C7410F57-DB8F-B749-8370-A5B13C2561B0}"/>
+              </a:ext>
+            </a:extLst>
+          </p:cNvPr>
+          <p:cNvPicPr>
+            <a:picLocks noChangeAspect="1" noChangeArrowheads="1"/>
+          </p:cNvPicPr>
+          <p:nvPr/>
+        </p:nvPicPr>
+        <p:blipFill>
+          <a:blip r:embed="rId5" cstate="email">
+            <a:extLst>
+              <a:ext uri="{28A0092B-C50C-407E-A947-70E740481C1C}">
+                <a14:useLocalDpi xmlns:a14="http://schemas.microsoft.com/office/drawing/2010/main"/>
+              </a:ext>
+            </a:extLst>
+          </a:blip>
+          <a:srcRect/>
+          <a:stretch>
+            <a:fillRect/>
+          </a:stretch>
+        </p:blipFill>
+        <p:spPr bwMode="auto">
+          <a:xfrm>
+            <a:off x="2100653" y="3526906"/>
+            <a:ext cx="2126342" cy="531585"/>
+          </a:xfrm>
+          <a:prstGeom prst="rect">
+            <a:avLst/>
+          </a:prstGeom>
+          <a:noFill/>
+          <a:extLst>
+            <a:ext uri="{909E8E84-426E-40DD-AFC4-6F175D3DCCD1}">
+              <a14:hiddenFill xmlns:a14="http://schemas.microsoft.com/office/drawing/2010/main">
+                <a:solidFill>
+                  <a:srgbClr val="FFFFFF"/>
+                </a:solidFill>
+              </a14:hiddenFill>
+            </a:ext>
+          </a:extLst>
+        </p:spPr>
+      </p:pic>
+      <p:pic>
+        <p:nvPicPr>
+          <p:cNvPr id="1028" name="Picture 4" descr="Apache Arrow | Apache Arrow">
+            <a:extLst>
+              <a:ext uri="{FF2B5EF4-FFF2-40B4-BE49-F238E27FC236}">
+                <a16:creationId xmlns:a16="http://schemas.microsoft.com/office/drawing/2014/main" id="{A8A36C66-F1B1-9044-8246-1C2DDFD4BD61}"/>
+              </a:ext>
+            </a:extLst>
+          </p:cNvPr>
+          <p:cNvPicPr>
+            <a:picLocks noChangeAspect="1" noChangeArrowheads="1"/>
           </p:cNvPicPr>
           <p:nvPr/>
         </p:nvPicPr>
@@ -17246,24 +19423,168 @@
               </a:ext>
             </a:extLst>
           </a:blip>
+          <a:srcRect/>
           <a:stretch>
             <a:fillRect/>
           </a:stretch>
         </p:blipFill>
-        <p:spPr>
+        <p:spPr bwMode="auto">
           <a:xfrm>
-            <a:off x="9345706" y="3133595"/>
-            <a:ext cx="1640111" cy="1640111"/>
+            <a:off x="6378158" y="3500240"/>
+            <a:ext cx="1958266" cy="715736"/>
           </a:xfrm>
           <a:prstGeom prst="rect">
             <a:avLst/>
           </a:prstGeom>
+          <a:noFill/>
+          <a:extLst>
+            <a:ext uri="{909E8E84-426E-40DD-AFC4-6F175D3DCCD1}">
+              <a14:hiddenFill xmlns:a14="http://schemas.microsoft.com/office/drawing/2010/main">
+                <a:solidFill>
+                  <a:srgbClr val="FFFFFF"/>
+                </a:solidFill>
+              </a14:hiddenFill>
+            </a:ext>
+          </a:extLst>
         </p:spPr>
       </p:pic>
+      <p:pic>
+        <p:nvPicPr>
+          <p:cNvPr id="1030" name="Picture 6" descr="Wes McKinney (@wesmckinn) | Twitter">
+            <a:extLst>
+              <a:ext uri="{FF2B5EF4-FFF2-40B4-BE49-F238E27FC236}">
+                <a16:creationId xmlns:a16="http://schemas.microsoft.com/office/drawing/2014/main" id="{CE06C0F5-6C08-8745-A7AA-392DBF38F8A6}"/>
+              </a:ext>
+            </a:extLst>
+          </p:cNvPr>
+          <p:cNvPicPr>
+            <a:picLocks noChangeAspect="1" noChangeArrowheads="1"/>
+          </p:cNvPicPr>
+          <p:nvPr/>
+        </p:nvPicPr>
+        <p:blipFill rotWithShape="1">
+          <a:blip r:embed="rId7" cstate="email">
+            <a:extLst>
+              <a:ext uri="{28A0092B-C50C-407E-A947-70E740481C1C}">
+                <a14:useLocalDpi xmlns:a14="http://schemas.microsoft.com/office/drawing/2010/main"/>
+              </a:ext>
+            </a:extLst>
+          </a:blip>
+          <a:srcRect/>
+          <a:stretch/>
+        </p:blipFill>
+        <p:spPr bwMode="auto">
+          <a:xfrm>
+            <a:off x="8858196" y="3494146"/>
+            <a:ext cx="1255777" cy="1463040"/>
+          </a:xfrm>
+          <a:prstGeom prst="rect">
+            <a:avLst/>
+          </a:prstGeom>
+          <a:noFill/>
+          <a:extLst>
+            <a:ext uri="{909E8E84-426E-40DD-AFC4-6F175D3DCCD1}">
+              <a14:hiddenFill xmlns:a14="http://schemas.microsoft.com/office/drawing/2010/main">
+                <a:solidFill>
+                  <a:srgbClr val="FFFFFF"/>
+                </a:solidFill>
+              </a14:hiddenFill>
+            </a:ext>
+          </a:extLst>
+        </p:spPr>
+      </p:pic>
+      <p:sp>
+        <p:nvSpPr>
+          <p:cNvPr id="5" name="TextBox 4">
+            <a:extLst>
+              <a:ext uri="{FF2B5EF4-FFF2-40B4-BE49-F238E27FC236}">
+                <a16:creationId xmlns:a16="http://schemas.microsoft.com/office/drawing/2014/main" id="{C5B51FC2-88C8-0C41-8DDE-14342048C886}"/>
+              </a:ext>
+            </a:extLst>
+          </p:cNvPr>
+          <p:cNvSpPr txBox="1"/>
+          <p:nvPr/>
+        </p:nvSpPr>
+        <p:spPr>
+          <a:xfrm>
+            <a:off x="8655576" y="4969833"/>
+            <a:ext cx="1636632" cy="338554"/>
+          </a:xfrm>
+          <a:prstGeom prst="rect">
+            <a:avLst/>
+          </a:prstGeom>
+          <a:noFill/>
+        </p:spPr>
+        <p:txBody>
+          <a:bodyPr wrap="square" rtlCol="0">
+            <a:spAutoFit/>
+          </a:bodyPr>
+          <a:lstStyle/>
+          <a:p>
+            <a:pPr algn="ctr"/>
+            <a:r>
+              <a:rPr lang="en-US" sz="1600" dirty="0"/>
+              <a:t>Wes McKinney</a:t>
+            </a:r>
+          </a:p>
+        </p:txBody>
+      </p:sp>
+      <p:sp>
+        <p:nvSpPr>
+          <p:cNvPr id="7" name="TextBox 6">
+            <a:extLst>
+              <a:ext uri="{FF2B5EF4-FFF2-40B4-BE49-F238E27FC236}">
+                <a16:creationId xmlns:a16="http://schemas.microsoft.com/office/drawing/2014/main" id="{9B7F613C-B668-EA49-B317-CF89F230B0C3}"/>
+              </a:ext>
+            </a:extLst>
+          </p:cNvPr>
+          <p:cNvSpPr txBox="1"/>
+          <p:nvPr/>
+        </p:nvSpPr>
+        <p:spPr>
+          <a:xfrm>
+            <a:off x="8137417" y="5321034"/>
+            <a:ext cx="3749783" cy="461665"/>
+          </a:xfrm>
+          <a:prstGeom prst="rect">
+            <a:avLst/>
+          </a:prstGeom>
+          <a:noFill/>
+        </p:spPr>
+        <p:txBody>
+          <a:bodyPr wrap="square" rtlCol="0">
+            <a:spAutoFit/>
+          </a:bodyPr>
+          <a:lstStyle/>
+          <a:p>
+            <a:r>
+              <a:rPr lang="en-US" sz="1200" dirty="0"/>
+              <a:t>Feather format</a:t>
+            </a:r>
+            <a:br>
+              <a:rPr lang="en-US" sz="1200" dirty="0"/>
+            </a:br>
+            <a:r>
+              <a:rPr lang="en-US" sz="1200" dirty="0"/>
+              <a:t> - </a:t>
+            </a:r>
+            <a:r>
+              <a:rPr lang="en-US" sz="1200" dirty="0">
+                <a:hlinkClick r:id="rId8"/>
+              </a:rPr>
+              <a:t>https://arrow.apache.org/docs/python/feather.html</a:t>
+            </a:r>
+            <a:r>
+              <a:rPr lang="en-US" sz="1200" dirty="0"/>
+              <a:t> </a:t>
+            </a:r>
+          </a:p>
+        </p:txBody>
+      </p:sp>
     </p:spTree>
     <p:extLst>
       <p:ext uri="{BB962C8B-B14F-4D97-AF65-F5344CB8AC3E}">
-        <p14:creationId xmlns:p14="http://schemas.microsoft.com/office/powerpoint/2010/main" val="3410325982"/>
+        <p14:creationId xmlns:p14="http://schemas.microsoft.com/office/powerpoint/2010/main" val="3960455690"/>
       </p:ext>
     </p:extLst>
   </p:cSld>
@@ -17274,6 +19595,1281 @@
 </file>
 
 <file path=ppt/slides/slide7.xml><?xml version="1.0" encoding="utf-8"?>
+<p:sld xmlns:a="http://schemas.openxmlformats.org/drawingml/2006/main" xmlns:r="http://schemas.openxmlformats.org/officeDocument/2006/relationships" xmlns:p="http://schemas.openxmlformats.org/presentationml/2006/main">
+  <p:cSld>
+    <p:spTree>
+      <p:nvGrpSpPr>
+        <p:cNvPr id="1" name=""/>
+        <p:cNvGrpSpPr/>
+        <p:nvPr/>
+      </p:nvGrpSpPr>
+      <p:grpSpPr>
+        <a:xfrm>
+          <a:off x="0" y="0"/>
+          <a:ext cx="0" cy="0"/>
+          <a:chOff x="0" y="0"/>
+          <a:chExt cx="0" cy="0"/>
+        </a:xfrm>
+      </p:grpSpPr>
+      <p:sp>
+        <p:nvSpPr>
+          <p:cNvPr id="2" name="TextBox 1">
+            <a:extLst>
+              <a:ext uri="{FF2B5EF4-FFF2-40B4-BE49-F238E27FC236}">
+                <a16:creationId xmlns:a16="http://schemas.microsoft.com/office/drawing/2014/main" id="{01A3B75B-06F4-9045-940A-F9A4F7A990BD}"/>
+              </a:ext>
+            </a:extLst>
+          </p:cNvPr>
+          <p:cNvSpPr txBox="1"/>
+          <p:nvPr/>
+        </p:nvSpPr>
+        <p:spPr>
+          <a:xfrm>
+            <a:off x="0" y="0"/>
+            <a:ext cx="4916774" cy="523220"/>
+          </a:xfrm>
+          <a:prstGeom prst="rect">
+            <a:avLst/>
+          </a:prstGeom>
+          <a:noFill/>
+        </p:spPr>
+        <p:txBody>
+          <a:bodyPr wrap="square" rtlCol="0">
+            <a:spAutoFit/>
+          </a:bodyPr>
+          <a:lstStyle/>
+          <a:p>
+            <a:r>
+              <a:rPr lang="en-US" sz="2800" b="1" dirty="0"/>
+              <a:t>Azure and Geo Spatial</a:t>
+            </a:r>
+          </a:p>
+        </p:txBody>
+      </p:sp>
+      <p:sp>
+        <p:nvSpPr>
+          <p:cNvPr id="3" name="TextBox 2">
+            <a:extLst>
+              <a:ext uri="{FF2B5EF4-FFF2-40B4-BE49-F238E27FC236}">
+                <a16:creationId xmlns:a16="http://schemas.microsoft.com/office/drawing/2014/main" id="{BF6A5ACD-BE25-9E4D-8082-C733161F743A}"/>
+              </a:ext>
+            </a:extLst>
+          </p:cNvPr>
+          <p:cNvSpPr txBox="1"/>
+          <p:nvPr/>
+        </p:nvSpPr>
+        <p:spPr>
+          <a:xfrm>
+            <a:off x="2781975" y="718066"/>
+            <a:ext cx="7959777" cy="5262979"/>
+          </a:xfrm>
+          <a:prstGeom prst="rect">
+            <a:avLst/>
+          </a:prstGeom>
+          <a:noFill/>
+        </p:spPr>
+        <p:txBody>
+          <a:bodyPr wrap="square" rtlCol="0">
+            <a:spAutoFit/>
+          </a:bodyPr>
+          <a:lstStyle/>
+          <a:p>
+            <a:r>
+              <a:rPr lang="en-US" sz="1200" b="1" dirty="0">
+                <a:solidFill>
+                  <a:srgbClr val="FF0000"/>
+                </a:solidFill>
+              </a:rPr>
+              <a:t>Azure Maps</a:t>
+            </a:r>
+          </a:p>
+          <a:p>
+            <a:r>
+              <a:rPr lang="en-US" sz="1200" dirty="0"/>
+              <a:t>Azure Maps is the natural product for showing spatial information on a map in an Azure-based architecture (other than Esri tools, which can also be a great solution).</a:t>
+            </a:r>
+          </a:p>
+          <a:p>
+            <a:r>
+              <a:rPr lang="en-US" sz="1200" dirty="0"/>
+              <a:t> - </a:t>
+            </a:r>
+            <a:r>
+              <a:rPr lang="en-US" sz="1200" dirty="0">
+                <a:hlinkClick r:id="rId2"/>
+              </a:rPr>
+              <a:t>https://azure.microsoft.com/en-us/services/azure-maps/</a:t>
+            </a:r>
+            <a:r>
+              <a:rPr lang="en-US" sz="1200" dirty="0"/>
+              <a:t> </a:t>
+            </a:r>
+          </a:p>
+          <a:p>
+            <a:endParaRPr lang="en-US" sz="1200" dirty="0"/>
+          </a:p>
+          <a:p>
+            <a:r>
+              <a:rPr lang="en-US" sz="1200" b="1" dirty="0">
+                <a:solidFill>
+                  <a:srgbClr val="FF0000"/>
+                </a:solidFill>
+              </a:rPr>
+              <a:t>Azure Cosmos DB</a:t>
+            </a:r>
+          </a:p>
+          <a:p>
+            <a:r>
+              <a:rPr lang="en-US" sz="1200" dirty="0" err="1"/>
+              <a:t>CosmosDB</a:t>
+            </a:r>
+            <a:r>
+              <a:rPr lang="en-US" sz="1200" dirty="0"/>
+              <a:t> also has a set of spatial features that would get the same thing done (as MS SQL Server or PostgreSQL):</a:t>
+            </a:r>
+          </a:p>
+          <a:p>
+            <a:r>
+              <a:rPr lang="en-US" sz="1200" dirty="0"/>
+              <a:t> - </a:t>
+            </a:r>
+            <a:r>
+              <a:rPr lang="en-US" sz="1200" dirty="0">
+                <a:hlinkClick r:id="rId3"/>
+              </a:rPr>
+              <a:t>https://docs.microsoft.com/en-us/azure/cosmos-db/sql-query-geospatial-intro</a:t>
+            </a:r>
+            <a:r>
+              <a:rPr lang="en-US" sz="1200" dirty="0"/>
+              <a:t> </a:t>
+            </a:r>
+          </a:p>
+          <a:p>
+            <a:r>
+              <a:rPr lang="en-US" sz="1200" dirty="0"/>
+              <a:t> - </a:t>
+            </a:r>
+            <a:r>
+              <a:rPr lang="en-US" sz="1200" dirty="0">
+                <a:hlinkClick r:id="rId4"/>
+              </a:rPr>
+              <a:t>https://towardsdatascience.com/geospatial-big-data-performance-tests-with-cosmos-db-and-data-enrichment-with-azure-synapse-257db7d29e41</a:t>
+            </a:r>
+            <a:r>
+              <a:rPr lang="en-US" sz="1200" dirty="0"/>
+              <a:t> </a:t>
+            </a:r>
+          </a:p>
+          <a:p>
+            <a:endParaRPr lang="en-US" sz="1200" dirty="0"/>
+          </a:p>
+          <a:p>
+            <a:r>
+              <a:rPr lang="en-US" sz="1200" b="1" dirty="0">
+                <a:solidFill>
+                  <a:srgbClr val="FF0000"/>
+                </a:solidFill>
+              </a:rPr>
+              <a:t>Azure Stream Analytics – </a:t>
+            </a:r>
+            <a:r>
+              <a:rPr lang="en-US" sz="1200" b="1" dirty="0" err="1">
+                <a:solidFill>
+                  <a:srgbClr val="FF0000"/>
+                </a:solidFill>
+              </a:rPr>
+              <a:t>GeoSpatial</a:t>
+            </a:r>
+            <a:r>
+              <a:rPr lang="en-US" sz="1200" b="1" dirty="0">
+                <a:solidFill>
+                  <a:srgbClr val="FF0000"/>
+                </a:solidFill>
+              </a:rPr>
+              <a:t> Functions</a:t>
+            </a:r>
+          </a:p>
+          <a:p>
+            <a:r>
+              <a:rPr lang="en-US" sz="1200" dirty="0"/>
+              <a:t> - </a:t>
+            </a:r>
+            <a:r>
+              <a:rPr lang="en-US" sz="1200" dirty="0">
+                <a:hlinkClick r:id="rId5"/>
+              </a:rPr>
+              <a:t>https://azure.microsoft.com/fr-fr/blog/new-in-azure-stream-analytics-geospatial-functions-custom-code-and-lots-more/</a:t>
+            </a:r>
+            <a:r>
+              <a:rPr lang="en-US" sz="1200" dirty="0"/>
+              <a:t>  </a:t>
+            </a:r>
+          </a:p>
+          <a:p>
+            <a:endParaRPr lang="en-US" sz="1200" dirty="0"/>
+          </a:p>
+          <a:p>
+            <a:pPr lvl="0"/>
+            <a:r>
+              <a:rPr lang="en-US" sz="1200" b="1" dirty="0">
+                <a:solidFill>
+                  <a:srgbClr val="FF0000"/>
+                </a:solidFill>
+              </a:rPr>
+              <a:t>Azure </a:t>
+            </a:r>
+            <a:r>
+              <a:rPr lang="en-US" sz="1200" b="1" dirty="0" err="1">
+                <a:solidFill>
+                  <a:srgbClr val="FF0000"/>
+                </a:solidFill>
+              </a:rPr>
+              <a:t>GeoAI</a:t>
+            </a:r>
+            <a:r>
+              <a:rPr lang="en-US" sz="1200" b="1" dirty="0">
+                <a:solidFill>
+                  <a:srgbClr val="FF0000"/>
+                </a:solidFill>
+              </a:rPr>
+              <a:t> DSVM</a:t>
+            </a:r>
+            <a:r>
+              <a:rPr lang="en-US" sz="1200" dirty="0"/>
+              <a:t> </a:t>
+            </a:r>
+          </a:p>
+          <a:p>
+            <a:pPr lvl="0"/>
+            <a:r>
+              <a:rPr lang="en-US" sz="1200" dirty="0"/>
+              <a:t>Data Science Virtual Machine was introduced in 2018</a:t>
+            </a:r>
+            <a:br>
+              <a:rPr lang="en-US" sz="1200" dirty="0"/>
+            </a:br>
+            <a:r>
+              <a:rPr lang="en-US" sz="1200" dirty="0"/>
+              <a:t>- </a:t>
+            </a:r>
+            <a:r>
+              <a:rPr lang="en-US" sz="1200" dirty="0">
+                <a:hlinkClick r:id="rId6"/>
+              </a:rPr>
+              <a:t>https://azure.microsoft.com/en-us/blog/microsoft-and-esri-launch-geospatial-ai-on-azure/</a:t>
+            </a:r>
+            <a:r>
+              <a:rPr lang="en-US" sz="1200" dirty="0"/>
+              <a:t> </a:t>
+            </a:r>
+          </a:p>
+          <a:p>
+            <a:pPr lvl="0"/>
+            <a:endParaRPr lang="en-US" sz="1200" dirty="0"/>
+          </a:p>
+          <a:p>
+            <a:pPr lvl="0"/>
+            <a:endParaRPr lang="en-US" sz="1200" dirty="0"/>
+          </a:p>
+          <a:p>
+            <a:pPr lvl="0"/>
+            <a:r>
+              <a:rPr lang="en-US" sz="1200" b="1" dirty="0">
+                <a:solidFill>
+                  <a:srgbClr val="FF0000"/>
+                </a:solidFill>
+              </a:rPr>
+              <a:t>Azure ArcGIS Enterprise Server (ESRI)</a:t>
+            </a:r>
+            <a:br>
+              <a:rPr lang="en-US" sz="1200" dirty="0"/>
+            </a:br>
+            <a:r>
+              <a:rPr lang="en-US" sz="1200" dirty="0"/>
+              <a:t> - </a:t>
+            </a:r>
+            <a:r>
+              <a:rPr lang="en-US" sz="1200" dirty="0">
+                <a:hlinkClick r:id="rId6"/>
+              </a:rPr>
+              <a:t>https://azure.microsoft.com/en-us/blog/microsoft-and-esri-launch-geospatial-ai-on-azure/</a:t>
+            </a:r>
+            <a:r>
+              <a:rPr lang="en-US" sz="1200" dirty="0"/>
+              <a:t> </a:t>
+            </a:r>
+          </a:p>
+          <a:p>
+            <a:pPr lvl="0"/>
+            <a:endParaRPr lang="en-US" sz="1200" dirty="0"/>
+          </a:p>
+          <a:p>
+            <a:pPr lvl="0"/>
+            <a:r>
+              <a:rPr lang="en-US" sz="1200" b="1" dirty="0">
+                <a:solidFill>
+                  <a:srgbClr val="FF0000"/>
+                </a:solidFill>
+              </a:rPr>
+              <a:t>Azure Distributed Solutions</a:t>
+            </a:r>
+            <a:r>
+              <a:rPr lang="en-US" sz="1200" dirty="0"/>
+              <a:t> </a:t>
+            </a:r>
+          </a:p>
+          <a:p>
+            <a:pPr lvl="0"/>
+            <a:r>
+              <a:rPr lang="en-US" sz="1200" dirty="0"/>
+              <a:t>using Deep-Learning and GPU-enabled servers (2019)</a:t>
+            </a:r>
+            <a:br>
+              <a:rPr lang="en-US" sz="1200" dirty="0"/>
+            </a:br>
+            <a:r>
+              <a:rPr lang="en-US" sz="1200" dirty="0"/>
+              <a:t> - </a:t>
+            </a:r>
+            <a:r>
+              <a:rPr lang="en-US" sz="1200" dirty="0">
+                <a:hlinkClick r:id="rId7"/>
+              </a:rPr>
+              <a:t>https://medium.com/geoai/integrating-deep-learning-with-gis-70e7c5aa9dfe</a:t>
+            </a:r>
+            <a:r>
+              <a:rPr lang="en-US" sz="1200" dirty="0"/>
+              <a:t> </a:t>
+            </a:r>
+          </a:p>
+        </p:txBody>
+      </p:sp>
+      <p:pic>
+        <p:nvPicPr>
+          <p:cNvPr id="2050" name="Picture 2" descr="Getting Started with the Table API in Azure Cosmos DB | by Will Velida |  Medium">
+            <a:extLst>
+              <a:ext uri="{FF2B5EF4-FFF2-40B4-BE49-F238E27FC236}">
+                <a16:creationId xmlns:a16="http://schemas.microsoft.com/office/drawing/2014/main" id="{47E8340A-C6A7-C544-8C64-571DC6CE679F}"/>
+              </a:ext>
+            </a:extLst>
+          </p:cNvPr>
+          <p:cNvPicPr>
+            <a:picLocks noChangeAspect="1" noChangeArrowheads="1"/>
+          </p:cNvPicPr>
+          <p:nvPr/>
+        </p:nvPicPr>
+        <p:blipFill rotWithShape="1">
+          <a:blip r:embed="rId8" cstate="email">
+            <a:extLst>
+              <a:ext uri="{28A0092B-C50C-407E-A947-70E740481C1C}">
+                <a14:useLocalDpi xmlns:a14="http://schemas.microsoft.com/office/drawing/2010/main"/>
+              </a:ext>
+            </a:extLst>
+          </a:blip>
+          <a:srcRect/>
+          <a:stretch/>
+        </p:blipFill>
+        <p:spPr bwMode="auto">
+          <a:xfrm>
+            <a:off x="1323105" y="1748677"/>
+            <a:ext cx="875404" cy="877824"/>
+          </a:xfrm>
+          <a:prstGeom prst="rect">
+            <a:avLst/>
+          </a:prstGeom>
+          <a:noFill/>
+          <a:extLst>
+            <a:ext uri="{909E8E84-426E-40DD-AFC4-6F175D3DCCD1}">
+              <a14:hiddenFill xmlns:a14="http://schemas.microsoft.com/office/drawing/2010/main">
+                <a:solidFill>
+                  <a:srgbClr val="FFFFFF"/>
+                </a:solidFill>
+              </a14:hiddenFill>
+            </a:ext>
+          </a:extLst>
+        </p:spPr>
+      </p:pic>
+      <p:pic>
+        <p:nvPicPr>
+          <p:cNvPr id="2052" name="Picture 4" descr="Image templates in the Azure Maps Web SDK | Microsoft Docs">
+            <a:extLst>
+              <a:ext uri="{FF2B5EF4-FFF2-40B4-BE49-F238E27FC236}">
+                <a16:creationId xmlns:a16="http://schemas.microsoft.com/office/drawing/2014/main" id="{828AFD06-060A-0F4E-9D28-A78725ECEAEF}"/>
+              </a:ext>
+            </a:extLst>
+          </p:cNvPr>
+          <p:cNvPicPr>
+            <a:picLocks noChangeAspect="1" noChangeArrowheads="1"/>
+          </p:cNvPicPr>
+          <p:nvPr/>
+        </p:nvPicPr>
+        <p:blipFill rotWithShape="1">
+          <a:blip r:embed="rId9" cstate="email">
+            <a:extLst>
+              <a:ext uri="{28A0092B-C50C-407E-A947-70E740481C1C}">
+                <a14:useLocalDpi xmlns:a14="http://schemas.microsoft.com/office/drawing/2010/main"/>
+              </a:ext>
+            </a:extLst>
+          </a:blip>
+          <a:srcRect/>
+          <a:stretch/>
+        </p:blipFill>
+        <p:spPr bwMode="auto">
+          <a:xfrm>
+            <a:off x="1317730" y="717257"/>
+            <a:ext cx="844646" cy="794751"/>
+          </a:xfrm>
+          <a:prstGeom prst="rect">
+            <a:avLst/>
+          </a:prstGeom>
+          <a:noFill/>
+          <a:extLst>
+            <a:ext uri="{909E8E84-426E-40DD-AFC4-6F175D3DCCD1}">
+              <a14:hiddenFill xmlns:a14="http://schemas.microsoft.com/office/drawing/2010/main">
+                <a:solidFill>
+                  <a:srgbClr val="FFFFFF"/>
+                </a:solidFill>
+              </a14:hiddenFill>
+            </a:ext>
+          </a:extLst>
+        </p:spPr>
+      </p:pic>
+      <p:pic>
+        <p:nvPicPr>
+          <p:cNvPr id="2054" name="Picture 6" descr="Azure Stream Analytics Tools - Visual Studio Marketplace">
+            <a:extLst>
+              <a:ext uri="{FF2B5EF4-FFF2-40B4-BE49-F238E27FC236}">
+                <a16:creationId xmlns:a16="http://schemas.microsoft.com/office/drawing/2014/main" id="{088F8D3D-E980-924E-B230-5146279947A2}"/>
+              </a:ext>
+            </a:extLst>
+          </p:cNvPr>
+          <p:cNvPicPr>
+            <a:picLocks noChangeAspect="1" noChangeArrowheads="1"/>
+          </p:cNvPicPr>
+          <p:nvPr/>
+        </p:nvPicPr>
+        <p:blipFill rotWithShape="1">
+          <a:blip r:embed="rId10" cstate="email">
+            <a:extLst>
+              <a:ext uri="{28A0092B-C50C-407E-A947-70E740481C1C}">
+                <a14:useLocalDpi xmlns:a14="http://schemas.microsoft.com/office/drawing/2010/main"/>
+              </a:ext>
+            </a:extLst>
+          </a:blip>
+          <a:srcRect/>
+          <a:stretch/>
+        </p:blipFill>
+        <p:spPr bwMode="auto">
+          <a:xfrm>
+            <a:off x="1262671" y="2855976"/>
+            <a:ext cx="873731" cy="707136"/>
+          </a:xfrm>
+          <a:prstGeom prst="rect">
+            <a:avLst/>
+          </a:prstGeom>
+          <a:noFill/>
+          <a:extLst>
+            <a:ext uri="{909E8E84-426E-40DD-AFC4-6F175D3DCCD1}">
+              <a14:hiddenFill xmlns:a14="http://schemas.microsoft.com/office/drawing/2010/main">
+                <a:solidFill>
+                  <a:srgbClr val="FFFFFF"/>
+                </a:solidFill>
+              </a14:hiddenFill>
+            </a:ext>
+          </a:extLst>
+        </p:spPr>
+      </p:pic>
+      <p:pic>
+        <p:nvPicPr>
+          <p:cNvPr id="5" name="Picture 2" descr="Data Science Virtual Machines | Microsoft Azure">
+            <a:extLst>
+              <a:ext uri="{FF2B5EF4-FFF2-40B4-BE49-F238E27FC236}">
+                <a16:creationId xmlns:a16="http://schemas.microsoft.com/office/drawing/2014/main" id="{78481CD9-B520-6F47-B308-365C7B786D96}"/>
+              </a:ext>
+            </a:extLst>
+          </p:cNvPr>
+          <p:cNvPicPr>
+            <a:picLocks noChangeAspect="1" noChangeArrowheads="1"/>
+          </p:cNvPicPr>
+          <p:nvPr/>
+        </p:nvPicPr>
+        <p:blipFill rotWithShape="1">
+          <a:blip r:embed="rId11" cstate="email">
+            <a:extLst>
+              <a:ext uri="{28A0092B-C50C-407E-A947-70E740481C1C}">
+                <a14:useLocalDpi xmlns:a14="http://schemas.microsoft.com/office/drawing/2010/main"/>
+              </a:ext>
+            </a:extLst>
+          </a:blip>
+          <a:srcRect/>
+          <a:stretch/>
+        </p:blipFill>
+        <p:spPr bwMode="auto">
+          <a:xfrm>
+            <a:off x="1502157" y="3734152"/>
+            <a:ext cx="634245" cy="570169"/>
+          </a:xfrm>
+          <a:prstGeom prst="rect">
+            <a:avLst/>
+          </a:prstGeom>
+          <a:noFill/>
+          <a:extLst>
+            <a:ext uri="{909E8E84-426E-40DD-AFC4-6F175D3DCCD1}">
+              <a14:hiddenFill xmlns:a14="http://schemas.microsoft.com/office/drawing/2010/main">
+                <a:solidFill>
+                  <a:srgbClr val="FFFFFF"/>
+                </a:solidFill>
+              </a14:hiddenFill>
+            </a:ext>
+          </a:extLst>
+        </p:spPr>
+      </p:pic>
+      <p:pic>
+        <p:nvPicPr>
+          <p:cNvPr id="6" name="Picture 4" descr="ArcGIS-Enterprise-product-icon | Blue Raster">
+            <a:extLst>
+              <a:ext uri="{FF2B5EF4-FFF2-40B4-BE49-F238E27FC236}">
+                <a16:creationId xmlns:a16="http://schemas.microsoft.com/office/drawing/2014/main" id="{7FD7FCB9-07C9-5C46-BF08-C640DD8059E0}"/>
+              </a:ext>
+            </a:extLst>
+          </p:cNvPr>
+          <p:cNvPicPr>
+            <a:picLocks noChangeAspect="1" noChangeArrowheads="1"/>
+          </p:cNvPicPr>
+          <p:nvPr/>
+        </p:nvPicPr>
+        <p:blipFill>
+          <a:blip r:embed="rId12" cstate="email">
+            <a:extLst>
+              <a:ext uri="{28A0092B-C50C-407E-A947-70E740481C1C}">
+                <a14:useLocalDpi xmlns:a14="http://schemas.microsoft.com/office/drawing/2010/main"/>
+              </a:ext>
+            </a:extLst>
+          </a:blip>
+          <a:srcRect/>
+          <a:stretch>
+            <a:fillRect/>
+          </a:stretch>
+        </p:blipFill>
+        <p:spPr bwMode="auto">
+          <a:xfrm>
+            <a:off x="1390136" y="4353089"/>
+            <a:ext cx="729488" cy="729488"/>
+          </a:xfrm>
+          <a:prstGeom prst="rect">
+            <a:avLst/>
+          </a:prstGeom>
+          <a:noFill/>
+          <a:extLst>
+            <a:ext uri="{909E8E84-426E-40DD-AFC4-6F175D3DCCD1}">
+              <a14:hiddenFill xmlns:a14="http://schemas.microsoft.com/office/drawing/2010/main">
+                <a:solidFill>
+                  <a:srgbClr val="FFFFFF"/>
+                </a:solidFill>
+              </a14:hiddenFill>
+            </a:ext>
+          </a:extLst>
+        </p:spPr>
+      </p:pic>
+      <p:pic>
+        <p:nvPicPr>
+          <p:cNvPr id="7" name="Picture 6" descr="rmsource.com &gt; Microsoft Azure">
+            <a:extLst>
+              <a:ext uri="{FF2B5EF4-FFF2-40B4-BE49-F238E27FC236}">
+                <a16:creationId xmlns:a16="http://schemas.microsoft.com/office/drawing/2014/main" id="{C93EA0F0-DEDD-9B4F-8454-26ECAB971B4E}"/>
+              </a:ext>
+            </a:extLst>
+          </p:cNvPr>
+          <p:cNvPicPr>
+            <a:picLocks noChangeAspect="1" noChangeArrowheads="1"/>
+          </p:cNvPicPr>
+          <p:nvPr/>
+        </p:nvPicPr>
+        <p:blipFill>
+          <a:blip r:embed="rId13" cstate="email">
+            <a:extLst>
+              <a:ext uri="{28A0092B-C50C-407E-A947-70E740481C1C}">
+                <a14:useLocalDpi xmlns:a14="http://schemas.microsoft.com/office/drawing/2010/main"/>
+              </a:ext>
+            </a:extLst>
+          </a:blip>
+          <a:srcRect/>
+          <a:stretch>
+            <a:fillRect/>
+          </a:stretch>
+        </p:blipFill>
+        <p:spPr bwMode="auto">
+          <a:xfrm>
+            <a:off x="1317730" y="5270344"/>
+            <a:ext cx="934199" cy="488598"/>
+          </a:xfrm>
+          <a:prstGeom prst="rect">
+            <a:avLst/>
+          </a:prstGeom>
+          <a:noFill/>
+          <a:extLst>
+            <a:ext uri="{909E8E84-426E-40DD-AFC4-6F175D3DCCD1}">
+              <a14:hiddenFill xmlns:a14="http://schemas.microsoft.com/office/drawing/2010/main">
+                <a:solidFill>
+                  <a:srgbClr val="FFFFFF"/>
+                </a:solidFill>
+              </a14:hiddenFill>
+            </a:ext>
+          </a:extLst>
+        </p:spPr>
+      </p:pic>
+    </p:spTree>
+    <p:extLst>
+      <p:ext uri="{BB962C8B-B14F-4D97-AF65-F5344CB8AC3E}">
+        <p14:creationId xmlns:p14="http://schemas.microsoft.com/office/powerpoint/2010/main" val="3217883563"/>
+      </p:ext>
+    </p:extLst>
+  </p:cSld>
+  <p:clrMapOvr>
+    <a:masterClrMapping/>
+  </p:clrMapOvr>
+</p:sld>
+</file>
+
+<file path=ppt/slides/slide8.xml><?xml version="1.0" encoding="utf-8"?>
+<p:sld xmlns:a="http://schemas.openxmlformats.org/drawingml/2006/main" xmlns:r="http://schemas.openxmlformats.org/officeDocument/2006/relationships" xmlns:p="http://schemas.openxmlformats.org/presentationml/2006/main">
+  <p:cSld>
+    <p:spTree>
+      <p:nvGrpSpPr>
+        <p:cNvPr id="1" name=""/>
+        <p:cNvGrpSpPr/>
+        <p:nvPr/>
+      </p:nvGrpSpPr>
+      <p:grpSpPr>
+        <a:xfrm>
+          <a:off x="0" y="0"/>
+          <a:ext cx="0" cy="0"/>
+          <a:chOff x="0" y="0"/>
+          <a:chExt cx="0" cy="0"/>
+        </a:xfrm>
+      </p:grpSpPr>
+      <p:sp>
+        <p:nvSpPr>
+          <p:cNvPr id="4" name="TextBox 3">
+            <a:extLst>
+              <a:ext uri="{FF2B5EF4-FFF2-40B4-BE49-F238E27FC236}">
+                <a16:creationId xmlns:a16="http://schemas.microsoft.com/office/drawing/2014/main" id="{19F9DD96-D508-154F-8B1F-D0C67CD08442}"/>
+              </a:ext>
+            </a:extLst>
+          </p:cNvPr>
+          <p:cNvSpPr txBox="1"/>
+          <p:nvPr/>
+        </p:nvSpPr>
+        <p:spPr>
+          <a:xfrm>
+            <a:off x="1487424" y="508657"/>
+            <a:ext cx="10491664" cy="5632311"/>
+          </a:xfrm>
+          <a:prstGeom prst="rect">
+            <a:avLst/>
+          </a:prstGeom>
+          <a:noFill/>
+        </p:spPr>
+        <p:txBody>
+          <a:bodyPr wrap="square" rtlCol="0">
+            <a:spAutoFit/>
+          </a:bodyPr>
+          <a:lstStyle/>
+          <a:p>
+            <a:endParaRPr lang="en-US" sz="1200" dirty="0"/>
+          </a:p>
+          <a:p>
+            <a:pPr marL="285750" indent="-285750">
+              <a:buFont typeface="Arial" panose="020B0604020202020204" pitchFamily="34" charset="0"/>
+              <a:buChar char="•"/>
+            </a:pPr>
+            <a:r>
+              <a:rPr lang="en-US" sz="1200" dirty="0"/>
+              <a:t>python, </a:t>
+            </a:r>
+            <a:r>
+              <a:rPr lang="en-US" sz="1200" dirty="0" err="1"/>
+              <a:t>numpy</a:t>
+            </a:r>
+            <a:r>
+              <a:rPr lang="en-US" sz="1200" dirty="0"/>
+              <a:t>, pandas</a:t>
+            </a:r>
+          </a:p>
+          <a:p>
+            <a:pPr marL="285750" indent="-285750">
+              <a:buFont typeface="Arial" panose="020B0604020202020204" pitchFamily="34" charset="0"/>
+              <a:buChar char="•"/>
+            </a:pPr>
+            <a:r>
+              <a:rPr lang="en-US" sz="1200" b="1" dirty="0" err="1">
+                <a:solidFill>
+                  <a:srgbClr val="FF0000"/>
+                </a:solidFill>
+              </a:rPr>
+              <a:t>GeoPandas</a:t>
+            </a:r>
+            <a:r>
+              <a:rPr lang="en-US" sz="1200" dirty="0"/>
+              <a:t> - </a:t>
+            </a:r>
+            <a:r>
+              <a:rPr lang="en-US" sz="1200" dirty="0">
+                <a:hlinkClick r:id="rId2"/>
+              </a:rPr>
+              <a:t>https://geopandas.org/</a:t>
+            </a:r>
+            <a:r>
+              <a:rPr lang="en-US" sz="1200" dirty="0"/>
+              <a:t>  - open source,  adds datatypes to allow spatial operations on geometric types (using shapely). </a:t>
+            </a:r>
+          </a:p>
+          <a:p>
+            <a:pPr marL="285750" indent="-285750">
+              <a:buFont typeface="Arial" panose="020B0604020202020204" pitchFamily="34" charset="0"/>
+              <a:buChar char="•"/>
+            </a:pPr>
+            <a:r>
+              <a:rPr lang="en-US" sz="1200" dirty="0"/>
+              <a:t>Shapely - </a:t>
+            </a:r>
+            <a:r>
+              <a:rPr lang="en-US" sz="1200" dirty="0">
+                <a:hlinkClick r:id="rId3"/>
+              </a:rPr>
+              <a:t>https://shapely.readthedocs.io/en/stable/</a:t>
+            </a:r>
+            <a:r>
+              <a:rPr lang="en-US" sz="1200" dirty="0"/>
+              <a:t> - manipulation and analysis of planar geometric objects</a:t>
+            </a:r>
+          </a:p>
+          <a:p>
+            <a:pPr marL="285750" indent="-285750">
+              <a:buFont typeface="Arial" panose="020B0604020202020204" pitchFamily="34" charset="0"/>
+              <a:buChar char="•"/>
+            </a:pPr>
+            <a:r>
+              <a:rPr lang="en-US" sz="1200" dirty="0"/>
+              <a:t>Fiona – </a:t>
+            </a:r>
+            <a:r>
+              <a:rPr lang="en-US" sz="1200" dirty="0">
+                <a:hlinkClick r:id="rId4"/>
+              </a:rPr>
+              <a:t>https://fiona.readthedocs.io/en/latest/</a:t>
+            </a:r>
+            <a:r>
+              <a:rPr lang="en-US" sz="1200" dirty="0"/>
+              <a:t> - read/write geo-data, modules to use </a:t>
+            </a:r>
+            <a:r>
+              <a:rPr lang="en-US" sz="1200" b="1" dirty="0">
+                <a:solidFill>
+                  <a:srgbClr val="0070C0"/>
+                </a:solidFill>
+              </a:rPr>
+              <a:t>GDAL</a:t>
+            </a:r>
+            <a:r>
+              <a:rPr lang="en-US" sz="1200" dirty="0"/>
+              <a:t> (Geospatial Data Abstraction Library).</a:t>
+            </a:r>
+          </a:p>
+          <a:p>
+            <a:pPr marL="285750" indent="-285750">
+              <a:buFont typeface="Arial" panose="020B0604020202020204" pitchFamily="34" charset="0"/>
+              <a:buChar char="•"/>
+            </a:pPr>
+            <a:r>
+              <a:rPr lang="en-US" sz="1200" dirty="0" err="1"/>
+              <a:t>descartes</a:t>
+            </a:r>
+            <a:r>
+              <a:rPr lang="en-US" sz="1200" dirty="0"/>
+              <a:t> – </a:t>
+            </a:r>
+            <a:r>
+              <a:rPr lang="en-US" sz="1200" dirty="0">
+                <a:hlinkClick r:id="rId5"/>
+              </a:rPr>
+              <a:t>https://pypi.org/project/descartes/</a:t>
+            </a:r>
+            <a:r>
+              <a:rPr lang="en-US" sz="1200" dirty="0"/>
+              <a:t> - Use Shapely or </a:t>
+            </a:r>
+            <a:r>
+              <a:rPr lang="en-US" sz="1200" dirty="0" err="1"/>
+              <a:t>GeoJSON</a:t>
+            </a:r>
+            <a:r>
+              <a:rPr lang="en-US" sz="1200" dirty="0"/>
+              <a:t>-like geometric objects as matplotlib paths and patches</a:t>
+            </a:r>
+          </a:p>
+          <a:p>
+            <a:pPr marL="285750" indent="-285750">
+              <a:buFont typeface="Arial" panose="020B0604020202020204" pitchFamily="34" charset="0"/>
+              <a:buChar char="•"/>
+            </a:pPr>
+            <a:r>
+              <a:rPr lang="en-US" sz="1200" dirty="0"/>
+              <a:t>matplotlib - </a:t>
+            </a:r>
+            <a:r>
+              <a:rPr lang="en-US" sz="1200" dirty="0">
+                <a:hlinkClick r:id="rId6"/>
+              </a:rPr>
+              <a:t>https://matplotlib.org/</a:t>
+            </a:r>
+            <a:r>
+              <a:rPr lang="en-US" sz="1200" dirty="0"/>
+              <a:t> - plotting</a:t>
+            </a:r>
+          </a:p>
+          <a:p>
+            <a:pPr marL="285750" indent="-285750">
+              <a:buFont typeface="Arial" panose="020B0604020202020204" pitchFamily="34" charset="0"/>
+              <a:buChar char="•"/>
+            </a:pPr>
+            <a:r>
+              <a:rPr lang="en-US" sz="1200" dirty="0" err="1"/>
+              <a:t>geoplot</a:t>
+            </a:r>
+            <a:r>
+              <a:rPr lang="en-US" sz="1200" dirty="0"/>
+              <a:t> - </a:t>
+            </a:r>
+            <a:r>
+              <a:rPr lang="en-US" sz="1200" dirty="0">
+                <a:hlinkClick r:id="rId7"/>
+              </a:rPr>
+              <a:t>https://residentmario.github.io/geoplot/index.html</a:t>
+            </a:r>
+            <a:r>
+              <a:rPr lang="en-US" sz="1200" dirty="0"/>
+              <a:t> - high-level Python geospatial plotting library</a:t>
+            </a:r>
+          </a:p>
+          <a:p>
+            <a:pPr marL="285750" indent="-285750">
+              <a:buFont typeface="Arial" panose="020B0604020202020204" pitchFamily="34" charset="0"/>
+              <a:buChar char="•"/>
+            </a:pPr>
+            <a:r>
+              <a:rPr lang="en-US" sz="1200" dirty="0" err="1"/>
+              <a:t>scikit</a:t>
+            </a:r>
+            <a:r>
+              <a:rPr lang="en-US" sz="1200" dirty="0"/>
+              <a:t>-learn - </a:t>
+            </a:r>
+            <a:r>
+              <a:rPr lang="en-US" sz="1200" dirty="0">
+                <a:hlinkClick r:id="rId8"/>
+              </a:rPr>
+              <a:t>https://scikit-learn.org</a:t>
+            </a:r>
+            <a:r>
+              <a:rPr lang="en-US" sz="1200" dirty="0"/>
+              <a:t> – very popular open-source Python library for Machine Learning</a:t>
+            </a:r>
+          </a:p>
+          <a:p>
+            <a:pPr marL="285750" indent="-285750">
+              <a:buFont typeface="Arial" panose="020B0604020202020204" pitchFamily="34" charset="0"/>
+              <a:buChar char="•"/>
+            </a:pPr>
+            <a:r>
+              <a:rPr lang="en-US" sz="1200" dirty="0"/>
+              <a:t>SciPy - </a:t>
+            </a:r>
+            <a:r>
+              <a:rPr lang="en-US" sz="1200" dirty="0">
+                <a:hlinkClick r:id="rId9"/>
+              </a:rPr>
+              <a:t>https://www.scipy.org/</a:t>
+            </a:r>
+            <a:r>
+              <a:rPr lang="en-US" sz="1200" dirty="0"/>
+              <a:t> - open-source Python library for math, science, and engineering</a:t>
+            </a:r>
+          </a:p>
+          <a:p>
+            <a:pPr marL="285750" indent="-285750">
+              <a:buFont typeface="Arial" panose="020B0604020202020204" pitchFamily="34" charset="0"/>
+              <a:buChar char="•"/>
+            </a:pPr>
+            <a:r>
+              <a:rPr lang="en-US" sz="1200" dirty="0" err="1"/>
+              <a:t>RTree</a:t>
+            </a:r>
+            <a:r>
+              <a:rPr lang="en-US" sz="1200" dirty="0"/>
+              <a:t> - </a:t>
+            </a:r>
+            <a:r>
+              <a:rPr lang="en-US" sz="1200" dirty="0">
+                <a:hlinkClick r:id="rId10"/>
+              </a:rPr>
+              <a:t>https://toblerity.org/rtree/</a:t>
+            </a:r>
+            <a:r>
+              <a:rPr lang="en-US" sz="1200" dirty="0"/>
+              <a:t> - a </a:t>
+            </a:r>
+            <a:r>
+              <a:rPr lang="en-US" sz="1200" dirty="0" err="1"/>
+              <a:t>ctypes</a:t>
+            </a:r>
+            <a:r>
+              <a:rPr lang="en-US" sz="1200" dirty="0"/>
+              <a:t> Python wrapper of </a:t>
+            </a:r>
+            <a:r>
+              <a:rPr lang="en-US" sz="1200" dirty="0" err="1"/>
+              <a:t>libspatialindex</a:t>
+            </a:r>
+            <a:r>
+              <a:rPr lang="en-US" sz="1200" dirty="0"/>
+              <a:t> for advanced spatial indexing features</a:t>
+            </a:r>
+          </a:p>
+          <a:p>
+            <a:pPr marL="285750" indent="-285750">
+              <a:buFont typeface="Arial" panose="020B0604020202020204" pitchFamily="34" charset="0"/>
+              <a:buChar char="•"/>
+            </a:pPr>
+            <a:r>
+              <a:rPr lang="en-US" sz="1200" dirty="0"/>
+              <a:t>GDAL - </a:t>
+            </a:r>
+            <a:r>
+              <a:rPr lang="en-US" sz="1200" dirty="0">
+                <a:hlinkClick r:id="rId11"/>
+              </a:rPr>
+              <a:t>https://gdal.org/</a:t>
+            </a:r>
+            <a:r>
+              <a:rPr lang="en-US" sz="1200" dirty="0"/>
+              <a:t> - translator library for raster and vector geospatial data formats</a:t>
+            </a:r>
+          </a:p>
+          <a:p>
+            <a:pPr marL="285750" indent="-285750">
+              <a:buFont typeface="Arial" panose="020B0604020202020204" pitchFamily="34" charset="0"/>
+              <a:buChar char="•"/>
+            </a:pPr>
+            <a:r>
+              <a:rPr lang="en-US" sz="1200" dirty="0" err="1"/>
+              <a:t>PySAL</a:t>
+            </a:r>
+            <a:r>
+              <a:rPr lang="en-US" sz="1200" dirty="0"/>
+              <a:t> - </a:t>
+            </a:r>
+            <a:r>
+              <a:rPr lang="en-US" sz="1200" dirty="0">
+                <a:hlinkClick r:id="rId12"/>
+              </a:rPr>
+              <a:t>https://pysal.org/</a:t>
+            </a:r>
+            <a:r>
+              <a:rPr lang="en-US" sz="1200" dirty="0"/>
+              <a:t> - Python Spatial Analysis Library</a:t>
+            </a:r>
+          </a:p>
+          <a:p>
+            <a:pPr marL="285750" indent="-285750">
+              <a:buFont typeface="Arial" panose="020B0604020202020204" pitchFamily="34" charset="0"/>
+              <a:buChar char="•"/>
+            </a:pPr>
+            <a:r>
+              <a:rPr lang="en-US" sz="1200" dirty="0" err="1"/>
+              <a:t>Missingno</a:t>
+            </a:r>
+            <a:r>
+              <a:rPr lang="en-US" sz="1200" dirty="0"/>
+              <a:t> - </a:t>
+            </a:r>
+            <a:r>
+              <a:rPr lang="en-US" sz="1200" dirty="0">
+                <a:hlinkClick r:id="rId13"/>
+              </a:rPr>
+              <a:t>https://github.com/ResidentMario/missingno</a:t>
+            </a:r>
+            <a:r>
+              <a:rPr lang="en-US" sz="1200" dirty="0"/>
+              <a:t> - missing data visualization module for Python</a:t>
+            </a:r>
+          </a:p>
+          <a:p>
+            <a:pPr marL="285750" indent="-285750">
+              <a:buFont typeface="Arial" panose="020B0604020202020204" pitchFamily="34" charset="0"/>
+              <a:buChar char="•"/>
+            </a:pPr>
+            <a:r>
+              <a:rPr lang="en-US" sz="1200" dirty="0"/>
+              <a:t>GEOJSON - </a:t>
+            </a:r>
+            <a:r>
+              <a:rPr lang="en-US" sz="1200" dirty="0">
+                <a:hlinkClick r:id="rId14"/>
+              </a:rPr>
+              <a:t>https://geojson.org/</a:t>
+            </a:r>
+            <a:r>
+              <a:rPr lang="en-US" sz="1200" dirty="0"/>
+              <a:t> , </a:t>
+            </a:r>
+            <a:r>
+              <a:rPr lang="en-US" sz="1200" dirty="0">
+                <a:hlinkClick r:id="rId15"/>
+              </a:rPr>
+              <a:t>https://tools.ietf.org/html/rfc7946</a:t>
+            </a:r>
+            <a:r>
+              <a:rPr lang="en-US" sz="1200" dirty="0"/>
+              <a:t> - open standard format (JSON) for representing simple geographical features and their non-spatial attributes. The features include points, line strings, polygons, and multi-part collections of these types.</a:t>
+            </a:r>
+          </a:p>
+          <a:p>
+            <a:pPr marL="285750" indent="-285750">
+              <a:buFont typeface="Arial" panose="020B0604020202020204" pitchFamily="34" charset="0"/>
+              <a:buChar char="•"/>
+            </a:pPr>
+            <a:r>
+              <a:rPr lang="en-US" sz="1200" dirty="0" err="1"/>
+              <a:t>geojson.io</a:t>
+            </a:r>
+            <a:r>
+              <a:rPr lang="en-US" sz="1200" dirty="0"/>
+              <a:t> - </a:t>
+            </a:r>
+            <a:r>
+              <a:rPr lang="en-US" sz="1200" dirty="0">
+                <a:hlinkClick r:id="rId16"/>
+              </a:rPr>
+              <a:t>http://geojson.io/</a:t>
+            </a:r>
+            <a:r>
+              <a:rPr lang="en-US" sz="1200" dirty="0"/>
+              <a:t> - a quick, simple tool for creating, viewing, and sharing maps. Supports </a:t>
+            </a:r>
+            <a:r>
+              <a:rPr lang="en-US" sz="1200" dirty="0" err="1"/>
+              <a:t>GeoJSON</a:t>
+            </a:r>
+            <a:r>
+              <a:rPr lang="en-US" sz="1200" dirty="0"/>
+              <a:t>, also accepts KML, GPX, CSV, GTFS, </a:t>
+            </a:r>
+            <a:r>
+              <a:rPr lang="en-US" sz="1200" dirty="0" err="1"/>
+              <a:t>TopoJSON</a:t>
+            </a:r>
+            <a:r>
+              <a:rPr lang="en-US" sz="1200" dirty="0"/>
+              <a:t>, and other formats.</a:t>
+            </a:r>
+          </a:p>
+          <a:p>
+            <a:pPr marL="285750" indent="-285750">
+              <a:buFont typeface="Arial" panose="020B0604020202020204" pitchFamily="34" charset="0"/>
+              <a:buChar char="•"/>
+            </a:pPr>
+            <a:r>
+              <a:rPr lang="en-US" sz="1200" dirty="0" err="1"/>
+              <a:t>PostGIS</a:t>
+            </a:r>
+            <a:r>
+              <a:rPr lang="en-US" sz="1200" dirty="0"/>
+              <a:t> - </a:t>
+            </a:r>
+            <a:r>
+              <a:rPr lang="en-US" sz="1200" dirty="0">
+                <a:hlinkClick r:id="rId17"/>
+              </a:rPr>
+              <a:t>https://postgis.net/</a:t>
+            </a:r>
+            <a:r>
+              <a:rPr lang="en-US" sz="1200" dirty="0"/>
+              <a:t> - open source software (extension) which adds support for geographic objects to the PostgreSQL database.</a:t>
+            </a:r>
+          </a:p>
+          <a:p>
+            <a:pPr marL="285750" indent="-285750">
+              <a:buFont typeface="Arial" panose="020B0604020202020204" pitchFamily="34" charset="0"/>
+              <a:buChar char="•"/>
+            </a:pPr>
+            <a:r>
+              <a:rPr lang="en-US" sz="1200" dirty="0" err="1"/>
+              <a:t>Sequelize</a:t>
+            </a:r>
+            <a:r>
+              <a:rPr lang="en-US" sz="1200" dirty="0"/>
+              <a:t> - </a:t>
+            </a:r>
+            <a:r>
+              <a:rPr lang="en-US" sz="1200" dirty="0">
+                <a:hlinkClick r:id="rId18"/>
+              </a:rPr>
+              <a:t>https://sequelize.org/</a:t>
+            </a:r>
+            <a:r>
+              <a:rPr lang="en-US" sz="1200" dirty="0"/>
+              <a:t> - a promise-based Node.js ORM for Postgres, MySQL, MariaDB, SQLite and Microsoft SQL Server.</a:t>
+            </a:r>
+          </a:p>
+          <a:p>
+            <a:pPr marL="285750" indent="-285750">
+              <a:buFont typeface="Arial" panose="020B0604020202020204" pitchFamily="34" charset="0"/>
+              <a:buChar char="•"/>
+            </a:pPr>
+            <a:endParaRPr lang="en-US" sz="1200" dirty="0"/>
+          </a:p>
+          <a:p>
+            <a:pPr marL="285750" indent="-285750">
+              <a:buFont typeface="Arial" panose="020B0604020202020204" pitchFamily="34" charset="0"/>
+              <a:buChar char="•"/>
+            </a:pPr>
+            <a:r>
+              <a:rPr lang="en-US" sz="1200" dirty="0"/>
+              <a:t>deep learning</a:t>
+            </a:r>
+          </a:p>
+          <a:p>
+            <a:pPr marL="285750" indent="-285750">
+              <a:buFont typeface="Arial" panose="020B0604020202020204" pitchFamily="34" charset="0"/>
+              <a:buChar char="•"/>
+            </a:pPr>
+            <a:r>
+              <a:rPr lang="en-US" sz="1200" dirty="0"/>
+              <a:t>spatial clustering, temporal clustering, predictions</a:t>
+            </a:r>
+          </a:p>
+          <a:p>
+            <a:pPr marL="285750" indent="-285750">
+              <a:buFont typeface="Arial" panose="020B0604020202020204" pitchFamily="34" charset="0"/>
+              <a:buChar char="•"/>
+            </a:pPr>
+            <a:r>
+              <a:rPr lang="en-US" sz="1200" dirty="0"/>
+              <a:t>optimization problems (shortest path, etc.)</a:t>
+            </a:r>
+          </a:p>
+          <a:p>
+            <a:pPr marL="285750" indent="-285750">
+              <a:buFont typeface="Arial" panose="020B0604020202020204" pitchFamily="34" charset="0"/>
+              <a:buChar char="•"/>
+            </a:pPr>
+            <a:endParaRPr lang="en-US" sz="1200" dirty="0"/>
+          </a:p>
+          <a:p>
+            <a:pPr marL="285750" indent="-285750">
+              <a:buFont typeface="Arial" panose="020B0604020202020204" pitchFamily="34" charset="0"/>
+              <a:buChar char="•"/>
+            </a:pPr>
+            <a:r>
+              <a:rPr lang="en-US" sz="1200" dirty="0"/>
+              <a:t>Problem - combining different data sources, converting to the same spatial support format.</a:t>
+            </a:r>
+          </a:p>
+          <a:p>
+            <a:pPr marL="285750" indent="-285750">
+              <a:buFont typeface="Arial" panose="020B0604020202020204" pitchFamily="34" charset="0"/>
+              <a:buChar char="•"/>
+            </a:pPr>
+            <a:endParaRPr lang="en-US" sz="1200" dirty="0"/>
+          </a:p>
+          <a:p>
+            <a:pPr marL="285750" indent="-285750">
+              <a:buFont typeface="Arial" panose="020B0604020202020204" pitchFamily="34" charset="0"/>
+              <a:buChar char="•"/>
+            </a:pPr>
+            <a:r>
+              <a:rPr lang="en-US" sz="1200" b="1" dirty="0" err="1">
+                <a:solidFill>
+                  <a:srgbClr val="FF0000"/>
+                </a:solidFill>
+              </a:rPr>
+              <a:t>Gogle</a:t>
+            </a:r>
+            <a:r>
+              <a:rPr lang="en-US" sz="1200" b="1" dirty="0">
+                <a:solidFill>
+                  <a:srgbClr val="FF0000"/>
+                </a:solidFill>
+              </a:rPr>
+              <a:t> Earth Engine</a:t>
+            </a:r>
+            <a:r>
+              <a:rPr lang="en-US" sz="1200" dirty="0"/>
+              <a:t> - </a:t>
+            </a:r>
+            <a:r>
+              <a:rPr lang="en-US" sz="1200" dirty="0">
+                <a:hlinkClick r:id="rId19"/>
+              </a:rPr>
+              <a:t>https://earthengine.google.com/</a:t>
+            </a:r>
+            <a:r>
+              <a:rPr lang="en-US" sz="1200" dirty="0"/>
+              <a:t> - multi-petabyte catalog of satellite imagery and geospatial datasets with planetary-scale analysis capabilities and makes it available for scientists, researchers, and developers to detect changes, map trends, and quantify differences on the Earth's surface</a:t>
+            </a:r>
+          </a:p>
+        </p:txBody>
+      </p:sp>
+      <p:sp>
+        <p:nvSpPr>
+          <p:cNvPr id="2" name="TextBox 1">
+            <a:extLst>
+              <a:ext uri="{FF2B5EF4-FFF2-40B4-BE49-F238E27FC236}">
+                <a16:creationId xmlns:a16="http://schemas.microsoft.com/office/drawing/2014/main" id="{BD26B074-D08E-C141-8489-AEED27AED44C}"/>
+              </a:ext>
+            </a:extLst>
+          </p:cNvPr>
+          <p:cNvSpPr txBox="1"/>
+          <p:nvPr/>
+        </p:nvSpPr>
+        <p:spPr>
+          <a:xfrm>
+            <a:off x="158496" y="0"/>
+            <a:ext cx="1438656" cy="523220"/>
+          </a:xfrm>
+          <a:prstGeom prst="rect">
+            <a:avLst/>
+          </a:prstGeom>
+          <a:noFill/>
+        </p:spPr>
+        <p:txBody>
+          <a:bodyPr wrap="square" rtlCol="0">
+            <a:spAutoFit/>
+          </a:bodyPr>
+          <a:lstStyle/>
+          <a:p>
+            <a:r>
+              <a:rPr lang="en-US" sz="2800" b="1" dirty="0"/>
+              <a:t>Tools</a:t>
+            </a:r>
+          </a:p>
+        </p:txBody>
+      </p:sp>
+    </p:spTree>
+    <p:extLst>
+      <p:ext uri="{BB962C8B-B14F-4D97-AF65-F5344CB8AC3E}">
+        <p14:creationId xmlns:p14="http://schemas.microsoft.com/office/powerpoint/2010/main" val="1223983498"/>
+      </p:ext>
+    </p:extLst>
+  </p:cSld>
+  <p:clrMapOvr>
+    <a:masterClrMapping/>
+  </p:clrMapOvr>
+</p:sld>
+</file>
+
+<file path=ppt/slides/slide9.xml><?xml version="1.0" encoding="utf-8"?>
 <p:sld xmlns:a="http://schemas.openxmlformats.org/drawingml/2006/main" xmlns:r="http://schemas.openxmlformats.org/officeDocument/2006/relationships" xmlns:p="http://schemas.openxmlformats.org/presentationml/2006/main">
   <p:cSld>
     <p:spTree>
@@ -17304,8 +20900,8 @@
         </p:nvSpPr>
         <p:spPr>
           <a:xfrm>
-            <a:off x="161365" y="0"/>
-            <a:ext cx="11201400" cy="2462213"/>
+            <a:off x="0" y="611238"/>
+            <a:ext cx="9290304" cy="2492990"/>
           </a:xfrm>
           <a:prstGeom prst="rect">
             <a:avLst/>
@@ -17318,32 +20914,29 @@
           </a:bodyPr>
           <a:lstStyle/>
           <a:p>
-            <a:r>
-              <a:rPr lang="en-US" dirty="0" err="1"/>
-              <a:t>Misc</a:t>
-            </a:r>
-            <a:r>
-              <a:rPr lang="en-US" dirty="0"/>
-              <a:t> links</a:t>
-            </a:r>
-          </a:p>
-          <a:p>
             <a:pPr marL="285750" indent="-285750">
               <a:buFont typeface="Arial" panose="020B0604020202020204" pitchFamily="34" charset="0"/>
               <a:buChar char="•"/>
             </a:pPr>
             <a:r>
-              <a:rPr lang="en-US" dirty="0"/>
-              <a:t>Tutorial - Introduction to Geospatial Data in Python - </a:t>
-            </a:r>
-            <a:r>
-              <a:rPr lang="en-US" dirty="0">
+              <a:rPr lang="en-US" sz="1200" dirty="0"/>
+              <a:t>Tutorial - Introduction to Geospatial Data in Python </a:t>
+            </a:r>
+            <a:br>
+              <a:rPr lang="en-US" sz="1200" dirty="0"/>
+            </a:br>
+            <a:r>
+              <a:rPr lang="en-US" sz="1200" dirty="0"/>
+              <a:t>- </a:t>
+            </a:r>
+            <a:r>
+              <a:rPr lang="en-US" sz="1200" dirty="0">
                 <a:hlinkClick r:id="rId3"/>
               </a:rPr>
               <a:t>https://www.datacamp.com/community/tutorials/geospatial-data-python</a:t>
             </a:r>
             <a:r>
-              <a:rPr lang="en-US" dirty="0"/>
+              <a:rPr lang="en-US" sz="1200" dirty="0"/>
               <a:t> </a:t>
             </a:r>
           </a:p>
@@ -17353,21 +20946,28 @@
               <a:buChar char="•"/>
             </a:pPr>
             <a:r>
-              <a:rPr lang="en-US" dirty="0" err="1"/>
+              <a:rPr lang="en-US" sz="1200" dirty="0" err="1"/>
               <a:t>Eath</a:t>
             </a:r>
             <a:r>
-              <a:rPr lang="en-US" dirty="0"/>
-              <a:t> Data Analytics Online Certificate - </a:t>
-            </a:r>
-            <a:r>
-              <a:rPr lang="en-US" dirty="0">
+              <a:rPr lang="en-US" sz="1200" dirty="0"/>
+              <a:t> Data Analytics Online Certificate </a:t>
+            </a:r>
+            <a:br>
+              <a:rPr lang="en-US" sz="1200" dirty="0"/>
+            </a:br>
+            <a:r>
+              <a:rPr lang="en-US" sz="1200" dirty="0"/>
+              <a:t>- </a:t>
+            </a:r>
+            <a:r>
+              <a:rPr lang="en-US" sz="1200" dirty="0">
                 <a:hlinkClick r:id="rId4"/>
               </a:rPr>
               <a:t>https://www.earthdatascience.org/courses/use-data-open-source-python/intro-vector-data-python/spatial-data-vector-shapefiles/</a:t>
             </a:r>
             <a:r>
-              <a:rPr lang="en-US" dirty="0"/>
+              <a:rPr lang="en-US" sz="1200" dirty="0"/>
               <a:t> </a:t>
             </a:r>
           </a:p>
@@ -17377,17 +20977,24 @@
               <a:buChar char="•"/>
             </a:pPr>
             <a:r>
-              <a:rPr lang="en-US" dirty="0"/>
-              <a:t>python-geospatial – a collection of Python packages for geospatial analysis with binder-ready notebook examples - </a:t>
-            </a:r>
-            <a:r>
-              <a:rPr lang="en-US" dirty="0">
+              <a:rPr lang="en-US" sz="1200" dirty="0"/>
+              <a:t>python-geospatial – a collection of Python packages for geospatial analysis with binder-ready notebook examples </a:t>
+            </a:r>
+            <a:br>
+              <a:rPr lang="en-US" sz="1200" dirty="0"/>
+            </a:br>
+            <a:r>
+              <a:rPr lang="en-US" sz="1200" dirty="0"/>
+              <a:t>- </a:t>
+            </a:r>
+            <a:r>
+              <a:rPr lang="en-US" sz="1200" dirty="0">
                 <a:hlinkClick r:id="rId5"/>
               </a:rPr>
               <a:t>https://github.com/giswqs/python-geospatial</a:t>
             </a:r>
             <a:r>
-              <a:rPr lang="en-US" dirty="0"/>
+              <a:rPr lang="en-US" sz="1200" dirty="0"/>
               <a:t> </a:t>
             </a:r>
           </a:p>
@@ -17397,17 +21004,24 @@
               <a:buChar char="•"/>
             </a:pPr>
             <a:r>
-              <a:rPr lang="en-US" dirty="0"/>
-              <a:t>Visualizing geospatial data using python - </a:t>
-            </a:r>
-            <a:r>
-              <a:rPr lang="en-US" dirty="0">
+              <a:rPr lang="en-US" sz="1200" dirty="0"/>
+              <a:t>Visualizing geospatial data using python </a:t>
+            </a:r>
+            <a:br>
+              <a:rPr lang="en-US" sz="1200" dirty="0"/>
+            </a:br>
+            <a:r>
+              <a:rPr lang="en-US" sz="1200" dirty="0"/>
+              <a:t>- </a:t>
+            </a:r>
+            <a:r>
+              <a:rPr lang="en-US" sz="1200" dirty="0">
                 <a:hlinkClick r:id="rId6"/>
               </a:rPr>
               <a:t>https://towardsdatascience.com/visualizing-geospatial-data-in-python-e070374fe621</a:t>
             </a:r>
             <a:r>
-              <a:rPr lang="en-US" dirty="0"/>
+              <a:rPr lang="en-US" sz="1200" dirty="0"/>
               <a:t> </a:t>
             </a:r>
           </a:p>
@@ -17417,17 +21031,24 @@
               <a:buChar char="•"/>
             </a:pPr>
             <a:r>
-              <a:rPr lang="en-US" dirty="0"/>
-              <a:t>ATLIST – create custom Google maps - </a:t>
-            </a:r>
-            <a:r>
-              <a:rPr lang="en-US" dirty="0">
+              <a:rPr lang="en-US" sz="1200" dirty="0"/>
+              <a:t>ATLIST – create custom Google maps </a:t>
+            </a:r>
+            <a:br>
+              <a:rPr lang="en-US" sz="1200" dirty="0"/>
+            </a:br>
+            <a:r>
+              <a:rPr lang="en-US" sz="1200" dirty="0"/>
+              <a:t>- </a:t>
+            </a:r>
+            <a:r>
+              <a:rPr lang="en-US" sz="1200" dirty="0">
                 <a:hlinkClick r:id="rId7"/>
               </a:rPr>
               <a:t>https://www.atlistmaps.com/</a:t>
             </a:r>
             <a:r>
-              <a:rPr lang="en-US" dirty="0"/>
+              <a:rPr lang="en-US" sz="1200" dirty="0"/>
               <a:t> </a:t>
             </a:r>
           </a:p>
@@ -17437,7 +21058,7 @@
               <a:buChar char="•"/>
             </a:pPr>
             <a:r>
-              <a:rPr lang="en-US" dirty="0"/>
+              <a:rPr lang="en-US" sz="1200" dirty="0"/>
               <a:t>Course: Python for Spatial Data Analysis with Earth Engine and QGIS</a:t>
             </a:r>
           </a:p>
@@ -17447,17 +21068,17 @@
               <a:buChar char="•"/>
             </a:pPr>
             <a:r>
-              <a:rPr lang="en-US" dirty="0"/>
+              <a:rPr lang="en-US" sz="1200" dirty="0"/>
               <a:t> - </a:t>
             </a:r>
             <a:r>
-              <a:rPr lang="en-US" dirty="0">
+              <a:rPr lang="en-US" sz="1200" dirty="0">
                 <a:hlinkClick r:id="rId8"/>
               </a:rPr>
               <a:t>https://www.udemy.com/course/python-for-spatial-data-analysis-with-earth-engine-and-qgis/</a:t>
             </a:r>
             <a:r>
-              <a:rPr lang="en-US" dirty="0"/>
+              <a:rPr lang="en-US" sz="1200" dirty="0"/>
               <a:t> </a:t>
             </a:r>
           </a:p>
@@ -17467,8 +21088,8 @@
               <a:buChar char="•"/>
             </a:pPr>
             <a:r>
-              <a:rPr lang="en-US" dirty="0"/>
-              <a:t>...</a:t>
+              <a:rPr lang="en-US" sz="1200" dirty="0"/>
+              <a:t>---</a:t>
             </a:r>
           </a:p>
         </p:txBody>
@@ -17501,7 +21122,7 @@
         </p:blipFill>
         <p:spPr>
           <a:xfrm>
-            <a:off x="7772399" y="4933673"/>
+            <a:off x="9491471" y="4933673"/>
             <a:ext cx="2150782" cy="1926569"/>
           </a:xfrm>
           <a:prstGeom prst="rect">
@@ -17537,7 +21158,7 @@
         </p:blipFill>
         <p:spPr>
           <a:xfrm>
-            <a:off x="7664428" y="3089286"/>
+            <a:off x="9383500" y="3223398"/>
             <a:ext cx="2366723" cy="1652740"/>
           </a:xfrm>
           <a:prstGeom prst="rect">
@@ -17559,8 +21180,8 @@
         </p:nvSpPr>
         <p:spPr>
           <a:xfrm>
-            <a:off x="161365" y="3115000"/>
-            <a:ext cx="6373906" cy="2246769"/>
+            <a:off x="4034081" y="3851309"/>
+            <a:ext cx="5134303" cy="2739211"/>
           </a:xfrm>
           <a:prstGeom prst="rect">
             <a:avLst/>
@@ -17574,17 +21195,34 @@
           <a:lstStyle/>
           <a:p>
             <a:r>
-              <a:rPr lang="en-US" dirty="0"/>
-              <a:t>How Navigation Apps work ? (Waze, etc.)</a:t>
-            </a:r>
-          </a:p>
-          <a:p>
-            <a:r>
-              <a:rPr lang="en-US" dirty="0"/>
+              <a:rPr lang="en-US" sz="2000" b="1" dirty="0">
+                <a:solidFill>
+                  <a:srgbClr val="0070C0"/>
+                </a:solidFill>
+              </a:rPr>
+              <a:t>How Navigation Apps work ? </a:t>
+            </a:r>
+          </a:p>
+          <a:p>
+            <a:r>
+              <a:rPr lang="en-US" sz="2000" b="1" dirty="0">
+                <a:solidFill>
+                  <a:srgbClr val="0070C0"/>
+                </a:solidFill>
+              </a:rPr>
+              <a:t>(Waze, etc.)</a:t>
+            </a:r>
+          </a:p>
+          <a:p>
+            <a:endParaRPr lang="en-US" sz="1200" dirty="0"/>
+          </a:p>
+          <a:p>
+            <a:r>
+              <a:rPr lang="en-US" sz="1200" dirty="0"/>
               <a:t>It is the </a:t>
             </a:r>
             <a:r>
-              <a:rPr lang="en-US" b="1" dirty="0">
+              <a:rPr lang="en-US" sz="1200" b="1" dirty="0">
                 <a:solidFill>
                   <a:srgbClr val="0070C0"/>
                 </a:solidFill>
@@ -17592,33 +21230,33 @@
               <a:t>Shortest Path Problem</a:t>
             </a:r>
             <a:r>
-              <a:rPr lang="en-US" dirty="0"/>
+              <a:rPr lang="en-US" sz="1200" dirty="0"/>
               <a:t> </a:t>
             </a:r>
             <a:br>
-              <a:rPr lang="en-US" dirty="0"/>
+              <a:rPr lang="en-US" sz="1200" dirty="0"/>
             </a:br>
             <a:r>
-              <a:rPr lang="en-US" dirty="0"/>
+              <a:rPr lang="en-US" sz="1200" dirty="0"/>
               <a:t> - </a:t>
             </a:r>
             <a:r>
-              <a:rPr lang="en-US" dirty="0">
+              <a:rPr lang="en-US" sz="1200" dirty="0">
                 <a:hlinkClick r:id="rId11"/>
               </a:rPr>
               <a:t>https://en.wikipedia.org/wiki/Shortest_path_problem</a:t>
             </a:r>
             <a:r>
-              <a:rPr lang="en-US" dirty="0"/>
+              <a:rPr lang="en-US" sz="1200" dirty="0"/>
               <a:t> </a:t>
             </a:r>
           </a:p>
           <a:p>
-            <a:endParaRPr lang="en-US" dirty="0"/>
-          </a:p>
-          <a:p>
-            <a:r>
-              <a:rPr lang="en-US" dirty="0"/>
+            <a:endParaRPr lang="en-US" sz="1200" dirty="0"/>
+          </a:p>
+          <a:p>
+            <a:r>
+              <a:rPr lang="en-US" sz="1200" dirty="0"/>
               <a:t>See also:</a:t>
             </a:r>
           </a:p>
@@ -17628,17 +21266,24 @@
               <a:buChar char="•"/>
             </a:pPr>
             <a:r>
-              <a:rPr lang="en-US" dirty="0"/>
-              <a:t>Dijkstra's algorithm – </a:t>
-            </a:r>
-            <a:r>
-              <a:rPr lang="en-US" dirty="0">
+              <a:rPr lang="en-US" sz="1200" dirty="0"/>
+              <a:t>Dijkstra's algorithm </a:t>
+            </a:r>
+            <a:br>
+              <a:rPr lang="en-US" sz="1200" dirty="0"/>
+            </a:br>
+            <a:r>
+              <a:rPr lang="en-US" sz="1200" dirty="0"/>
+              <a:t> - </a:t>
+            </a:r>
+            <a:r>
+              <a:rPr lang="en-US" sz="1200" dirty="0">
                 <a:hlinkClick r:id="rId12"/>
               </a:rPr>
               <a:t>https://en.wikipedia.org/wiki/Dijkstra%27s_algorithm</a:t>
             </a:r>
             <a:r>
-              <a:rPr lang="en-US" dirty="0"/>
+              <a:rPr lang="en-US" sz="1200" dirty="0"/>
               <a:t> </a:t>
             </a:r>
           </a:p>
@@ -17648,17 +21293,24 @@
               <a:buChar char="•"/>
             </a:pPr>
             <a:r>
-              <a:rPr lang="en-US" dirty="0"/>
-              <a:t>A* search algorithm - </a:t>
-            </a:r>
-            <a:r>
-              <a:rPr lang="en-US" dirty="0">
+              <a:rPr lang="en-US" sz="1200" dirty="0"/>
+              <a:t>A* search algorithm </a:t>
+            </a:r>
+            <a:br>
+              <a:rPr lang="en-US" sz="1200" dirty="0"/>
+            </a:br>
+            <a:r>
+              <a:rPr lang="en-US" sz="1200" dirty="0"/>
+              <a:t> - </a:t>
+            </a:r>
+            <a:r>
+              <a:rPr lang="en-US" sz="1200" dirty="0">
                 <a:hlinkClick r:id="rId13"/>
               </a:rPr>
               <a:t>https://en.wikipedia.org/wiki/A*_search_algorithm</a:t>
             </a:r>
             <a:r>
-              <a:rPr lang="en-US" dirty="0"/>
+              <a:rPr lang="en-US" sz="1200" dirty="0"/>
               <a:t> </a:t>
             </a:r>
           </a:p>
@@ -17668,106 +21320,35 @@
               <a:buChar char="•"/>
             </a:pPr>
             <a:r>
-              <a:rPr lang="en-US" dirty="0"/>
+              <a:rPr lang="en-US" sz="1200" dirty="0"/>
               <a:t>How GPC calculates routes (2011, basically A* algorithm)</a:t>
             </a:r>
             <a:br>
-              <a:rPr lang="en-US" dirty="0"/>
+              <a:rPr lang="en-US" sz="1200" dirty="0"/>
             </a:br>
             <a:r>
-              <a:rPr lang="en-US" dirty="0"/>
+              <a:rPr lang="en-US" sz="1200" dirty="0"/>
               <a:t> - </a:t>
             </a:r>
             <a:r>
-              <a:rPr lang="en-US" dirty="0">
+              <a:rPr lang="en-US" sz="1200" dirty="0">
                 <a:hlinkClick r:id="rId14"/>
               </a:rPr>
               <a:t>http://blog.kdgregory.com/2011/12/how-gps-calculates-routes.html</a:t>
             </a:r>
             <a:r>
-              <a:rPr lang="en-US" dirty="0"/>
-              <a:t> </a:t>
-            </a:r>
-          </a:p>
-          <a:p>
-            <a:endParaRPr lang="en-US" dirty="0"/>
+              <a:rPr lang="en-US" sz="1200" dirty="0"/>
+              <a:t>  </a:t>
+            </a:r>
           </a:p>
         </p:txBody>
       </p:sp>
-      <p:cxnSp>
-        <p:nvCxnSpPr>
-          <p:cNvPr id="7" name="Straight Connector 6">
+      <p:sp>
+        <p:nvSpPr>
+          <p:cNvPr id="6" name="TextBox 5">
             <a:extLst>
               <a:ext uri="{FF2B5EF4-FFF2-40B4-BE49-F238E27FC236}">
-                <a16:creationId xmlns:a16="http://schemas.microsoft.com/office/drawing/2014/main" id="{B70F33B7-F485-A74F-99E8-2CA30CFD6DCB}"/>
-              </a:ext>
-            </a:extLst>
-          </p:cNvPr>
-          <p:cNvCxnSpPr>
-            <a:cxnSpLocks/>
-          </p:cNvCxnSpPr>
-          <p:nvPr/>
-        </p:nvCxnSpPr>
-        <p:spPr>
-          <a:xfrm>
-            <a:off x="161365" y="2944905"/>
-            <a:ext cx="11672047" cy="0"/>
-          </a:xfrm>
-          <a:prstGeom prst="line">
-            <a:avLst/>
-          </a:prstGeom>
-        </p:spPr>
-        <p:style>
-          <a:lnRef idx="1">
-            <a:schemeClr val="accent1"/>
-          </a:lnRef>
-          <a:fillRef idx="0">
-            <a:schemeClr val="accent1"/>
-          </a:fillRef>
-          <a:effectRef idx="0">
-            <a:schemeClr val="accent1"/>
-          </a:effectRef>
-          <a:fontRef idx="minor">
-            <a:schemeClr val="tx1"/>
-          </a:fontRef>
-        </p:style>
-      </p:cxnSp>
-    </p:spTree>
-    <p:extLst>
-      <p:ext uri="{BB962C8B-B14F-4D97-AF65-F5344CB8AC3E}">
-        <p14:creationId xmlns:p14="http://schemas.microsoft.com/office/powerpoint/2010/main" val="2479633152"/>
-      </p:ext>
-    </p:extLst>
-  </p:cSld>
-  <p:clrMapOvr>
-    <a:masterClrMapping/>
-  </p:clrMapOvr>
-</p:sld>
-</file>
-
-<file path=ppt/slides/slide8.xml><?xml version="1.0" encoding="utf-8"?>
-<p:sld xmlns:a="http://schemas.openxmlformats.org/drawingml/2006/main" xmlns:r="http://schemas.openxmlformats.org/officeDocument/2006/relationships" xmlns:p="http://schemas.openxmlformats.org/presentationml/2006/main">
-  <p:cSld>
-    <p:spTree>
-      <p:nvGrpSpPr>
-        <p:cNvPr id="1" name=""/>
-        <p:cNvGrpSpPr/>
-        <p:nvPr/>
-      </p:nvGrpSpPr>
-      <p:grpSpPr>
-        <a:xfrm>
-          <a:off x="0" y="0"/>
-          <a:ext cx="0" cy="0"/>
-          <a:chOff x="0" y="0"/>
-          <a:chExt cx="0" cy="0"/>
-        </a:xfrm>
-      </p:grpSpPr>
-      <p:sp>
-        <p:nvSpPr>
-          <p:cNvPr id="4" name="TextBox 3">
-            <a:extLst>
-              <a:ext uri="{FF2B5EF4-FFF2-40B4-BE49-F238E27FC236}">
-                <a16:creationId xmlns:a16="http://schemas.microsoft.com/office/drawing/2014/main" id="{F913C6ED-646F-6040-8078-AC119F6D23BB}"/>
+                <a16:creationId xmlns:a16="http://schemas.microsoft.com/office/drawing/2014/main" id="{7EF50A49-DE0C-D14B-95AB-862555CFD625}"/>
               </a:ext>
             </a:extLst>
           </p:cNvPr>
@@ -17776,8 +21357,8 @@
         </p:nvSpPr>
         <p:spPr>
           <a:xfrm>
-            <a:off x="591671" y="681318"/>
-            <a:ext cx="6884894" cy="3970318"/>
+            <a:off x="0" y="25945"/>
+            <a:ext cx="2935403" cy="461665"/>
           </a:xfrm>
           <a:prstGeom prst="rect">
             <a:avLst/>
@@ -17791,324 +21372,16 @@
           <a:lstStyle/>
           <a:p>
             <a:r>
-              <a:rPr lang="en-US" dirty="0"/>
-              <a:t>Using Spark</a:t>
-            </a:r>
-          </a:p>
-          <a:p>
-            <a:endParaRPr lang="en-US" dirty="0"/>
-          </a:p>
-          <a:p>
-            <a:r>
-              <a:rPr lang="en-US" dirty="0"/>
-              <a:t>https://</a:t>
-            </a:r>
-            <a:r>
-              <a:rPr lang="en-US" dirty="0" err="1"/>
-              <a:t>www.geospark.io</a:t>
-            </a:r>
-            <a:r>
-              <a:rPr lang="en-US" dirty="0"/>
-              <a:t>/</a:t>
-            </a:r>
-          </a:p>
-          <a:p>
-            <a:endParaRPr lang="en-US" dirty="0"/>
-          </a:p>
-          <a:p>
-            <a:r>
-              <a:rPr lang="en-US" dirty="0"/>
-              <a:t>https://</a:t>
-            </a:r>
-            <a:r>
-              <a:rPr lang="en-US" dirty="0" err="1"/>
-              <a:t>pypi.org</a:t>
-            </a:r>
-            <a:r>
-              <a:rPr lang="en-US" dirty="0"/>
-              <a:t>/project/</a:t>
-            </a:r>
-            <a:r>
-              <a:rPr lang="en-US" dirty="0" err="1"/>
-              <a:t>geospark</a:t>
-            </a:r>
-            <a:r>
-              <a:rPr lang="en-US" dirty="0"/>
-              <a:t>/</a:t>
-            </a:r>
-          </a:p>
-          <a:p>
-            <a:endParaRPr lang="en-US" dirty="0"/>
-          </a:p>
-          <a:p>
-            <a:r>
-              <a:rPr lang="en-US" dirty="0"/>
-              <a:t>https://</a:t>
-            </a:r>
-            <a:r>
-              <a:rPr lang="en-US" dirty="0" err="1"/>
-              <a:t>cran.r-project.org</a:t>
-            </a:r>
-            <a:r>
-              <a:rPr lang="en-US" dirty="0"/>
-              <a:t>/web/packages/</a:t>
-            </a:r>
-            <a:r>
-              <a:rPr lang="en-US" dirty="0" err="1"/>
-              <a:t>geospark</a:t>
-            </a:r>
-            <a:r>
-              <a:rPr lang="en-US" dirty="0"/>
-              <a:t>/</a:t>
-            </a:r>
-            <a:r>
-              <a:rPr lang="en-US" dirty="0" err="1"/>
-              <a:t>index.html</a:t>
-            </a:r>
-            <a:endParaRPr lang="en-US" dirty="0"/>
-          </a:p>
-          <a:p>
-            <a:endParaRPr lang="en-US" dirty="0"/>
-          </a:p>
-          <a:p>
-            <a:r>
-              <a:rPr lang="en-US" dirty="0"/>
-              <a:t>spark within synapse ?</a:t>
-            </a:r>
-          </a:p>
-          <a:p>
-            <a:endParaRPr lang="en-US" dirty="0"/>
-          </a:p>
-          <a:p>
-            <a:r>
-              <a:rPr lang="en-US" dirty="0"/>
-              <a:t>large spatial data </a:t>
-            </a:r>
-            <a:r>
-              <a:rPr lang="en-US" dirty="0" err="1"/>
-              <a:t>accros</a:t>
-            </a:r>
-            <a:r>
-              <a:rPr lang="en-US" dirty="0"/>
-              <a:t> machines</a:t>
-            </a:r>
-          </a:p>
-          <a:p>
-            <a:endParaRPr lang="en-US" dirty="0"/>
-          </a:p>
-          <a:p>
-            <a:r>
-              <a:rPr lang="en-US" dirty="0"/>
-              <a:t>https://</a:t>
-            </a:r>
-            <a:r>
-              <a:rPr lang="en-US" dirty="0" err="1"/>
-              <a:t>rasterframes.io</a:t>
-            </a:r>
-            <a:r>
-              <a:rPr lang="en-US" dirty="0"/>
-              <a:t>/</a:t>
-            </a:r>
-          </a:p>
-          <a:p>
-            <a:endParaRPr lang="en-US" dirty="0"/>
-          </a:p>
-          <a:p>
-            <a:r>
-              <a:rPr lang="en-US" dirty="0">
-                <a:hlinkClick r:id="rId2"/>
-              </a:rPr>
-              <a:t>https://www.geomesa.org/</a:t>
-            </a:r>
-            <a:endParaRPr lang="en-US" dirty="0"/>
-          </a:p>
-          <a:p>
-            <a:endParaRPr lang="en-US" dirty="0"/>
-          </a:p>
-          <a:p>
-            <a:r>
-              <a:rPr lang="en-US" dirty="0"/>
-              <a:t>https://</a:t>
-            </a:r>
-            <a:r>
-              <a:rPr lang="en-US" dirty="0" err="1"/>
-              <a:t>www.opengeohub.org</a:t>
-            </a:r>
-            <a:r>
-              <a:rPr lang="en-US" dirty="0"/>
-              <a:t>/machine-learning-spatial-data</a:t>
-            </a:r>
-          </a:p>
-          <a:p>
-            <a:endParaRPr lang="en-US" dirty="0"/>
+              <a:rPr lang="en-US" sz="2400" b="1" dirty="0"/>
+              <a:t>Related Resources</a:t>
+            </a:r>
           </a:p>
         </p:txBody>
       </p:sp>
     </p:spTree>
     <p:extLst>
       <p:ext uri="{BB962C8B-B14F-4D97-AF65-F5344CB8AC3E}">
-        <p14:creationId xmlns:p14="http://schemas.microsoft.com/office/powerpoint/2010/main" val="2976157758"/>
-      </p:ext>
-    </p:extLst>
-  </p:cSld>
-  <p:clrMapOvr>
-    <a:masterClrMapping/>
-  </p:clrMapOvr>
-</p:sld>
-</file>
-
-<file path=ppt/slides/slide9.xml><?xml version="1.0" encoding="utf-8"?>
-<p:sld xmlns:a="http://schemas.openxmlformats.org/drawingml/2006/main" xmlns:r="http://schemas.openxmlformats.org/officeDocument/2006/relationships" xmlns:p="http://schemas.openxmlformats.org/presentationml/2006/main">
-  <p:cSld>
-    <p:spTree>
-      <p:nvGrpSpPr>
-        <p:cNvPr id="1" name=""/>
-        <p:cNvGrpSpPr/>
-        <p:nvPr/>
-      </p:nvGrpSpPr>
-      <p:grpSpPr>
-        <a:xfrm>
-          <a:off x="0" y="0"/>
-          <a:ext cx="0" cy="0"/>
-          <a:chOff x="0" y="0"/>
-          <a:chExt cx="0" cy="0"/>
-        </a:xfrm>
-      </p:grpSpPr>
-      <p:sp>
-        <p:nvSpPr>
-          <p:cNvPr id="2" name="TextBox 1">
-            <a:extLst>
-              <a:ext uri="{FF2B5EF4-FFF2-40B4-BE49-F238E27FC236}">
-                <a16:creationId xmlns:a16="http://schemas.microsoft.com/office/drawing/2014/main" id="{01A3B75B-06F4-9045-940A-F9A4F7A990BD}"/>
-              </a:ext>
-            </a:extLst>
-          </p:cNvPr>
-          <p:cNvSpPr txBox="1"/>
-          <p:nvPr/>
-        </p:nvSpPr>
-        <p:spPr>
-          <a:xfrm>
-            <a:off x="344774" y="239843"/>
-            <a:ext cx="4916774" cy="307777"/>
-          </a:xfrm>
-          <a:prstGeom prst="rect">
-            <a:avLst/>
-          </a:prstGeom>
-          <a:noFill/>
-        </p:spPr>
-        <p:txBody>
-          <a:bodyPr wrap="square" rtlCol="0">
-            <a:spAutoFit/>
-          </a:bodyPr>
-          <a:lstStyle/>
-          <a:p>
-            <a:r>
-              <a:rPr lang="en-US" dirty="0"/>
-              <a:t>Azure and Geo Spatial</a:t>
-            </a:r>
-          </a:p>
-        </p:txBody>
-      </p:sp>
-      <p:sp>
-        <p:nvSpPr>
-          <p:cNvPr id="3" name="TextBox 2">
-            <a:extLst>
-              <a:ext uri="{FF2B5EF4-FFF2-40B4-BE49-F238E27FC236}">
-                <a16:creationId xmlns:a16="http://schemas.microsoft.com/office/drawing/2014/main" id="{BF6A5ACD-BE25-9E4D-8082-C733161F743A}"/>
-              </a:ext>
-            </a:extLst>
-          </p:cNvPr>
-          <p:cNvSpPr txBox="1"/>
-          <p:nvPr/>
-        </p:nvSpPr>
-        <p:spPr>
-          <a:xfrm>
-            <a:off x="599607" y="1199213"/>
-            <a:ext cx="7959777" cy="1815882"/>
-          </a:xfrm>
-          <a:prstGeom prst="rect">
-            <a:avLst/>
-          </a:prstGeom>
-          <a:noFill/>
-        </p:spPr>
-        <p:txBody>
-          <a:bodyPr wrap="square" rtlCol="0">
-            <a:spAutoFit/>
-          </a:bodyPr>
-          <a:lstStyle/>
-          <a:p>
-            <a:endParaRPr lang="en-US" dirty="0"/>
-          </a:p>
-          <a:p>
-            <a:r>
-              <a:rPr lang="en-US" dirty="0"/>
-              <a:t>    https://</a:t>
-            </a:r>
-            <a:r>
-              <a:rPr lang="en-US" dirty="0" err="1"/>
-              <a:t>azure.microsoft.com</a:t>
-            </a:r>
-            <a:r>
-              <a:rPr lang="en-US" dirty="0"/>
-              <a:t>/</a:t>
-            </a:r>
-            <a:r>
-              <a:rPr lang="en-US" dirty="0" err="1"/>
-              <a:t>en</a:t>
-            </a:r>
-            <a:r>
-              <a:rPr lang="en-US" dirty="0"/>
-              <a:t>-us/services/azure-maps/</a:t>
-            </a:r>
-          </a:p>
-          <a:p>
-            <a:endParaRPr lang="en-US" dirty="0"/>
-          </a:p>
-          <a:p>
-            <a:r>
-              <a:rPr lang="en-US" dirty="0"/>
-              <a:t>    https://</a:t>
-            </a:r>
-            <a:r>
-              <a:rPr lang="en-US" dirty="0" err="1"/>
-              <a:t>towardsdatascience.com</a:t>
-            </a:r>
-            <a:r>
-              <a:rPr lang="en-US" dirty="0"/>
-              <a:t>/geospatial-big-data-performance-tests-with-cosmos-db-and-data-enrichment-with-azure-synapse-257db7d29e41</a:t>
-            </a:r>
-          </a:p>
-          <a:p>
-            <a:endParaRPr lang="en-US" dirty="0"/>
-          </a:p>
-          <a:p>
-            <a:r>
-              <a:rPr lang="en-US" dirty="0"/>
-              <a:t>    https://</a:t>
-            </a:r>
-            <a:r>
-              <a:rPr lang="en-US" dirty="0" err="1"/>
-              <a:t>azure.microsoft.com</a:t>
-            </a:r>
-            <a:r>
-              <a:rPr lang="en-US" dirty="0"/>
-              <a:t>/</a:t>
-            </a:r>
-            <a:r>
-              <a:rPr lang="en-US" dirty="0" err="1"/>
-              <a:t>fr-fr</a:t>
-            </a:r>
-            <a:r>
-              <a:rPr lang="en-US" dirty="0"/>
-              <a:t>/blog/new-in-azure-stream-analytics-geospatial-functions-custom-code-and-lots-more/</a:t>
-            </a:r>
-          </a:p>
-        </p:txBody>
-      </p:sp>
-    </p:spTree>
-    <p:extLst>
-      <p:ext uri="{BB962C8B-B14F-4D97-AF65-F5344CB8AC3E}">
-        <p14:creationId xmlns:p14="http://schemas.microsoft.com/office/powerpoint/2010/main" val="3404279295"/>
+        <p14:creationId xmlns:p14="http://schemas.microsoft.com/office/powerpoint/2010/main" val="1785658914"/>
       </p:ext>
     </p:extLst>
   </p:cSld>
